--- a/presentations/Presentation3_GI_Segmentation.pptx
+++ b/presentations/Presentation3_GI_Segmentation.pptx
@@ -4,20 +4,21 @@
   <p:sldMasterIdLst>
     <p:sldMasterId id="2147483648" r:id="rId1"/>
   </p:sldMasterIdLst>
+  <p:notesMasterIdLst>
+    <p:notesMasterId r:id="rId11"/>
+  </p:notesMasterIdLst>
   <p:sldIdLst>
     <p:sldId id="256" r:id="rId2"/>
     <p:sldId id="257" r:id="rId3"/>
     <p:sldId id="258" r:id="rId4"/>
     <p:sldId id="259" r:id="rId5"/>
     <p:sldId id="260" r:id="rId6"/>
-    <p:sldId id="261" r:id="rId7"/>
-    <p:sldId id="262" r:id="rId8"/>
-    <p:sldId id="263" r:id="rId9"/>
+    <p:sldId id="264" r:id="rId7"/>
+    <p:sldId id="261" r:id="rId8"/>
+    <p:sldId id="262" r:id="rId9"/>
+    <p:sldId id="266" r:id="rId10"/>
   </p:sldIdLst>
-  <p:notesMasterIdLst>
-    <p:notesMasterId r:id="rId10"/>
-  </p:notesMasterIdLst>
-  <p:sldSz cx="9144000" cy="5143500"/>
+  <p:sldSz cx="9144000" cy="5143500" type="screen16x9"/>
   <p:notesSz cx="5143500" cy="9144000"/>
   <p:defaultTextStyle>
     <a:lvl1pPr marL="0" algn="l" defTabSz="914400" rtl="0" eaLnBrk="1" latinLnBrk="0" hangingPunct="1">
@@ -111,805 +112,21 @@
       </a:defRPr>
     </a:lvl9pPr>
   </p:defaultTextStyle>
+  <p:extLst>
+    <p:ext uri="{EFAFB233-063F-42B5-8137-9DF3F51BA10A}">
+      <p15:sldGuideLst xmlns:p15="http://schemas.microsoft.com/office/powerpoint/2012/main"/>
+    </p:ext>
+  </p:extLst>
 </p:presentation>
 </file>
 
-<file path=ppt/charts/chart1.xml><?xml version="1.0" encoding="utf-8"?>
-<c:chartSpace xmlns:c="http://schemas.openxmlformats.org/drawingml/2006/chart" xmlns:a="http://schemas.openxmlformats.org/drawingml/2006/main" xmlns:r="http://schemas.openxmlformats.org/officeDocument/2006/relationships">
-  <c:date1904 val="0"/>
-  <c:roundedCorners val="1"/>
-  <c:chart>
-    <c:title>
-      <c:tx>
-        <c:rich>
-          <a:bodyPr/>
-          <a:lstStyle/>
-          <a:p>
-            <a:pPr>
-              <a:defRPr sz="1200" b="0" i="0" u="none" strike="noStrike">
-                <a:solidFill>
-                  <a:srgbClr val="1A1A1A"/>
-                </a:solidFill>
-                <a:latin typeface="Arial"/>
-              </a:defRPr>
-            </a:pPr>
-            <a:r>
-              <a:rPr sz="1200" b="0" i="0" u="none" strike="noStrike">
-                <a:solidFill>
-                  <a:srgbClr val="1A1A1A"/>
-                </a:solidFill>
-                <a:latin typeface="Arial"/>
-              </a:rPr>
-              <a:t>BCE Loss — Training vs. Validation (30 Epochs)</a:t>
-            </a:r>
-          </a:p>
-        </c:rich>
-      </c:tx>
-      <c:layout/>
-      <c:overlay val="0"/>
-    </c:title>
-    <c:autoTitleDeleted val="0"/>
-    <c:plotArea>
-      <c:layout/>
-      <c:lineChart>
-        <c:varyColors val="0"/>
-        <c:ser>
-          <c:idx val="0"/>
-          <c:order val="0"/>
-          <c:tx>
-            <c:strRef>
-              <c:f>Sheet1!$B$1</c:f>
-              <c:strCache>
-                <c:ptCount val="1"/>
-                <c:pt idx="0">
-                  <c:v>Training Loss</c:v>
-                </c:pt>
-              </c:strCache>
-            </c:strRef>
-          </c:tx>
-          <c:spPr>
-            <a:solidFill>
-              <a:srgbClr val="6B1E3C"/>
-            </a:solidFill>
-            <a:ln w="31750" cap="flat">
-              <a:solidFill>
-                <a:srgbClr val="6B1E3C"/>
-              </a:solidFill>
-              <a:prstDash val="solid"/>
-              <a:round/>
-            </a:ln>
-            <a:effectLst/>
-          </c:spPr>
-          <c:invertIfNegative val="0"/>
-          <c:dLbls>
-            <c:numFmt formatCode="#,##0" sourceLinked="0"/>
-            <c:txPr>
-              <a:bodyPr/>
-              <a:lstStyle/>
-              <a:p>
-                <a:pPr>
-                  <a:defRPr b="0" i="0" strike="noStrike" sz="1200" u="none">
-                    <a:solidFill>
-                      <a:srgbClr val="000000"/>
-                    </a:solidFill>
-                    <a:latin typeface="Arial"/>
-                  </a:defRPr>
-                </a:pPr>
-              </a:p>
-            </c:txPr>
-            <c:showLegendKey val="0"/>
-            <c:showVal val="0"/>
-            <c:showCatName val="0"/>
-            <c:showSerName val="0"/>
-            <c:showPercent val="0"/>
-            <c:showBubbleSize val="0"/>
-            <c:showLeaderLines val="0"/>
-          </c:dLbls>
-          <c:marker>
-            <c:symbol val="circle"/>
-            <c:size val="6"/>
-            <c:spPr>
-              <a:solidFill>
-                <a:srgbClr val="6B1E3C"/>
-              </a:solidFill>
-              <a:ln w="9525" cap="flat">
-                <a:solidFill>
-                  <a:srgbClr val="6B1E3C"/>
-                </a:solidFill>
-                <a:prstDash val="solid"/>
-                <a:round/>
-              </a:ln>
-              <a:effectLst/>
-            </c:spPr>
-          </c:marker>
-          <c:cat>
-            <c:multiLvlStrRef>
-              <c:f>Sheet1!$A$2:$A$31</c:f>
-              <c:multiLvlStrCache>
-                <c:ptCount val="30"/>
-                <c:lvl>
-                  <c:pt idx="0">
-                    <c:v>1</c:v>
-                  </c:pt>
-                  <c:pt idx="1">
-                    <c:v>2</c:v>
-                  </c:pt>
-                  <c:pt idx="2">
-                    <c:v>3</c:v>
-                  </c:pt>
-                  <c:pt idx="3">
-                    <c:v>4</c:v>
-                  </c:pt>
-                  <c:pt idx="4">
-                    <c:v>5</c:v>
-                  </c:pt>
-                  <c:pt idx="5">
-                    <c:v>6</c:v>
-                  </c:pt>
-                  <c:pt idx="6">
-                    <c:v>7</c:v>
-                  </c:pt>
-                  <c:pt idx="7">
-                    <c:v>8</c:v>
-                  </c:pt>
-                  <c:pt idx="8">
-                    <c:v>9</c:v>
-                  </c:pt>
-                  <c:pt idx="9">
-                    <c:v>10</c:v>
-                  </c:pt>
-                  <c:pt idx="10">
-                    <c:v>11</c:v>
-                  </c:pt>
-                  <c:pt idx="11">
-                    <c:v>12</c:v>
-                  </c:pt>
-                  <c:pt idx="12">
-                    <c:v>13</c:v>
-                  </c:pt>
-                  <c:pt idx="13">
-                    <c:v>14</c:v>
-                  </c:pt>
-                  <c:pt idx="14">
-                    <c:v>15</c:v>
-                  </c:pt>
-                  <c:pt idx="15">
-                    <c:v>16</c:v>
-                  </c:pt>
-                  <c:pt idx="16">
-                    <c:v>17</c:v>
-                  </c:pt>
-                  <c:pt idx="17">
-                    <c:v>18</c:v>
-                  </c:pt>
-                  <c:pt idx="18">
-                    <c:v>19</c:v>
-                  </c:pt>
-                  <c:pt idx="19">
-                    <c:v>20</c:v>
-                  </c:pt>
-                  <c:pt idx="20">
-                    <c:v>21</c:v>
-                  </c:pt>
-                  <c:pt idx="21">
-                    <c:v>22</c:v>
-                  </c:pt>
-                  <c:pt idx="22">
-                    <c:v>23</c:v>
-                  </c:pt>
-                  <c:pt idx="23">
-                    <c:v>24</c:v>
-                  </c:pt>
-                  <c:pt idx="24">
-                    <c:v>25</c:v>
-                  </c:pt>
-                  <c:pt idx="25">
-                    <c:v>26</c:v>
-                  </c:pt>
-                  <c:pt idx="26">
-                    <c:v>27</c:v>
-                  </c:pt>
-                  <c:pt idx="27">
-                    <c:v>28</c:v>
-                  </c:pt>
-                  <c:pt idx="28">
-                    <c:v>29</c:v>
-                  </c:pt>
-                  <c:pt idx="29">
-                    <c:v>30</c:v>
-                  </c:pt>
-                </c:lvl>
-              </c:multiLvlStrCache>
-            </c:multiLvlStrRef>
-          </c:cat>
-          <c:val>
-            <c:numRef>
-              <c:f>Sheet1!$B$2:$B$31</c:f>
-              <c:numCache>
-                <c:formatCode>General</c:formatCode>
-                <c:ptCount val="30"/>
-                <c:pt idx="0">
-                  <c:v>0.698</c:v>
-                </c:pt>
-                <c:pt idx="1">
-                  <c:v>0.512</c:v>
-                </c:pt>
-                <c:pt idx="2">
-                  <c:v>0.389</c:v>
-                </c:pt>
-                <c:pt idx="3">
-                  <c:v>0.301</c:v>
-                </c:pt>
-                <c:pt idx="4">
-                  <c:v>0.248</c:v>
-                </c:pt>
-                <c:pt idx="5">
-                  <c:v>0.211</c:v>
-                </c:pt>
-                <c:pt idx="6">
-                  <c:v>0.185</c:v>
-                </c:pt>
-                <c:pt idx="7">
-                  <c:v>0.165</c:v>
-                </c:pt>
-                <c:pt idx="8">
-                  <c:v>0.15</c:v>
-                </c:pt>
-                <c:pt idx="9">
-                  <c:v>0.138</c:v>
-                </c:pt>
-                <c:pt idx="10">
-                  <c:v>0.129</c:v>
-                </c:pt>
-                <c:pt idx="11">
-                  <c:v>0.121</c:v>
-                </c:pt>
-                <c:pt idx="12">
-                  <c:v>0.115</c:v>
-                </c:pt>
-                <c:pt idx="13">
-                  <c:v>0.11</c:v>
-                </c:pt>
-                <c:pt idx="14">
-                  <c:v>0.105</c:v>
-                </c:pt>
-                <c:pt idx="15">
-                  <c:v>0.101</c:v>
-                </c:pt>
-                <c:pt idx="16">
-                  <c:v>0.098</c:v>
-                </c:pt>
-                <c:pt idx="17">
-                  <c:v>0.095</c:v>
-                </c:pt>
-                <c:pt idx="18">
-                  <c:v>0.093</c:v>
-                </c:pt>
-                <c:pt idx="19">
-                  <c:v>0.091</c:v>
-                </c:pt>
-                <c:pt idx="20">
-                  <c:v>0.089</c:v>
-                </c:pt>
-                <c:pt idx="21">
-                  <c:v>0.088</c:v>
-                </c:pt>
-                <c:pt idx="22">
-                  <c:v>0.087</c:v>
-                </c:pt>
-                <c:pt idx="23">
-                  <c:v>0.086</c:v>
-                </c:pt>
-                <c:pt idx="24">
-                  <c:v>0.085</c:v>
-                </c:pt>
-                <c:pt idx="25">
-                  <c:v>0.084</c:v>
-                </c:pt>
-                <c:pt idx="26">
-                  <c:v>0.083</c:v>
-                </c:pt>
-                <c:pt idx="27">
-                  <c:v>0.082</c:v>
-                </c:pt>
-                <c:pt idx="28">
-                  <c:v>0.082</c:v>
-                </c:pt>
-                <c:pt idx="29">
-                  <c:v>0.081</c:v>
-                </c:pt>
-              </c:numCache>
-            </c:numRef>
-          </c:val>
-          <c:smooth val="1"/>
-        </c:ser>
-        <c:ser>
-          <c:idx val="1"/>
-          <c:order val="1"/>
-          <c:tx>
-            <c:strRef>
-              <c:f>Sheet1!$C$1</c:f>
-              <c:strCache>
-                <c:ptCount val="1"/>
-                <c:pt idx="0">
-                  <c:v>Validation Loss</c:v>
-                </c:pt>
-              </c:strCache>
-            </c:strRef>
-          </c:tx>
-          <c:spPr>
-            <a:solidFill>
-              <a:srgbClr val="CEB888"/>
-            </a:solidFill>
-            <a:ln w="31750" cap="flat">
-              <a:solidFill>
-                <a:srgbClr val="CEB888"/>
-              </a:solidFill>
-              <a:prstDash val="solid"/>
-              <a:round/>
-            </a:ln>
-            <a:effectLst/>
-          </c:spPr>
-          <c:invertIfNegative val="0"/>
-          <c:dLbls>
-            <c:numFmt formatCode="#,##0" sourceLinked="0"/>
-            <c:txPr>
-              <a:bodyPr/>
-              <a:lstStyle/>
-              <a:p>
-                <a:pPr>
-                  <a:defRPr b="0" i="0" strike="noStrike" sz="1200" u="none">
-                    <a:solidFill>
-                      <a:srgbClr val="000000"/>
-                    </a:solidFill>
-                    <a:latin typeface="Arial"/>
-                  </a:defRPr>
-                </a:pPr>
-              </a:p>
-            </c:txPr>
-            <c:showLegendKey val="0"/>
-            <c:showVal val="0"/>
-            <c:showCatName val="0"/>
-            <c:showSerName val="0"/>
-            <c:showPercent val="0"/>
-            <c:showBubbleSize val="0"/>
-            <c:showLeaderLines val="0"/>
-          </c:dLbls>
-          <c:marker>
-            <c:symbol val="circle"/>
-            <c:size val="6"/>
-            <c:spPr>
-              <a:solidFill>
-                <a:srgbClr val="CEB888"/>
-              </a:solidFill>
-              <a:ln w="9525" cap="flat">
-                <a:solidFill>
-                  <a:srgbClr val="CEB888"/>
-                </a:solidFill>
-                <a:prstDash val="solid"/>
-                <a:round/>
-              </a:ln>
-              <a:effectLst/>
-            </c:spPr>
-          </c:marker>
-          <c:cat>
-            <c:multiLvlStrRef>
-              <c:f>Sheet1!$A$2:$A$31</c:f>
-              <c:multiLvlStrCache>
-                <c:ptCount val="30"/>
-                <c:lvl>
-                  <c:pt idx="0">
-                    <c:v>1</c:v>
-                  </c:pt>
-                  <c:pt idx="1">
-                    <c:v>2</c:v>
-                  </c:pt>
-                  <c:pt idx="2">
-                    <c:v>3</c:v>
-                  </c:pt>
-                  <c:pt idx="3">
-                    <c:v>4</c:v>
-                  </c:pt>
-                  <c:pt idx="4">
-                    <c:v>5</c:v>
-                  </c:pt>
-                  <c:pt idx="5">
-                    <c:v>6</c:v>
-                  </c:pt>
-                  <c:pt idx="6">
-                    <c:v>7</c:v>
-                  </c:pt>
-                  <c:pt idx="7">
-                    <c:v>8</c:v>
-                  </c:pt>
-                  <c:pt idx="8">
-                    <c:v>9</c:v>
-                  </c:pt>
-                  <c:pt idx="9">
-                    <c:v>10</c:v>
-                  </c:pt>
-                  <c:pt idx="10">
-                    <c:v>11</c:v>
-                  </c:pt>
-                  <c:pt idx="11">
-                    <c:v>12</c:v>
-                  </c:pt>
-                  <c:pt idx="12">
-                    <c:v>13</c:v>
-                  </c:pt>
-                  <c:pt idx="13">
-                    <c:v>14</c:v>
-                  </c:pt>
-                  <c:pt idx="14">
-                    <c:v>15</c:v>
-                  </c:pt>
-                  <c:pt idx="15">
-                    <c:v>16</c:v>
-                  </c:pt>
-                  <c:pt idx="16">
-                    <c:v>17</c:v>
-                  </c:pt>
-                  <c:pt idx="17">
-                    <c:v>18</c:v>
-                  </c:pt>
-                  <c:pt idx="18">
-                    <c:v>19</c:v>
-                  </c:pt>
-                  <c:pt idx="19">
-                    <c:v>20</c:v>
-                  </c:pt>
-                  <c:pt idx="20">
-                    <c:v>21</c:v>
-                  </c:pt>
-                  <c:pt idx="21">
-                    <c:v>22</c:v>
-                  </c:pt>
-                  <c:pt idx="22">
-                    <c:v>23</c:v>
-                  </c:pt>
-                  <c:pt idx="23">
-                    <c:v>24</c:v>
-                  </c:pt>
-                  <c:pt idx="24">
-                    <c:v>25</c:v>
-                  </c:pt>
-                  <c:pt idx="25">
-                    <c:v>26</c:v>
-                  </c:pt>
-                  <c:pt idx="26">
-                    <c:v>27</c:v>
-                  </c:pt>
-                  <c:pt idx="27">
-                    <c:v>28</c:v>
-                  </c:pt>
-                  <c:pt idx="28">
-                    <c:v>29</c:v>
-                  </c:pt>
-                  <c:pt idx="29">
-                    <c:v>30</c:v>
-                  </c:pt>
-                </c:lvl>
-              </c:multiLvlStrCache>
-            </c:multiLvlStrRef>
-          </c:cat>
-          <c:val>
-            <c:numRef>
-              <c:f>Sheet1!$C$2:$C$31</c:f>
-              <c:numCache>
-                <c:formatCode>General</c:formatCode>
-                <c:ptCount val="30"/>
-                <c:pt idx="0">
-                  <c:v>0.721</c:v>
-                </c:pt>
-                <c:pt idx="1">
-                  <c:v>0.548</c:v>
-                </c:pt>
-                <c:pt idx="2">
-                  <c:v>0.421</c:v>
-                </c:pt>
-                <c:pt idx="3">
-                  <c:v>0.338</c:v>
-                </c:pt>
-                <c:pt idx="4">
-                  <c:v>0.282</c:v>
-                </c:pt>
-                <c:pt idx="5">
-                  <c:v>0.245</c:v>
-                </c:pt>
-                <c:pt idx="6">
-                  <c:v>0.22</c:v>
-                </c:pt>
-                <c:pt idx="7">
-                  <c:v>0.201</c:v>
-                </c:pt>
-                <c:pt idx="8">
-                  <c:v>0.186</c:v>
-                </c:pt>
-                <c:pt idx="9">
-                  <c:v>0.174</c:v>
-                </c:pt>
-                <c:pt idx="10">
-                  <c:v>0.164</c:v>
-                </c:pt>
-                <c:pt idx="11">
-                  <c:v>0.156</c:v>
-                </c:pt>
-                <c:pt idx="12">
-                  <c:v>0.15</c:v>
-                </c:pt>
-                <c:pt idx="13">
-                  <c:v>0.145</c:v>
-                </c:pt>
-                <c:pt idx="14">
-                  <c:v>0.141</c:v>
-                </c:pt>
-                <c:pt idx="15">
-                  <c:v>0.138</c:v>
-                </c:pt>
-                <c:pt idx="16">
-                  <c:v>0.135</c:v>
-                </c:pt>
-                <c:pt idx="17">
-                  <c:v>0.133</c:v>
-                </c:pt>
-                <c:pt idx="18">
-                  <c:v>0.131</c:v>
-                </c:pt>
-                <c:pt idx="19">
-                  <c:v>0.13</c:v>
-                </c:pt>
-                <c:pt idx="20">
-                  <c:v>0.129</c:v>
-                </c:pt>
-                <c:pt idx="21">
-                  <c:v>0.128</c:v>
-                </c:pt>
-                <c:pt idx="22">
-                  <c:v>0.127</c:v>
-                </c:pt>
-                <c:pt idx="23">
-                  <c:v>0.127</c:v>
-                </c:pt>
-                <c:pt idx="24">
-                  <c:v>0.126</c:v>
-                </c:pt>
-                <c:pt idx="25">
-                  <c:v>0.126</c:v>
-                </c:pt>
-                <c:pt idx="26">
-                  <c:v>0.125</c:v>
-                </c:pt>
-                <c:pt idx="27">
-                  <c:v>0.125</c:v>
-                </c:pt>
-                <c:pt idx="28">
-                  <c:v>0.125</c:v>
-                </c:pt>
-                <c:pt idx="29">
-                  <c:v>0.124</c:v>
-                </c:pt>
-              </c:numCache>
-            </c:numRef>
-          </c:val>
-          <c:smooth val="1"/>
-        </c:ser>
-        <c:dLbls>
-          <c:numFmt formatCode="#,##0" sourceLinked="0"/>
-          <c:txPr>
-            <a:bodyPr/>
-            <a:lstStyle/>
-            <a:p>
-              <a:pPr>
-                <a:defRPr b="0" i="0" strike="noStrike" sz="1200" u="none">
-                  <a:solidFill>
-                    <a:srgbClr val="000000"/>
-                  </a:solidFill>
-                  <a:latin typeface="Arial"/>
-                </a:defRPr>
-              </a:pPr>
-            </a:p>
-          </c:txPr>
-          <c:showLegendKey val="0"/>
-          <c:showVal val="0"/>
-          <c:showCatName val="0"/>
-          <c:showSerName val="0"/>
-          <c:showPercent val="0"/>
-          <c:showBubbleSize val="0"/>
-          <c:showLeaderLines val="0"/>
-        </c:dLbls>
-        <c:marker val="1"/>
-        <c:axId val="2094734554"/>
-        <c:axId val="2094734552"/>
-        <c:axId val="2094734556"/>
-      </c:lineChart>
-      <c:catAx>
-        <c:axId val="2094734554"/>
-        <c:scaling>
-          <c:orientation val="minMax"/>
-        </c:scaling>
-        <c:delete val="0"/>
-        <c:axPos val="b"/>
-        <c:title>
-          <c:tx>
-            <c:rich>
-              <a:bodyPr/>
-              <a:lstStyle/>
-              <a:p>
-                <a:pPr>
-                  <a:defRPr b="0" i="0" u="none" strike="noStrike">
-                    <a:solidFill>
-                      <a:srgbClr val="000000"/>
-                    </a:solidFill>
-                    <a:latin typeface="Arial"/>
-                  </a:defRPr>
-                </a:pPr>
-                <a:r>
-                  <a:rPr b="0" i="0" u="none" strike="noStrike">
-                    <a:solidFill>
-                      <a:srgbClr val="000000"/>
-                    </a:solidFill>
-                    <a:latin typeface="Arial"/>
-                  </a:rPr>
-                  <a:t>Epoch</a:t>
-                </a:r>
-              </a:p>
-            </c:rich>
-          </c:tx>
-          <c:layout/>
-          <c:overlay val="0"/>
-        </c:title>
-        <c:numFmt formatCode="General" sourceLinked="1"/>
-        <c:majorTickMark val="out"/>
-        <c:minorTickMark val="none"/>
-        <c:tickLblPos val="low"/>
-        <c:spPr>
-          <a:ln w="12700" cap="flat">
-            <a:solidFill>
-              <a:srgbClr val="888888"/>
-            </a:solidFill>
-            <a:prstDash val="solid"/>
-            <a:round/>
-          </a:ln>
-        </c:spPr>
-        <c:txPr>
-          <a:bodyPr/>
-          <a:lstStyle/>
-          <a:p>
-            <a:pPr>
-              <a:defRPr sz="1200" b="0" i="0" u="none" strike="noStrike">
-                <a:solidFill>
-                  <a:srgbClr val="64748B"/>
-                </a:solidFill>
-                <a:latin typeface="Arial"/>
-              </a:defRPr>
-            </a:pPr>
-            <a:endParaRPr lang="en-US"/>
-          </a:p>
-        </c:txPr>
-        <c:crossAx val="2094734552"/>
-        <c:crosses val="autoZero"/>
-        <c:auto val="1"/>
-        <c:lblAlgn val="ctr"/>
-        <c:noMultiLvlLbl val="1"/>
-        <c:tickLblSkip val="5"/>
-      </c:catAx>
-      <c:valAx>
-        <c:axId val="2094734552"/>
-        <c:scaling>
-          <c:orientation val="minMax"/>
-        </c:scaling>
-        <c:delete val="0"/>
-        <c:axPos val="l"/>
-        <c:majorGridlines>
-          <c:spPr>
-            <a:ln w="6350" cap="flat">
-              <a:solidFill>
-                <a:srgbClr val="E2E8F0"/>
-              </a:solidFill>
-              <a:prstDash val="solid"/>
-              <a:round/>
-            </a:ln>
-          </c:spPr>
-        </c:majorGridlines>
-        <c:title>
-          <c:tx>
-            <c:rich>
-              <a:bodyPr/>
-              <a:lstStyle/>
-              <a:p>
-                <a:pPr>
-                  <a:defRPr b="0" i="0" u="none" strike="noStrike">
-                    <a:solidFill>
-                      <a:srgbClr val="000000"/>
-                    </a:solidFill>
-                    <a:latin typeface="Arial"/>
-                  </a:defRPr>
-                </a:pPr>
-                <a:r>
-                  <a:rPr b="0" i="0" u="none" strike="noStrike">
-                    <a:solidFill>
-                      <a:srgbClr val="000000"/>
-                    </a:solidFill>
-                    <a:latin typeface="Arial"/>
-                  </a:rPr>
-                  <a:t>Loss</a:t>
-                </a:r>
-              </a:p>
-            </c:rich>
-          </c:tx>
-          <c:layout/>
-          <c:overlay val="0"/>
-        </c:title>
-        <c:numFmt formatCode="General" sourceLinked="0"/>
-        <c:majorTickMark val="out"/>
-        <c:minorTickMark val="none"/>
-        <c:tickLblPos val="nextTo"/>
-        <c:spPr>
-          <a:ln w="12700" cap="flat">
-            <a:solidFill>
-              <a:srgbClr val="888888"/>
-            </a:solidFill>
-            <a:prstDash val="solid"/>
-            <a:round/>
-          </a:ln>
-        </c:spPr>
-        <c:txPr>
-          <a:bodyPr/>
-          <a:lstStyle/>
-          <a:p>
-            <a:pPr>
-              <a:defRPr sz="1200" b="0" i="0" u="none" strike="noStrike">
-                <a:solidFill>
-                  <a:srgbClr val="64748B"/>
-                </a:solidFill>
-                <a:latin typeface="Arial"/>
-              </a:defRPr>
-            </a:pPr>
-            <a:endParaRPr lang="en-US"/>
-          </a:p>
-        </c:txPr>
-        <c:crossAx val="2094734554"/>
-        <c:crosses val="autoZero"/>
-        <c:crossBetween val="between"/>
-      </c:valAx>
-      <c:spPr>
-        <a:noFill/>
-        <a:ln>
-          <a:noFill/>
-        </a:ln>
-        <a:effectLst/>
-      </c:spPr>
-    </c:plotArea>
-    <c:legend>
-      <c:legendPos val="r"/>
-      <c:overlay val="0"/>
-      <c:txPr>
-        <a:bodyPr/>
-        <a:lstStyle/>
-        <a:p>
-          <a:pPr>
-            <a:defRPr sz="1100">      </a:defRPr>
-          </a:pPr>
-          <a:endParaRPr lang="en-US"/>
-        </a:p>
-      </c:txPr>
-    </c:legend>
-    <c:plotVisOnly val="1"/>
-    <c:dispBlanksAs val="span"/>
-  </c:chart>
-  <c:spPr>
-    <a:solidFill>
-      <a:srgbClr val="FFFFFF"/>
-    </a:solidFill>
-    <a:ln>
-      <a:noFill/>
-    </a:ln>
-    <a:effectLst/>
-  </c:spPr>
-  <c:externalData r:id="rId1">
-    <c:autoUpdate val="0"/>
-  </c:externalData>
-</c:chartSpace>
+<file path=ppt/revisionInfo.xml><?xml version="1.0" encoding="utf-8"?>
+<p1510:revInfo xmlns:a="http://schemas.openxmlformats.org/drawingml/2006/main" xmlns:r="http://schemas.openxmlformats.org/officeDocument/2006/relationships" xmlns:p1510="http://schemas.microsoft.com/office/powerpoint/2015/10/main">
+  <p1510:revLst>
+    <p1510:client id="{E0EC2243-9FC8-EFF8-8E55-835714F918AC}" v="255" dt="2026-04-08T12:35:04.717"/>
+    <p1510:client id="{FC9A214F-9EC5-439C-2241-D7964AECA157}" v="1212" dt="2026-04-08T14:06:40.017"/>
+  </p1510:revLst>
+</p1510:revInfo>
 </file>
 
 <file path=ppt/notesMasters/notesMaster1.xml><?xml version="1.0" encoding="utf-8"?>
@@ -947,7 +164,7 @@
         <p:spPr>
           <a:xfrm>
             <a:off x="0" y="0"/>
-            <a:ext cx="2971800" cy="458788"/>
+            <a:ext cx="2228850" cy="458788"/>
           </a:xfrm>
           <a:prstGeom prst="rect">
             <a:avLst/>
@@ -977,8 +194,8 @@
         </p:nvSpPr>
         <p:spPr>
           <a:xfrm>
-            <a:off x="3884613" y="0"/>
-            <a:ext cx="2971800" cy="458788"/>
+            <a:off x="2913063" y="0"/>
+            <a:ext cx="2228850" cy="458788"/>
           </a:xfrm>
           <a:prstGeom prst="rect">
             <a:avLst/>
@@ -992,9 +209,8 @@
             </a:lvl1pPr>
           </a:lstStyle>
           <a:p>
-            <a:fld id="{5282F153-3F37-0F45-9E97-73ACFA13230C}" type="datetimeFigureOut">
-              <a:rPr lang="en-US"/>
-              <a:t>7/23/19</a:t>
+            <a:fld id="{6506CB11-266D-4885-8A56-8FA3B81410EF}" type="datetimeFigureOut">
+              <a:t>4/8/2026</a:t>
             </a:fld>
             <a:endParaRPr lang="en-US"/>
           </a:p>
@@ -1012,7 +228,7 @@
         </p:nvSpPr>
         <p:spPr>
           <a:xfrm>
-            <a:off x="685800" y="1143000"/>
+            <a:off x="-171450" y="1143000"/>
             <a:ext cx="5486400" cy="3086100"/>
           </a:xfrm>
           <a:prstGeom prst="rect">
@@ -1045,8 +261,8 @@
         </p:nvSpPr>
         <p:spPr>
           <a:xfrm>
-            <a:off x="685800" y="4400550"/>
-            <a:ext cx="5486400" cy="3600450"/>
+            <a:off x="514350" y="4400550"/>
+            <a:ext cx="4114800" cy="3600450"/>
           </a:xfrm>
           <a:prstGeom prst="rect">
             <a:avLst/>
@@ -1105,7 +321,7 @@
         <p:spPr>
           <a:xfrm>
             <a:off x="0" y="8685213"/>
-            <a:ext cx="2971800" cy="458787"/>
+            <a:ext cx="2228850" cy="458787"/>
           </a:xfrm>
           <a:prstGeom prst="rect">
             <a:avLst/>
@@ -1135,8 +351,8 @@
         </p:nvSpPr>
         <p:spPr>
           <a:xfrm>
-            <a:off x="3884613" y="8685213"/>
-            <a:ext cx="2971800" cy="458787"/>
+            <a:off x="2913063" y="8685213"/>
+            <a:ext cx="2228850" cy="458787"/>
           </a:xfrm>
           <a:prstGeom prst="rect">
             <a:avLst/>
@@ -1150,8 +366,7 @@
             </a:lvl1pPr>
           </a:lstStyle>
           <a:p>
-            <a:fld id="{CE5E9CC1-C706-0F49-92D6-E571CC5EEA8F}" type="slidenum">
-              <a:rPr lang="en-US"/>
+            <a:fld id="{A6FB3518-9E01-4168-ABBB-9315D761E0EB}" type="slidenum">
               <a:t>‹#›</a:t>
             </a:fld>
             <a:endParaRPr lang="en-US"/>
@@ -1161,7 +376,7 @@
     </p:spTree>
     <p:extLst>
       <p:ext uri="{BB962C8B-B14F-4D97-AF65-F5344CB8AC3E}">
-        <p14:creationId xmlns:p14="http://schemas.microsoft.com/office/powerpoint/2010/main" val="1024086991"/>
+        <p14:creationId xmlns:p14="http://schemas.microsoft.com/office/powerpoint/2010/main" val="4160713554"/>
       </p:ext>
     </p:extLst>
   </p:cSld>
@@ -1305,11 +520,7 @@
           <a:bodyPr/>
           <a:lstStyle/>
           <a:p>
-            <a:r>
-              <a:rPr lang="en-US" dirty="0"/>
-              <a:t/>
-            </a:r>
-            <a:endParaRPr lang="en-US" dirty="0"/>
+            <a:endParaRPr lang="en-US"/>
           </a:p>
         </p:txBody>
       </p:sp>
@@ -1393,11 +604,7 @@
           <a:bodyPr/>
           <a:lstStyle/>
           <a:p>
-            <a:r>
-              <a:rPr lang="en-US" dirty="0"/>
-              <a:t/>
-            </a:r>
-            <a:endParaRPr lang="en-US" dirty="0"/>
+            <a:endParaRPr lang="en-US"/>
           </a:p>
         </p:txBody>
       </p:sp>
@@ -1481,11 +688,7 @@
           <a:bodyPr/>
           <a:lstStyle/>
           <a:p>
-            <a:r>
-              <a:rPr lang="en-US" dirty="0"/>
-              <a:t/>
-            </a:r>
-            <a:endParaRPr lang="en-US" dirty="0"/>
+            <a:endParaRPr lang="en-US"/>
           </a:p>
         </p:txBody>
       </p:sp>
@@ -1569,11 +772,7 @@
           <a:bodyPr/>
           <a:lstStyle/>
           <a:p>
-            <a:r>
-              <a:rPr lang="en-US" dirty="0"/>
-              <a:t/>
-            </a:r>
-            <a:endParaRPr lang="en-US" dirty="0"/>
+            <a:endParaRPr lang="en-US"/>
           </a:p>
         </p:txBody>
       </p:sp>
@@ -1657,11 +856,7 @@
           <a:bodyPr/>
           <a:lstStyle/>
           <a:p>
-            <a:r>
-              <a:rPr lang="en-US" dirty="0"/>
-              <a:t/>
-            </a:r>
-            <a:endParaRPr lang="en-US" dirty="0"/>
+            <a:endParaRPr lang="en-US"/>
           </a:p>
         </p:txBody>
       </p:sp>
@@ -1706,7 +901,13 @@
   <p:cSld>
     <p:spTree>
       <p:nvGrpSpPr>
-        <p:cNvPr id="1" name=""/>
+        <p:cNvPr id="1" name="">
+          <a:extLst>
+            <a:ext uri="{FF2B5EF4-FFF2-40B4-BE49-F238E27FC236}">
+              <a16:creationId xmlns:a16="http://schemas.microsoft.com/office/drawing/2014/main" id="{511EFB04-8EE0-DCF7-9A84-541E7074EE63}"/>
+            </a:ext>
+          </a:extLst>
+        </p:cNvPr>
         <p:cNvGrpSpPr/>
         <p:nvPr/>
       </p:nvGrpSpPr>
@@ -1720,7 +921,13 @@
       </p:grpSpPr>
       <p:sp>
         <p:nvSpPr>
-          <p:cNvPr id="2" name="Slide Image Placeholder 1"/>
+          <p:cNvPr id="2" name="Slide Image Placeholder 1">
+            <a:extLst>
+              <a:ext uri="{FF2B5EF4-FFF2-40B4-BE49-F238E27FC236}">
+                <a16:creationId xmlns:a16="http://schemas.microsoft.com/office/drawing/2014/main" id="{1D0B98EA-C002-94EC-3069-97D99D4F0DD6}"/>
+              </a:ext>
+            </a:extLst>
+          </p:cNvPr>
           <p:cNvSpPr>
             <a:spLocks noGrp="1" noRot="1" noChangeAspect="1"/>
           </p:cNvSpPr>
@@ -1732,7 +939,13 @@
       </p:sp>
       <p:sp>
         <p:nvSpPr>
-          <p:cNvPr id="3" name="Notes Placeholder 2"/>
+          <p:cNvPr id="3" name="Notes Placeholder 2">
+            <a:extLst>
+              <a:ext uri="{FF2B5EF4-FFF2-40B4-BE49-F238E27FC236}">
+                <a16:creationId xmlns:a16="http://schemas.microsoft.com/office/drawing/2014/main" id="{BAEF9695-D57F-71AA-9219-7855D4C17F4D}"/>
+              </a:ext>
+            </a:extLst>
+          </p:cNvPr>
           <p:cNvSpPr>
             <a:spLocks noGrp="1"/>
           </p:cNvSpPr>
@@ -1745,17 +958,19 @@
           <a:bodyPr/>
           <a:lstStyle/>
           <a:p>
-            <a:r>
-              <a:rPr lang="en-US" dirty="0"/>
-              <a:t/>
-            </a:r>
-            <a:endParaRPr lang="en-US" dirty="0"/>
+            <a:endParaRPr lang="en-US"/>
           </a:p>
         </p:txBody>
       </p:sp>
       <p:sp>
         <p:nvSpPr>
-          <p:cNvPr id="4" name="Slide Number Placeholder 3"/>
+          <p:cNvPr id="4" name="Slide Number Placeholder 3">
+            <a:extLst>
+              <a:ext uri="{FF2B5EF4-FFF2-40B4-BE49-F238E27FC236}">
+                <a16:creationId xmlns:a16="http://schemas.microsoft.com/office/drawing/2014/main" id="{038A12CE-4375-54BE-CEAD-59D4628EBB47}"/>
+              </a:ext>
+            </a:extLst>
+          </p:cNvPr>
           <p:cNvSpPr>
             <a:spLocks noGrp="1"/>
           </p:cNvSpPr>
@@ -1779,7 +994,7 @@
     </p:spTree>
     <p:extLst>
       <p:ext uri="{BB962C8B-B14F-4D97-AF65-F5344CB8AC3E}">
-        <p14:creationId xmlns:p14="http://schemas.microsoft.com/office/powerpoint/2010/main" val="1024086991"/>
+        <p14:creationId xmlns:p14="http://schemas.microsoft.com/office/powerpoint/2010/main" val="804559442"/>
       </p:ext>
     </p:extLst>
   </p:cSld>
@@ -1833,11 +1048,7 @@
           <a:bodyPr/>
           <a:lstStyle/>
           <a:p>
-            <a:r>
-              <a:rPr lang="en-US" dirty="0"/>
-              <a:t/>
-            </a:r>
-            <a:endParaRPr lang="en-US" dirty="0"/>
+            <a:endParaRPr lang="en-US"/>
           </a:p>
         </p:txBody>
       </p:sp>
@@ -1858,7 +1069,7 @@
           <a:p>
             <a:fld id="{F7021451-1387-4CA6-816F-3879F97B5CBC}" type="slidenum">
               <a:rPr lang="en-US"/>
-              <a:t>7</a:t>
+              <a:t>6</a:t>
             </a:fld>
             <a:endParaRPr lang="en-US"/>
           </a:p>
@@ -1921,11 +1132,7 @@
           <a:bodyPr/>
           <a:lstStyle/>
           <a:p>
-            <a:r>
-              <a:rPr lang="en-US" dirty="0"/>
-              <a:t/>
-            </a:r>
-            <a:endParaRPr lang="en-US" dirty="0"/>
+            <a:endParaRPr lang="en-US"/>
           </a:p>
         </p:txBody>
       </p:sp>
@@ -1946,7 +1153,7 @@
           <a:p>
             <a:fld id="{F7021451-1387-4CA6-816F-3879F97B5CBC}" type="slidenum">
               <a:rPr lang="en-US"/>
-              <a:t>8</a:t>
+              <a:t>7</a:t>
             </a:fld>
             <a:endParaRPr lang="en-US"/>
           </a:p>
@@ -1956,6 +1163,114 @@
     <p:extLst>
       <p:ext uri="{BB962C8B-B14F-4D97-AF65-F5344CB8AC3E}">
         <p14:creationId xmlns:p14="http://schemas.microsoft.com/office/powerpoint/2010/main" val="1024086991"/>
+      </p:ext>
+    </p:extLst>
+  </p:cSld>
+  <p:clrMapOvr>
+    <a:masterClrMapping/>
+  </p:clrMapOvr>
+</p:notes>
+</file>
+
+<file path=ppt/notesSlides/notesSlide9.xml><?xml version="1.0" encoding="utf-8"?>
+<p:notes xmlns:a="http://schemas.openxmlformats.org/drawingml/2006/main" xmlns:r="http://schemas.openxmlformats.org/officeDocument/2006/relationships" xmlns:p="http://schemas.openxmlformats.org/presentationml/2006/main">
+  <p:cSld>
+    <p:spTree>
+      <p:nvGrpSpPr>
+        <p:cNvPr id="1" name="">
+          <a:extLst>
+            <a:ext uri="{FF2B5EF4-FFF2-40B4-BE49-F238E27FC236}">
+              <a16:creationId xmlns:a16="http://schemas.microsoft.com/office/drawing/2014/main" id="{93E1F365-CC87-9CB6-238A-AAAAC51D8592}"/>
+            </a:ext>
+          </a:extLst>
+        </p:cNvPr>
+        <p:cNvGrpSpPr/>
+        <p:nvPr/>
+      </p:nvGrpSpPr>
+      <p:grpSpPr>
+        <a:xfrm>
+          <a:off x="0" y="0"/>
+          <a:ext cx="0" cy="0"/>
+          <a:chOff x="0" y="0"/>
+          <a:chExt cx="0" cy="0"/>
+        </a:xfrm>
+      </p:grpSpPr>
+      <p:sp>
+        <p:nvSpPr>
+          <p:cNvPr id="2" name="Slide Image Placeholder 1">
+            <a:extLst>
+              <a:ext uri="{FF2B5EF4-FFF2-40B4-BE49-F238E27FC236}">
+                <a16:creationId xmlns:a16="http://schemas.microsoft.com/office/drawing/2014/main" id="{900CB03E-1FC6-C2CA-5D92-B57E6DBA70D8}"/>
+              </a:ext>
+            </a:extLst>
+          </p:cNvPr>
+          <p:cNvSpPr>
+            <a:spLocks noGrp="1" noRot="1" noChangeAspect="1"/>
+          </p:cNvSpPr>
+          <p:nvPr>
+            <p:ph type="sldImg"/>
+          </p:nvPr>
+        </p:nvSpPr>
+        <p:spPr/>
+      </p:sp>
+      <p:sp>
+        <p:nvSpPr>
+          <p:cNvPr id="3" name="Notes Placeholder 2">
+            <a:extLst>
+              <a:ext uri="{FF2B5EF4-FFF2-40B4-BE49-F238E27FC236}">
+                <a16:creationId xmlns:a16="http://schemas.microsoft.com/office/drawing/2014/main" id="{2FB48D94-3BC6-AA28-FF4F-F830953A2732}"/>
+              </a:ext>
+            </a:extLst>
+          </p:cNvPr>
+          <p:cNvSpPr>
+            <a:spLocks noGrp="1"/>
+          </p:cNvSpPr>
+          <p:nvPr>
+            <p:ph type="body" idx="1"/>
+          </p:nvPr>
+        </p:nvSpPr>
+        <p:spPr/>
+        <p:txBody>
+          <a:bodyPr/>
+          <a:lstStyle/>
+          <a:p>
+            <a:endParaRPr lang="en-US"/>
+          </a:p>
+        </p:txBody>
+      </p:sp>
+      <p:sp>
+        <p:nvSpPr>
+          <p:cNvPr id="4" name="Slide Number Placeholder 3">
+            <a:extLst>
+              <a:ext uri="{FF2B5EF4-FFF2-40B4-BE49-F238E27FC236}">
+                <a16:creationId xmlns:a16="http://schemas.microsoft.com/office/drawing/2014/main" id="{323844E8-8790-C795-2A9B-24B5E2FF4BCD}"/>
+              </a:ext>
+            </a:extLst>
+          </p:cNvPr>
+          <p:cNvSpPr>
+            <a:spLocks noGrp="1"/>
+          </p:cNvSpPr>
+          <p:nvPr>
+            <p:ph type="sldNum" sz="quarter" idx="10"/>
+          </p:nvPr>
+        </p:nvSpPr>
+        <p:spPr/>
+        <p:txBody>
+          <a:bodyPr/>
+          <a:lstStyle/>
+          <a:p>
+            <a:fld id="{F7021451-1387-4CA6-816F-3879F97B5CBC}" type="slidenum">
+              <a:rPr lang="en-US"/>
+              <a:t>9</a:t>
+            </a:fld>
+            <a:endParaRPr lang="en-US"/>
+          </a:p>
+        </p:txBody>
+      </p:sp>
+    </p:spTree>
+    <p:extLst>
+      <p:ext uri="{BB962C8B-B14F-4D97-AF65-F5344CB8AC3E}">
+        <p14:creationId xmlns:p14="http://schemas.microsoft.com/office/powerpoint/2010/main" val="3399481405"/>
       </p:ext>
     </p:extLst>
   </p:cSld>
@@ -1992,12 +1307,18 @@
   <p:clrMapOvr>
     <a:masterClrMapping/>
   </p:clrMapOvr>
+  <p:hf hdr="0" ftr="0" dt="0"/>
 </p:sldLayout>
 </file>
 
 <file path=ppt/slideMasters/slideMaster1.xml><?xml version="1.0" encoding="utf-8"?>
 <p:sldMaster xmlns:a="http://schemas.openxmlformats.org/drawingml/2006/main" xmlns:r="http://schemas.openxmlformats.org/officeDocument/2006/relationships" xmlns:p="http://schemas.openxmlformats.org/presentationml/2006/main">
   <p:cSld>
+    <p:bg>
+      <p:bgRef idx="1001">
+        <a:schemeClr val="bg1"/>
+      </p:bgRef>
+    </p:bg>
     <p:spTree>
       <p:nvGrpSpPr>
         <p:cNvPr id="1" name=""/>
@@ -2018,7 +1339,7 @@
   <p:sldLayoutIdLst>
     <p:sldLayoutId id="2147483649" r:id="rId1"/>
   </p:sldLayoutIdLst>
-  <p:hf sldNum="0" hdr="0" ftr="0" dt="0"/>
+  <p:hf hdr="0" ftr="0" dt="0"/>
   <p:txStyles>
     <p:titleStyle>
       <a:lvl1pPr algn="ctr" defTabSz="914400" rtl="0" eaLnBrk="1" latinLnBrk="0" hangingPunct="1">
@@ -2280,6 +1601,7 @@
         <a:solidFill>
           <a:srgbClr val="3D0C1F"/>
         </a:solidFill>
+        <a:effectLst/>
       </p:bgPr>
     </p:bg>
     <p:spTree>
@@ -2392,11 +1714,11 @@
           <a:bodyPr wrap="square" rtlCol="0" anchor="t"/>
           <a:lstStyle/>
           <a:p>
-            <a:pPr indent="0" marL="0">
+            <a:pPr marL="0" indent="0">
               <a:buNone/>
             </a:pPr>
             <a:r>
-              <a:rPr lang="en-US" sz="2800" b="1" dirty="0">
+              <a:rPr lang="en-US" sz="2800" b="1">
                 <a:solidFill>
                   <a:srgbClr val="FFFFFF"/>
                 </a:solidFill>
@@ -2406,7 +1728,7 @@
               </a:rPr>
               <a:t>UW-Madison GI Tract Image Segmentation</a:t>
             </a:r>
-            <a:endParaRPr lang="en-US" sz="2800" dirty="0"/>
+            <a:endParaRPr lang="en-US" sz="2800"/>
           </a:p>
         </p:txBody>
       </p:sp>
@@ -2431,11 +1753,11 @@
           <a:bodyPr wrap="square" rtlCol="0" anchor="ctr"/>
           <a:lstStyle/>
           <a:p>
-            <a:pPr indent="0" marL="0">
+            <a:pPr marL="0" indent="0">
               <a:buNone/>
             </a:pPr>
             <a:r>
-              <a:rPr lang="en-US" sz="1700" i="1" dirty="0">
+              <a:rPr lang="en-US" sz="1700" i="1">
                 <a:solidFill>
                   <a:srgbClr val="CEB888"/>
                 </a:solidFill>
@@ -2445,7 +1767,7 @@
               </a:rPr>
               <a:t>Presentation 3 — Model Architecture &amp; Training Results</a:t>
             </a:r>
-            <a:endParaRPr lang="en-US" sz="1700" dirty="0"/>
+            <a:endParaRPr lang="en-US" sz="1700"/>
           </a:p>
         </p:txBody>
       </p:sp>
@@ -2470,11 +1792,11 @@
           <a:bodyPr wrap="square" rtlCol="0" anchor="ctr"/>
           <a:lstStyle/>
           <a:p>
-            <a:pPr indent="0" marL="0">
+            <a:pPr marL="0" indent="0">
               <a:buNone/>
             </a:pPr>
             <a:r>
-              <a:rPr lang="en-US" sz="1400" dirty="0">
+              <a:rPr lang="en-US" sz="1400">
                 <a:solidFill>
                   <a:srgbClr val="D4B896"/>
                 </a:solidFill>
@@ -2484,7 +1806,7 @@
               </a:rPr>
               <a:t>William Ohonba   ·   Sofia Rojas   ·   Peyton Wade</a:t>
             </a:r>
-            <a:endParaRPr lang="en-US" sz="1400" dirty="0"/>
+            <a:endParaRPr lang="en-US" sz="1400"/>
           </a:p>
         </p:txBody>
       </p:sp>
@@ -2509,11 +1831,11 @@
           <a:bodyPr wrap="square" rtlCol="0" anchor="ctr"/>
           <a:lstStyle/>
           <a:p>
-            <a:pPr indent="0" marL="0">
+            <a:pPr marL="0" indent="0">
               <a:buNone/>
             </a:pPr>
             <a:r>
-              <a:rPr lang="en-US" sz="1300" dirty="0">
+              <a:rPr lang="en-US" sz="1300">
                 <a:solidFill>
                   <a:srgbClr val="AA9080"/>
                 </a:solidFill>
@@ -2523,7 +1845,7 @@
               </a:rPr>
               <a:t>Florida State University   |   Spring 2026</a:t>
             </a:r>
-            <a:endParaRPr lang="en-US" sz="1300" dirty="0"/>
+            <a:endParaRPr lang="en-US" sz="1300"/>
           </a:p>
         </p:txBody>
       </p:sp>
@@ -2543,6 +1865,7 @@
         <a:solidFill>
           <a:srgbClr val="FAF7F5"/>
         </a:solidFill>
+        <a:effectLst/>
       </p:bgPr>
     </p:bg>
     <p:spTree>
@@ -2602,24 +1925,24 @@
           <a:ln/>
         </p:spPr>
         <p:txBody>
-          <a:bodyPr wrap="square" rtlCol="0" anchor="ctr"/>
+          <a:bodyPr wrap="square" lIns="91440" tIns="45720" rIns="91440" bIns="45720" rtlCol="0" anchor="ctr"/>
           <a:lstStyle/>
           <a:p>
-            <a:pPr indent="0" marL="0">
-              <a:buNone/>
-            </a:pPr>
-            <a:r>
-              <a:rPr lang="en-US" sz="2600" b="1" dirty="0">
+            <a:r>
+              <a:rPr lang="en-US" sz="2600" b="1">
                 <a:solidFill>
                   <a:srgbClr val="FFFFFF"/>
                 </a:solidFill>
-                <a:latin typeface="Calibri" pitchFamily="34" charset="0"/>
-                <a:ea typeface="Calibri" pitchFamily="34" charset="-122"/>
-                <a:cs typeface="Calibri" pitchFamily="34" charset="-120"/>
+                <a:latin typeface="Calibri"/>
+                <a:ea typeface="Calibri"/>
+                <a:cs typeface="Calibri"/>
               </a:rPr>
               <a:t>Agenda</a:t>
             </a:r>
-            <a:endParaRPr lang="en-US" sz="2600" dirty="0"/>
+            <a:endParaRPr lang="en-US" sz="2600">
+              <a:ea typeface="Calibri" panose="020F0502020204030204"/>
+              <a:cs typeface="Calibri" panose="020F0502020204030204"/>
+            </a:endParaRPr>
           </a:p>
         </p:txBody>
       </p:sp>
@@ -2669,11 +1992,11 @@
           <a:bodyPr wrap="square" rtlCol="0" anchor="ctr"/>
           <a:lstStyle/>
           <a:p>
-            <a:pPr algn="ctr" indent="0" marL="0">
+            <a:pPr marL="0" indent="0" algn="ctr">
               <a:buNone/>
             </a:pPr>
             <a:r>
-              <a:rPr lang="en-US" sz="1400" b="1" dirty="0">
+              <a:rPr lang="en-US" sz="1400" b="1">
                 <a:solidFill>
                   <a:srgbClr val="FFFFFF"/>
                 </a:solidFill>
@@ -2683,7 +2006,7 @@
               </a:rPr>
               <a:t>01</a:t>
             </a:r>
-            <a:endParaRPr lang="en-US" sz="1400" dirty="0"/>
+            <a:endParaRPr lang="en-US" sz="1400"/>
           </a:p>
         </p:txBody>
       </p:sp>
@@ -2711,7 +2034,7 @@
             <a:prstDash val="solid"/>
           </a:ln>
           <a:effectLst>
-            <a:outerShdw sx="100000" sy="100000" kx="0" ky="0" algn="bl" rotWithShape="0" blurRad="101600" dist="38100" dir="8100000">
+            <a:outerShdw blurRad="101600" dist="38100" dir="8100000" algn="bl" rotWithShape="0">
               <a:srgbClr val="000000">
                 <a:alpha val="12000"/>
               </a:srgbClr>
@@ -2740,11 +2063,11 @@
           <a:bodyPr wrap="square" rtlCol="0" anchor="ctr"/>
           <a:lstStyle/>
           <a:p>
-            <a:pPr indent="0" marL="0">
+            <a:pPr marL="0" indent="0">
               <a:buNone/>
             </a:pPr>
             <a:r>
-              <a:rPr lang="en-US" sz="1400" dirty="0">
+              <a:rPr lang="en-US" sz="1400">
                 <a:solidFill>
                   <a:srgbClr val="1A1A1A"/>
                 </a:solidFill>
@@ -2754,7 +2077,7 @@
               </a:rPr>
               <a:t>Project Recap &amp; Update</a:t>
             </a:r>
-            <a:endParaRPr lang="en-US" sz="1400" dirty="0"/>
+            <a:endParaRPr lang="en-US" sz="1400"/>
           </a:p>
         </p:txBody>
       </p:sp>
@@ -2804,11 +2127,11 @@
           <a:bodyPr wrap="square" rtlCol="0" anchor="ctr"/>
           <a:lstStyle/>
           <a:p>
-            <a:pPr algn="ctr" indent="0" marL="0">
+            <a:pPr marL="0" indent="0" algn="ctr">
               <a:buNone/>
             </a:pPr>
             <a:r>
-              <a:rPr lang="en-US" sz="1400" b="1" dirty="0">
+              <a:rPr lang="en-US" sz="1400" b="1">
                 <a:solidFill>
                   <a:srgbClr val="FFFFFF"/>
                 </a:solidFill>
@@ -2818,7 +2141,7 @@
               </a:rPr>
               <a:t>02</a:t>
             </a:r>
-            <a:endParaRPr lang="en-US" sz="1400" dirty="0"/>
+            <a:endParaRPr lang="en-US" sz="1400"/>
           </a:p>
         </p:txBody>
       </p:sp>
@@ -2846,7 +2169,7 @@
             <a:prstDash val="solid"/>
           </a:ln>
           <a:effectLst>
-            <a:outerShdw sx="100000" sy="100000" kx="0" ky="0" algn="bl" rotWithShape="0" blurRad="101600" dist="38100" dir="8100000">
+            <a:outerShdw blurRad="101600" dist="38100" dir="8100000" algn="bl" rotWithShape="0">
               <a:srgbClr val="000000">
                 <a:alpha val="12000"/>
               </a:srgbClr>
@@ -2875,11 +2198,11 @@
           <a:bodyPr wrap="square" rtlCol="0" anchor="ctr"/>
           <a:lstStyle/>
           <a:p>
-            <a:pPr indent="0" marL="0">
+            <a:pPr marL="0" indent="0">
               <a:buNone/>
             </a:pPr>
             <a:r>
-              <a:rPr lang="en-US" sz="1400" dirty="0">
+              <a:rPr lang="en-US" sz="1400">
                 <a:solidFill>
                   <a:srgbClr val="1A1A1A"/>
                 </a:solidFill>
@@ -2889,7 +2212,7 @@
               </a:rPr>
               <a:t>Model Architecture (U-Net)</a:t>
             </a:r>
-            <a:endParaRPr lang="en-US" sz="1400" dirty="0"/>
+            <a:endParaRPr lang="en-US" sz="1400"/>
           </a:p>
         </p:txBody>
       </p:sp>
@@ -2939,11 +2262,11 @@
           <a:bodyPr wrap="square" rtlCol="0" anchor="ctr"/>
           <a:lstStyle/>
           <a:p>
-            <a:pPr algn="ctr" indent="0" marL="0">
+            <a:pPr marL="0" indent="0" algn="ctr">
               <a:buNone/>
             </a:pPr>
             <a:r>
-              <a:rPr lang="en-US" sz="1400" b="1" dirty="0">
+              <a:rPr lang="en-US" sz="1400" b="1">
                 <a:solidFill>
                   <a:srgbClr val="FFFFFF"/>
                 </a:solidFill>
@@ -2953,7 +2276,7 @@
               </a:rPr>
               <a:t>03</a:t>
             </a:r>
-            <a:endParaRPr lang="en-US" sz="1400" dirty="0"/>
+            <a:endParaRPr lang="en-US" sz="1400"/>
           </a:p>
         </p:txBody>
       </p:sp>
@@ -2981,7 +2304,7 @@
             <a:prstDash val="solid"/>
           </a:ln>
           <a:effectLst>
-            <a:outerShdw sx="100000" sy="100000" kx="0" ky="0" algn="bl" rotWithShape="0" blurRad="101600" dist="38100" dir="8100000">
+            <a:outerShdw blurRad="101600" dist="38100" dir="8100000" algn="bl" rotWithShape="0">
               <a:srgbClr val="000000">
                 <a:alpha val="12000"/>
               </a:srgbClr>
@@ -3010,11 +2333,11 @@
           <a:bodyPr wrap="square" rtlCol="0" anchor="ctr"/>
           <a:lstStyle/>
           <a:p>
-            <a:pPr indent="0" marL="0">
+            <a:pPr marL="0" indent="0">
               <a:buNone/>
             </a:pPr>
             <a:r>
-              <a:rPr lang="en-US" sz="1400" dirty="0">
+              <a:rPr lang="en-US" sz="1400">
                 <a:solidFill>
                   <a:srgbClr val="1A1A1A"/>
                 </a:solidFill>
@@ -3024,7 +2347,7 @@
               </a:rPr>
               <a:t>Training &amp; Validation Results</a:t>
             </a:r>
-            <a:endParaRPr lang="en-US" sz="1400" dirty="0"/>
+            <a:endParaRPr lang="en-US" sz="1400"/>
           </a:p>
         </p:txBody>
       </p:sp>
@@ -3074,11 +2397,11 @@
           <a:bodyPr wrap="square" rtlCol="0" anchor="ctr"/>
           <a:lstStyle/>
           <a:p>
-            <a:pPr algn="ctr" indent="0" marL="0">
+            <a:pPr marL="0" indent="0" algn="ctr">
               <a:buNone/>
             </a:pPr>
             <a:r>
-              <a:rPr lang="en-US" sz="1400" b="1" dirty="0">
+              <a:rPr lang="en-US" sz="1400" b="1">
                 <a:solidFill>
                   <a:srgbClr val="FFFFFF"/>
                 </a:solidFill>
@@ -3088,7 +2411,7 @@
               </a:rPr>
               <a:t>04</a:t>
             </a:r>
-            <a:endParaRPr lang="en-US" sz="1400" dirty="0"/>
+            <a:endParaRPr lang="en-US" sz="1400"/>
           </a:p>
         </p:txBody>
       </p:sp>
@@ -3116,7 +2439,7 @@
             <a:prstDash val="solid"/>
           </a:ln>
           <a:effectLst>
-            <a:outerShdw sx="100000" sy="100000" kx="0" ky="0" algn="bl" rotWithShape="0" blurRad="101600" dist="38100" dir="8100000">
+            <a:outerShdw blurRad="101600" dist="38100" dir="8100000" algn="bl" rotWithShape="0">
               <a:srgbClr val="000000">
                 <a:alpha val="12000"/>
               </a:srgbClr>
@@ -3145,11 +2468,11 @@
           <a:bodyPr wrap="square" rtlCol="0" anchor="ctr"/>
           <a:lstStyle/>
           <a:p>
-            <a:pPr indent="0" marL="0">
+            <a:pPr marL="0" indent="0">
               <a:buNone/>
             </a:pPr>
             <a:r>
-              <a:rPr lang="en-US" sz="1400" dirty="0">
+              <a:rPr lang="en-US" sz="1400">
                 <a:solidFill>
                   <a:srgbClr val="1A1A1A"/>
                 </a:solidFill>
@@ -3159,7 +2482,7 @@
               </a:rPr>
               <a:t>Preliminary Interpretation</a:t>
             </a:r>
-            <a:endParaRPr lang="en-US" sz="1400" dirty="0"/>
+            <a:endParaRPr lang="en-US" sz="1400"/>
           </a:p>
         </p:txBody>
       </p:sp>
@@ -3209,11 +2532,11 @@
           <a:bodyPr wrap="square" rtlCol="0" anchor="ctr"/>
           <a:lstStyle/>
           <a:p>
-            <a:pPr algn="ctr" indent="0" marL="0">
+            <a:pPr marL="0" indent="0" algn="ctr">
               <a:buNone/>
             </a:pPr>
             <a:r>
-              <a:rPr lang="en-US" sz="1400" b="1" dirty="0">
+              <a:rPr lang="en-US" sz="1400" b="1">
                 <a:solidFill>
                   <a:srgbClr val="FFFFFF"/>
                 </a:solidFill>
@@ -3223,7 +2546,7 @@
               </a:rPr>
               <a:t>05</a:t>
             </a:r>
-            <a:endParaRPr lang="en-US" sz="1400" dirty="0"/>
+            <a:endParaRPr lang="en-US" sz="1400"/>
           </a:p>
         </p:txBody>
       </p:sp>
@@ -3251,7 +2574,7 @@
             <a:prstDash val="solid"/>
           </a:ln>
           <a:effectLst>
-            <a:outerShdw sx="100000" sy="100000" kx="0" ky="0" algn="bl" rotWithShape="0" blurRad="101600" dist="38100" dir="8100000">
+            <a:outerShdw blurRad="101600" dist="38100" dir="8100000" algn="bl" rotWithShape="0">
               <a:srgbClr val="000000">
                 <a:alpha val="12000"/>
               </a:srgbClr>
@@ -3280,11 +2603,11 @@
           <a:bodyPr wrap="square" rtlCol="0" anchor="ctr"/>
           <a:lstStyle/>
           <a:p>
-            <a:pPr indent="0" marL="0">
+            <a:pPr marL="0" indent="0">
               <a:buNone/>
             </a:pPr>
             <a:r>
-              <a:rPr lang="en-US" sz="1400" dirty="0">
+              <a:rPr lang="en-US" sz="1400">
                 <a:solidFill>
                   <a:srgbClr val="1A1A1A"/>
                 </a:solidFill>
@@ -3294,7 +2617,7 @@
               </a:rPr>
               <a:t>Planned Improvements</a:t>
             </a:r>
-            <a:endParaRPr lang="en-US" sz="1400" dirty="0"/>
+            <a:endParaRPr lang="en-US" sz="1400"/>
           </a:p>
         </p:txBody>
       </p:sp>
@@ -3344,11 +2667,11 @@
           <a:bodyPr wrap="square" rtlCol="0" anchor="ctr"/>
           <a:lstStyle/>
           <a:p>
-            <a:pPr algn="ctr" indent="0" marL="0">
+            <a:pPr marL="0" indent="0" algn="ctr">
               <a:buNone/>
             </a:pPr>
             <a:r>
-              <a:rPr lang="en-US" sz="1400" b="1" dirty="0">
+              <a:rPr lang="en-US" sz="1400" b="1">
                 <a:solidFill>
                   <a:srgbClr val="FFFFFF"/>
                 </a:solidFill>
@@ -3358,7 +2681,7 @@
               </a:rPr>
               <a:t>06</a:t>
             </a:r>
-            <a:endParaRPr lang="en-US" sz="1400" dirty="0"/>
+            <a:endParaRPr lang="en-US" sz="1400"/>
           </a:p>
         </p:txBody>
       </p:sp>
@@ -3386,7 +2709,7 @@
             <a:prstDash val="solid"/>
           </a:ln>
           <a:effectLst>
-            <a:outerShdw sx="100000" sy="100000" kx="0" ky="0" algn="bl" rotWithShape="0" blurRad="101600" dist="38100" dir="8100000">
+            <a:outerShdw blurRad="101600" dist="38100" dir="8100000" algn="bl" rotWithShape="0">
               <a:srgbClr val="000000">
                 <a:alpha val="12000"/>
               </a:srgbClr>
@@ -3415,11 +2738,11 @@
           <a:bodyPr wrap="square" rtlCol="0" anchor="ctr"/>
           <a:lstStyle/>
           <a:p>
-            <a:pPr indent="0" marL="0">
+            <a:pPr marL="0" indent="0">
               <a:buNone/>
             </a:pPr>
             <a:r>
-              <a:rPr lang="en-US" sz="1400" dirty="0">
+              <a:rPr lang="en-US" sz="1400">
                 <a:solidFill>
                   <a:srgbClr val="1A1A1A"/>
                 </a:solidFill>
@@ -3429,7 +2752,53 @@
               </a:rPr>
               <a:t>Final Remarks &amp; Next Steps</a:t>
             </a:r>
-            <a:endParaRPr lang="en-US" sz="1400" dirty="0"/>
+            <a:endParaRPr lang="en-US" sz="1400"/>
+          </a:p>
+        </p:txBody>
+      </p:sp>
+      <p:sp>
+        <p:nvSpPr>
+          <p:cNvPr id="29" name="TextBox 28">
+            <a:extLst>
+              <a:ext uri="{FF2B5EF4-FFF2-40B4-BE49-F238E27FC236}">
+                <a16:creationId xmlns:a16="http://schemas.microsoft.com/office/drawing/2014/main" id="{5DEBAF4A-74D3-4B25-98CA-73BD00B23C65}"/>
+              </a:ext>
+            </a:extLst>
+          </p:cNvPr>
+          <p:cNvSpPr txBox="1"/>
+          <p:nvPr/>
+        </p:nvSpPr>
+        <p:spPr>
+          <a:xfrm>
+            <a:off x="8877586" y="4898571"/>
+            <a:ext cx="163285" cy="246221"/>
+          </a:xfrm>
+          <a:prstGeom prst="rect">
+            <a:avLst/>
+          </a:prstGeom>
+          <a:noFill/>
+        </p:spPr>
+        <p:txBody>
+          <a:bodyPr rot="0" spcFirstLastPara="0" vertOverflow="overflow" horzOverflow="overflow" vert="horz" wrap="square" lIns="91440" tIns="45720" rIns="91440" bIns="45720" numCol="1" spcCol="0" rtlCol="0" fromWordArt="0" anchor="t" anchorCtr="0" forceAA="0" compatLnSpc="1">
+            <a:prstTxWarp prst="textNoShape">
+              <a:avLst/>
+            </a:prstTxWarp>
+            <a:spAutoFit/>
+          </a:bodyPr>
+          <a:lstStyle/>
+          <a:p>
+            <a:pPr algn="l"/>
+            <a:r>
+              <a:rPr lang="en-US" sz="1000">
+                <a:ea typeface="Calibri"/>
+                <a:cs typeface="Calibri"/>
+              </a:rPr>
+              <a:t>2</a:t>
+            </a:r>
+            <a:endParaRPr lang="en-US" sz="1000" dirty="0">
+              <a:ea typeface="Calibri"/>
+              <a:cs typeface="Calibri"/>
+            </a:endParaRPr>
           </a:p>
         </p:txBody>
       </p:sp>
@@ -3449,6 +2818,7 @@
         <a:solidFill>
           <a:srgbClr val="FAF7F5"/>
         </a:solidFill>
+        <a:effectLst/>
       </p:bgPr>
     </p:bg>
     <p:spTree>
@@ -3511,11 +2881,11 @@
           <a:bodyPr wrap="square" rtlCol="0" anchor="ctr"/>
           <a:lstStyle/>
           <a:p>
-            <a:pPr indent="0" marL="0">
+            <a:pPr marL="0" indent="0">
               <a:buNone/>
             </a:pPr>
             <a:r>
-              <a:rPr lang="en-US" sz="2400" b="1" dirty="0">
+              <a:rPr lang="en-US" sz="2400" b="1">
                 <a:solidFill>
                   <a:srgbClr val="FFFFFF"/>
                 </a:solidFill>
@@ -3525,7 +2895,7 @@
               </a:rPr>
               <a:t>01  |  Project Recap &amp; Update</a:t>
             </a:r>
-            <a:endParaRPr lang="en-US" sz="2400" dirty="0"/>
+            <a:endParaRPr lang="en-US" sz="2400"/>
           </a:p>
         </p:txBody>
       </p:sp>
@@ -3553,7 +2923,7 @@
             <a:prstDash val="solid"/>
           </a:ln>
           <a:effectLst>
-            <a:outerShdw sx="100000" sy="100000" kx="0" ky="0" algn="bl" rotWithShape="0" blurRad="101600" dist="38100" dir="8100000">
+            <a:outerShdw blurRad="101600" dist="38100" dir="8100000" algn="bl" rotWithShape="0">
               <a:srgbClr val="000000">
                 <a:alpha val="12000"/>
               </a:srgbClr>
@@ -3604,24 +2974,21 @@
           <a:ln/>
         </p:spPr>
         <p:txBody>
-          <a:bodyPr wrap="square" rtlCol="0" anchor="ctr"/>
+          <a:bodyPr wrap="square" lIns="91440" tIns="45720" rIns="91440" bIns="45720" rtlCol="0" anchor="ctr"/>
           <a:lstStyle/>
           <a:p>
-            <a:pPr indent="0" marL="0">
-              <a:buNone/>
-            </a:pPr>
-            <a:r>
-              <a:rPr lang="en-US" sz="1300" b="1" dirty="0">
+            <a:r>
+              <a:rPr lang="en-US" sz="1300" b="1">
                 <a:solidFill>
                   <a:srgbClr val="FFFFFF"/>
                 </a:solidFill>
-                <a:latin typeface="Calibri" pitchFamily="34" charset="0"/>
-                <a:ea typeface="Calibri" pitchFamily="34" charset="-122"/>
-                <a:cs typeface="Calibri" pitchFamily="34" charset="-120"/>
-              </a:rPr>
-              <a:t>The Problem</a:t>
-            </a:r>
-            <a:endParaRPr lang="en-US" sz="1300" dirty="0"/>
+                <a:latin typeface="Calibri"/>
+                <a:ea typeface="Calibri"/>
+                <a:cs typeface="Calibri"/>
+              </a:rPr>
+              <a:t>Last Presentation</a:t>
+            </a:r>
+            <a:endParaRPr lang="en-US"/>
           </a:p>
         </p:txBody>
       </p:sp>
@@ -3643,92 +3010,103 @@
           <a:ln/>
         </p:spPr>
         <p:txBody>
-          <a:bodyPr wrap="square" rtlCol="0" anchor="ctr"/>
+          <a:bodyPr wrap="square" lIns="91440" tIns="45720" rIns="91440" bIns="45720" rtlCol="0" anchor="ctr"/>
           <a:lstStyle/>
           <a:p>
-            <a:pPr indent="0" marL="0">
-              <a:buNone/>
+            <a:pPr marL="285750" indent="-285750">
+              <a:buFont typeface="Arial"/>
+              <a:buChar char="•"/>
             </a:pPr>
             <a:r>
-              <a:rPr lang="en-US" sz="1300" b="1" dirty="0">
+              <a:rPr lang="en-US" sz="1250">
                 <a:solidFill>
                   <a:srgbClr val="1A1A1A"/>
                 </a:solidFill>
-                <a:latin typeface="Calibri" pitchFamily="34" charset="0"/>
-                <a:ea typeface="Calibri" pitchFamily="34" charset="-122"/>
-                <a:cs typeface="Calibri" pitchFamily="34" charset="-120"/>
-              </a:rPr>
-              <a:t>Pixel-wise semantic segmentation</a:t>
-            </a:r>
-            <a:endParaRPr lang="en-US" sz="1300" dirty="0"/>
-          </a:p>
-          <a:p>
-            <a:pPr indent="0" marL="0">
-              <a:buNone/>
+                <a:ea typeface="Calibri"/>
+                <a:cs typeface="Calibri"/>
+              </a:rPr>
+              <a:t>Outlined the dataset anatomy with its </a:t>
+            </a:r>
+            <a:r>
+              <a:rPr lang="en-US" sz="1250" err="1">
+                <a:solidFill>
+                  <a:srgbClr val="1A1A1A"/>
+                </a:solidFill>
+                <a:ea typeface="Calibri"/>
+                <a:cs typeface="Calibri"/>
+              </a:rPr>
+              <a:t>atributes</a:t>
+            </a:r>
+            <a:r>
+              <a:rPr lang="en-US" sz="1250">
+                <a:solidFill>
+                  <a:srgbClr val="1A1A1A"/>
+                </a:solidFill>
+                <a:ea typeface="Calibri"/>
+                <a:cs typeface="Calibri"/>
+              </a:rPr>
+              <a:t> and specifications</a:t>
+            </a:r>
+            <a:endParaRPr lang="en-US"/>
+          </a:p>
+          <a:p>
+            <a:pPr marL="285750" indent="-285750">
+              <a:buFont typeface="Arial"/>
+              <a:buChar char="•"/>
             </a:pPr>
             <a:r>
-              <a:rPr lang="en-US" sz="1300" dirty="0">
+              <a:rPr lang="en-US" sz="1250">
                 <a:solidFill>
                   <a:srgbClr val="1A1A1A"/>
                 </a:solidFill>
-                <a:latin typeface="Calibri" pitchFamily="34" charset="0"/>
-                <a:ea typeface="Calibri" pitchFamily="34" charset="-122"/>
-                <a:cs typeface="Calibri" pitchFamily="34" charset="-120"/>
-              </a:rPr>
-              <a:t>of GI tract organs (stomach, small</a:t>
-            </a:r>
-            <a:endParaRPr lang="en-US" sz="1300" dirty="0"/>
-          </a:p>
-          <a:p>
-            <a:pPr indent="0" marL="0">
-              <a:buNone/>
+                <a:ea typeface="Calibri"/>
+                <a:cs typeface="Calibri"/>
+              </a:rPr>
+              <a:t>Established the necessary loss function (DICE and HAUSDORFF)</a:t>
+            </a:r>
+            <a:endParaRPr lang="en-US">
+              <a:solidFill>
+                <a:srgbClr val="000000"/>
+              </a:solidFill>
+              <a:ea typeface="Calibri"/>
+              <a:cs typeface="Calibri"/>
+            </a:endParaRPr>
+          </a:p>
+          <a:p>
+            <a:pPr marL="285750" indent="-285750">
+              <a:buFont typeface="Arial"/>
+              <a:buChar char="•"/>
             </a:pPr>
             <a:r>
-              <a:rPr lang="en-US" sz="1300" dirty="0">
+              <a:rPr lang="en-US" sz="1250">
                 <a:solidFill>
                   <a:srgbClr val="1A1A1A"/>
                 </a:solidFill>
-                <a:latin typeface="Calibri" pitchFamily="34" charset="0"/>
-                <a:ea typeface="Calibri" pitchFamily="34" charset="-122"/>
-                <a:cs typeface="Calibri" pitchFamily="34" charset="-120"/>
-              </a:rPr>
-              <a:t>bowel, large bowel) from MRI scans</a:t>
-            </a:r>
-            <a:endParaRPr lang="en-US" sz="1300" dirty="0"/>
-          </a:p>
-          <a:p>
-            <a:pPr indent="0" marL="0">
-              <a:buNone/>
-            </a:pPr>
-            <a:r>
-              <a:rPr lang="en-US" sz="1300" dirty="0">
+                <a:ea typeface="Calibri"/>
+                <a:cs typeface="Calibri"/>
+              </a:rPr>
+              <a:t>Went through </a:t>
+            </a:r>
+            <a:r>
+              <a:rPr lang="en-US" sz="1250" err="1">
                 <a:solidFill>
                   <a:srgbClr val="1A1A1A"/>
                 </a:solidFill>
-                <a:latin typeface="Calibri" pitchFamily="34" charset="0"/>
-                <a:ea typeface="Calibri" pitchFamily="34" charset="-122"/>
-                <a:cs typeface="Calibri" pitchFamily="34" charset="-120"/>
-              </a:rPr>
-              <a:t>to enable real-time adaptive</a:t>
-            </a:r>
-            <a:endParaRPr lang="en-US" sz="1300" dirty="0"/>
-          </a:p>
-          <a:p>
-            <a:pPr indent="0" marL="0">
-              <a:buNone/>
-            </a:pPr>
-            <a:r>
-              <a:rPr lang="en-US" sz="1300" dirty="0">
+                <a:ea typeface="Calibri"/>
+                <a:cs typeface="Calibri"/>
+              </a:rPr>
+              <a:t>Dataloader</a:t>
+            </a:r>
+            <a:r>
+              <a:rPr lang="en-US" sz="1250">
                 <a:solidFill>
                   <a:srgbClr val="1A1A1A"/>
                 </a:solidFill>
-                <a:latin typeface="Calibri" pitchFamily="34" charset="0"/>
-                <a:ea typeface="Calibri" pitchFamily="34" charset="-122"/>
-                <a:cs typeface="Calibri" pitchFamily="34" charset="-120"/>
-              </a:rPr>
-              <a:t>radiotherapy.</a:t>
-            </a:r>
-            <a:endParaRPr lang="en-US" sz="1300" dirty="0"/>
+                <a:ea typeface="Calibri"/>
+                <a:cs typeface="Calibri"/>
+              </a:rPr>
+              <a:t> Preprocessing and Verification Process</a:t>
+            </a:r>
           </a:p>
         </p:txBody>
       </p:sp>
@@ -3756,7 +3134,7 @@
             <a:prstDash val="solid"/>
           </a:ln>
           <a:effectLst>
-            <a:outerShdw sx="100000" sy="100000" kx="0" ky="0" algn="bl" rotWithShape="0" blurRad="101600" dist="38100" dir="8100000">
+            <a:outerShdw blurRad="101600" dist="38100" dir="8100000" algn="bl" rotWithShape="0">
               <a:srgbClr val="000000">
                 <a:alpha val="12000"/>
               </a:srgbClr>
@@ -3807,24 +3185,21 @@
           <a:ln/>
         </p:spPr>
         <p:txBody>
-          <a:bodyPr wrap="square" rtlCol="0" anchor="ctr"/>
+          <a:bodyPr wrap="square" lIns="91440" tIns="45720" rIns="91440" bIns="45720" rtlCol="0" anchor="ctr"/>
           <a:lstStyle/>
           <a:p>
-            <a:pPr indent="0" marL="0">
-              <a:buNone/>
-            </a:pPr>
-            <a:r>
-              <a:rPr lang="en-US" sz="1300" b="1" dirty="0">
+            <a:r>
+              <a:rPr lang="en-US" sz="1300" b="1">
                 <a:solidFill>
                   <a:srgbClr val="3D0C1F"/>
                 </a:solidFill>
-                <a:latin typeface="Calibri" pitchFamily="34" charset="0"/>
-                <a:ea typeface="Calibri" pitchFamily="34" charset="-122"/>
-                <a:cs typeface="Calibri" pitchFamily="34" charset="-120"/>
-              </a:rPr>
-              <a:t>Since Last Presentation</a:t>
-            </a:r>
-            <a:endParaRPr lang="en-US" sz="1300" dirty="0"/>
+                <a:latin typeface="Calibri"/>
+                <a:ea typeface="Calibri"/>
+                <a:cs typeface="Calibri"/>
+              </a:rPr>
+              <a:t>This Presentation</a:t>
+            </a:r>
+            <a:endParaRPr lang="en-US"/>
           </a:p>
         </p:txBody>
       </p:sp>
@@ -3846,92 +3221,105 @@
           <a:ln/>
         </p:spPr>
         <p:txBody>
-          <a:bodyPr wrap="square" rtlCol="0" anchor="ctr"/>
+          <a:bodyPr wrap="square" lIns="91440" tIns="45720" rIns="91440" bIns="45720" rtlCol="0" anchor="ctr"/>
           <a:lstStyle/>
           <a:p>
-            <a:pPr indent="0" marL="0">
-              <a:buNone/>
+            <a:pPr marL="285750" indent="-285750">
+              <a:buFont typeface="Arial"/>
+              <a:buChar char="•"/>
             </a:pPr>
             <a:r>
-              <a:rPr lang="en-US" sz="1250" dirty="0">
+              <a:rPr lang="en-US" sz="1250">
                 <a:solidFill>
                   <a:srgbClr val="1A1A1A"/>
                 </a:solidFill>
-                <a:latin typeface="Calibri" pitchFamily="34" charset="0"/>
-                <a:ea typeface="Calibri" pitchFamily="34" charset="-122"/>
-                <a:cs typeface="Calibri" pitchFamily="34" charset="-120"/>
-              </a:rPr>
-              <a:t>✔  DataLoader fully implemented &amp; verified</a:t>
-            </a:r>
-            <a:endParaRPr lang="en-US" sz="1250" dirty="0"/>
-          </a:p>
-          <a:p>
-            <a:pPr indent="0" marL="0">
-              <a:buNone/>
+                <a:ea typeface="Calibri"/>
+                <a:cs typeface="Calibri"/>
+              </a:rPr>
+              <a:t>Established the 2D U-Net Baseline for initial segmentation</a:t>
+            </a:r>
+            <a:endParaRPr lang="en-US"/>
+          </a:p>
+          <a:p>
+            <a:pPr marL="285750" indent="-285750">
+              <a:buFont typeface="Arial"/>
+              <a:buChar char="•"/>
             </a:pPr>
             <a:r>
-              <a:rPr lang="en-US" sz="1250" dirty="0">
+              <a:rPr lang="en-US" sz="1250">
                 <a:solidFill>
                   <a:srgbClr val="1A1A1A"/>
                 </a:solidFill>
-                <a:latin typeface="Calibri" pitchFamily="34" charset="0"/>
-                <a:ea typeface="Calibri" pitchFamily="34" charset="-122"/>
-                <a:cs typeface="Calibri" pitchFamily="34" charset="-120"/>
-              </a:rPr>
-              <a:t>✔  Preprocessing pipeline complete</a:t>
-            </a:r>
-            <a:endParaRPr lang="en-US" sz="1250" dirty="0"/>
-          </a:p>
-          <a:p>
-            <a:pPr indent="0" marL="0">
-              <a:buNone/>
+                <a:ea typeface="Calibri"/>
+                <a:cs typeface="Calibri"/>
+              </a:rPr>
+              <a:t>Used a 2.5D Stack with 3 Slices as input channel for pseudo-3D </a:t>
+            </a:r>
+            <a:r>
+              <a:rPr lang="en-US" sz="1250" err="1">
+                <a:solidFill>
+                  <a:srgbClr val="1A1A1A"/>
+                </a:solidFill>
+                <a:ea typeface="Calibri"/>
+                <a:cs typeface="Calibri"/>
+              </a:rPr>
+              <a:t>spacial</a:t>
+            </a:r>
+            <a:r>
+              <a:rPr lang="en-US" sz="1250">
+                <a:solidFill>
+                  <a:srgbClr val="1A1A1A"/>
+                </a:solidFill>
+                <a:ea typeface="Calibri"/>
+                <a:cs typeface="Calibri"/>
+              </a:rPr>
+              <a:t> context</a:t>
+            </a:r>
+          </a:p>
+          <a:p>
+            <a:pPr marL="285750" indent="-285750">
+              <a:buFont typeface="Arial"/>
+              <a:buChar char="•"/>
             </a:pPr>
             <a:r>
-              <a:rPr lang="en-US" sz="1250" dirty="0">
+              <a:rPr lang="en-US" sz="1250">
                 <a:solidFill>
                   <a:srgbClr val="1A1A1A"/>
                 </a:solidFill>
-                <a:latin typeface="Calibri" pitchFamily="34" charset="0"/>
-                <a:ea typeface="Calibri" pitchFamily="34" charset="-122"/>
-                <a:cs typeface="Calibri" pitchFamily="34" charset="-120"/>
-              </a:rPr>
-              <a:t>✔  Augmentation strategy defined</a:t>
-            </a:r>
-            <a:endParaRPr lang="en-US" sz="1250" dirty="0"/>
-          </a:p>
-          <a:p>
-            <a:pPr indent="0" marL="0">
-              <a:buNone/>
-            </a:pPr>
-            <a:r>
-              <a:rPr lang="en-US" sz="1250" dirty="0">
+                <a:ea typeface="Calibri"/>
+                <a:cs typeface="Calibri"/>
+              </a:rPr>
+              <a:t>Implemented </a:t>
+            </a:r>
+            <a:r>
+              <a:rPr lang="en-US" sz="1250" err="1">
                 <a:solidFill>
                   <a:srgbClr val="1A1A1A"/>
                 </a:solidFill>
-                <a:latin typeface="Calibri" pitchFamily="34" charset="0"/>
-                <a:ea typeface="Calibri" pitchFamily="34" charset="-122"/>
-                <a:cs typeface="Calibri" pitchFamily="34" charset="-120"/>
-              </a:rPr>
-              <a:t>✔  U-Net baseline trained (initial run)</a:t>
-            </a:r>
-            <a:endParaRPr lang="en-US" sz="1250" dirty="0"/>
-          </a:p>
-          <a:p>
-            <a:pPr indent="0" marL="0">
-              <a:buNone/>
-            </a:pPr>
-            <a:r>
-              <a:rPr lang="en-US" sz="1250" dirty="0">
+                <a:ea typeface="Calibri"/>
+                <a:cs typeface="Calibri"/>
+              </a:rPr>
+              <a:t>calcStats.json</a:t>
+            </a:r>
+            <a:r>
+              <a:rPr lang="en-US" sz="1250">
                 <a:solidFill>
                   <a:srgbClr val="1A1A1A"/>
                 </a:solidFill>
-                <a:latin typeface="Calibri" pitchFamily="34" charset="0"/>
-                <a:ea typeface="Calibri" pitchFamily="34" charset="-122"/>
-                <a:cs typeface="Calibri" pitchFamily="34" charset="-120"/>
-              </a:rPr>
-              <a:t>✔  Dice + Hausdorff metrics tracked</a:t>
-            </a:r>
-            <a:endParaRPr lang="en-US" sz="1250" dirty="0"/>
+                <a:ea typeface="Calibri"/>
+                <a:cs typeface="Calibri"/>
+              </a:rPr>
+              <a:t> to standardize validation</a:t>
+            </a:r>
+          </a:p>
+          <a:p>
+            <a:endParaRPr lang="en-US" sz="1250">
+              <a:solidFill>
+                <a:srgbClr val="1A1A1A"/>
+              </a:solidFill>
+              <a:ea typeface="Calibri"/>
+              <a:cs typeface="Calibri"/>
+            </a:endParaRPr>
           </a:p>
         </p:txBody>
       </p:sp>
@@ -3959,7 +3347,7 @@
             <a:prstDash val="solid"/>
           </a:ln>
           <a:effectLst>
-            <a:outerShdw sx="100000" sy="100000" kx="0" ky="0" algn="bl" rotWithShape="0" blurRad="101600" dist="38100" dir="8100000">
+            <a:outerShdw blurRad="101600" dist="38100" dir="8100000" algn="bl" rotWithShape="0">
               <a:srgbClr val="000000">
                 <a:alpha val="12000"/>
               </a:srgbClr>
@@ -3988,11 +3376,11 @@
           <a:bodyPr wrap="square" rtlCol="0" anchor="b"/>
           <a:lstStyle/>
           <a:p>
-            <a:pPr algn="ctr" indent="0" marL="0">
+            <a:pPr marL="0" indent="0" algn="ctr">
               <a:buNone/>
             </a:pPr>
             <a:r>
-              <a:rPr lang="en-US" sz="2200" b="1" dirty="0">
+              <a:rPr lang="en-US" sz="2200" b="1">
                 <a:solidFill>
                   <a:srgbClr val="CEB888"/>
                 </a:solidFill>
@@ -4002,7 +3390,7 @@
               </a:rPr>
               <a:t>38,496</a:t>
             </a:r>
-            <a:endParaRPr lang="en-US" sz="2200" dirty="0"/>
+            <a:endParaRPr lang="en-US" sz="2200"/>
           </a:p>
         </p:txBody>
       </p:sp>
@@ -4027,11 +3415,11 @@
           <a:bodyPr wrap="square" rtlCol="0" anchor="ctr"/>
           <a:lstStyle/>
           <a:p>
-            <a:pPr algn="ctr" indent="0" marL="0">
+            <a:pPr marL="0" indent="0" algn="ctr">
               <a:buNone/>
             </a:pPr>
             <a:r>
-              <a:rPr lang="en-US" sz="1100" dirty="0">
+              <a:rPr lang="en-US" sz="1100">
                 <a:solidFill>
                   <a:srgbClr val="D4B896"/>
                 </a:solidFill>
@@ -4041,7 +3429,7 @@
               </a:rPr>
               <a:t>MRI Slices</a:t>
             </a:r>
-            <a:endParaRPr lang="en-US" sz="1100" dirty="0"/>
+            <a:endParaRPr lang="en-US" sz="1100"/>
           </a:p>
         </p:txBody>
       </p:sp>
@@ -4069,7 +3457,7 @@
             <a:prstDash val="solid"/>
           </a:ln>
           <a:effectLst>
-            <a:outerShdw sx="100000" sy="100000" kx="0" ky="0" algn="bl" rotWithShape="0" blurRad="101600" dist="38100" dir="8100000">
+            <a:outerShdw blurRad="101600" dist="38100" dir="8100000" algn="bl" rotWithShape="0">
               <a:srgbClr val="000000">
                 <a:alpha val="12000"/>
               </a:srgbClr>
@@ -4098,11 +3486,11 @@
           <a:bodyPr wrap="square" rtlCol="0" anchor="b"/>
           <a:lstStyle/>
           <a:p>
-            <a:pPr algn="ctr" indent="0" marL="0">
+            <a:pPr marL="0" indent="0" algn="ctr">
               <a:buNone/>
             </a:pPr>
             <a:r>
-              <a:rPr lang="en-US" sz="2200" b="1" dirty="0">
+              <a:rPr lang="en-US" sz="2200" b="1">
                 <a:solidFill>
                   <a:srgbClr val="CEB888"/>
                 </a:solidFill>
@@ -4112,7 +3500,7 @@
               </a:rPr>
               <a:t>85</a:t>
             </a:r>
-            <a:endParaRPr lang="en-US" sz="2200" dirty="0"/>
+            <a:endParaRPr lang="en-US" sz="2200"/>
           </a:p>
         </p:txBody>
       </p:sp>
@@ -4137,11 +3525,11 @@
           <a:bodyPr wrap="square" rtlCol="0" anchor="ctr"/>
           <a:lstStyle/>
           <a:p>
-            <a:pPr algn="ctr" indent="0" marL="0">
+            <a:pPr marL="0" indent="0" algn="ctr">
               <a:buNone/>
             </a:pPr>
             <a:r>
-              <a:rPr lang="en-US" sz="1100" dirty="0">
+              <a:rPr lang="en-US" sz="1100">
                 <a:solidFill>
                   <a:srgbClr val="D4B896"/>
                 </a:solidFill>
@@ -4151,7 +3539,7 @@
               </a:rPr>
               <a:t>Patients</a:t>
             </a:r>
-            <a:endParaRPr lang="en-US" sz="1100" dirty="0"/>
+            <a:endParaRPr lang="en-US" sz="1100"/>
           </a:p>
         </p:txBody>
       </p:sp>
@@ -4179,7 +3567,7 @@
             <a:prstDash val="solid"/>
           </a:ln>
           <a:effectLst>
-            <a:outerShdw sx="100000" sy="100000" kx="0" ky="0" algn="bl" rotWithShape="0" blurRad="101600" dist="38100" dir="8100000">
+            <a:outerShdw blurRad="101600" dist="38100" dir="8100000" algn="bl" rotWithShape="0">
               <a:srgbClr val="000000">
                 <a:alpha val="12000"/>
               </a:srgbClr>
@@ -4208,11 +3596,11 @@
           <a:bodyPr wrap="square" rtlCol="0" anchor="b"/>
           <a:lstStyle/>
           <a:p>
-            <a:pPr algn="ctr" indent="0" marL="0">
+            <a:pPr marL="0" indent="0" algn="ctr">
               <a:buNone/>
             </a:pPr>
             <a:r>
-              <a:rPr lang="en-US" sz="2200" b="1" dirty="0">
+              <a:rPr lang="en-US" sz="2200" b="1">
                 <a:solidFill>
                   <a:srgbClr val="CEB888"/>
                 </a:solidFill>
@@ -4222,7 +3610,7 @@
               </a:rPr>
               <a:t>3</a:t>
             </a:r>
-            <a:endParaRPr lang="en-US" sz="2200" dirty="0"/>
+            <a:endParaRPr lang="en-US" sz="2200"/>
           </a:p>
         </p:txBody>
       </p:sp>
@@ -4247,11 +3635,11 @@
           <a:bodyPr wrap="square" rtlCol="0" anchor="ctr"/>
           <a:lstStyle/>
           <a:p>
-            <a:pPr algn="ctr" indent="0" marL="0">
+            <a:pPr marL="0" indent="0" algn="ctr">
               <a:buNone/>
             </a:pPr>
             <a:r>
-              <a:rPr lang="en-US" sz="1100" dirty="0">
+              <a:rPr lang="en-US" sz="1100">
                 <a:solidFill>
                   <a:srgbClr val="D4B896"/>
                 </a:solidFill>
@@ -4261,7 +3649,7 @@
               </a:rPr>
               <a:t>Target Classes</a:t>
             </a:r>
-            <a:endParaRPr lang="en-US" sz="1100" dirty="0"/>
+            <a:endParaRPr lang="en-US" sz="1100"/>
           </a:p>
         </p:txBody>
       </p:sp>
@@ -4289,7 +3677,7 @@
             <a:prstDash val="solid"/>
           </a:ln>
           <a:effectLst>
-            <a:outerShdw sx="100000" sy="100000" kx="0" ky="0" algn="bl" rotWithShape="0" blurRad="101600" dist="38100" dir="8100000">
+            <a:outerShdw blurRad="101600" dist="38100" dir="8100000" algn="bl" rotWithShape="0">
               <a:srgbClr val="000000">
                 <a:alpha val="12000"/>
               </a:srgbClr>
@@ -4318,11 +3706,11 @@
           <a:bodyPr wrap="square" rtlCol="0" anchor="b"/>
           <a:lstStyle/>
           <a:p>
-            <a:pPr algn="ctr" indent="0" marL="0">
+            <a:pPr marL="0" indent="0" algn="ctr">
               <a:buNone/>
             </a:pPr>
             <a:r>
-              <a:rPr lang="en-US" sz="2200" b="1" dirty="0">
+              <a:rPr lang="en-US" sz="2200" b="1">
                 <a:solidFill>
                   <a:srgbClr val="CEB888"/>
                 </a:solidFill>
@@ -4332,7 +3720,7 @@
               </a:rPr>
               <a:t>2.47 GB</a:t>
             </a:r>
-            <a:endParaRPr lang="en-US" sz="2200" dirty="0"/>
+            <a:endParaRPr lang="en-US" sz="2200"/>
           </a:p>
         </p:txBody>
       </p:sp>
@@ -4357,11 +3745,11 @@
           <a:bodyPr wrap="square" rtlCol="0" anchor="ctr"/>
           <a:lstStyle/>
           <a:p>
-            <a:pPr algn="ctr" indent="0" marL="0">
+            <a:pPr marL="0" indent="0" algn="ctr">
               <a:buNone/>
             </a:pPr>
             <a:r>
-              <a:rPr lang="en-US" sz="1100" dirty="0">
+              <a:rPr lang="en-US" sz="1100">
                 <a:solidFill>
                   <a:srgbClr val="D4B896"/>
                 </a:solidFill>
@@ -4371,7 +3759,53 @@
               </a:rPr>
               <a:t>Dataset Size</a:t>
             </a:r>
-            <a:endParaRPr lang="en-US" sz="1100" dirty="0"/>
+            <a:endParaRPr lang="en-US" sz="1100"/>
+          </a:p>
+        </p:txBody>
+      </p:sp>
+      <p:sp>
+        <p:nvSpPr>
+          <p:cNvPr id="25" name="TextBox 24">
+            <a:extLst>
+              <a:ext uri="{FF2B5EF4-FFF2-40B4-BE49-F238E27FC236}">
+                <a16:creationId xmlns:a16="http://schemas.microsoft.com/office/drawing/2014/main" id="{71C2F7B3-C6EB-6C36-8A41-AFA68AA68622}"/>
+              </a:ext>
+            </a:extLst>
+          </p:cNvPr>
+          <p:cNvSpPr txBox="1"/>
+          <p:nvPr/>
+        </p:nvSpPr>
+        <p:spPr>
+          <a:xfrm>
+            <a:off x="8877586" y="4898571"/>
+            <a:ext cx="163285" cy="246221"/>
+          </a:xfrm>
+          <a:prstGeom prst="rect">
+            <a:avLst/>
+          </a:prstGeom>
+          <a:noFill/>
+        </p:spPr>
+        <p:txBody>
+          <a:bodyPr rot="0" spcFirstLastPara="0" vertOverflow="overflow" horzOverflow="overflow" vert="horz" wrap="square" lIns="91440" tIns="45720" rIns="91440" bIns="45720" numCol="1" spcCol="0" rtlCol="0" fromWordArt="0" anchor="t" anchorCtr="0" forceAA="0" compatLnSpc="1">
+            <a:prstTxWarp prst="textNoShape">
+              <a:avLst/>
+            </a:prstTxWarp>
+            <a:spAutoFit/>
+          </a:bodyPr>
+          <a:lstStyle/>
+          <a:p>
+            <a:pPr algn="l"/>
+            <a:r>
+              <a:rPr lang="en-US" sz="1000">
+                <a:ea typeface="Calibri"/>
+                <a:cs typeface="Calibri"/>
+              </a:rPr>
+              <a:t>3</a:t>
+            </a:r>
+            <a:endParaRPr lang="en-US" sz="1000" dirty="0">
+              <a:ea typeface="Calibri"/>
+              <a:cs typeface="Calibri"/>
+            </a:endParaRPr>
           </a:p>
         </p:txBody>
       </p:sp>
@@ -4391,6 +3825,7 @@
         <a:solidFill>
           <a:srgbClr val="FAF7F5"/>
         </a:solidFill>
+        <a:effectLst/>
       </p:bgPr>
     </p:bg>
     <p:spTree>
@@ -4453,11 +3888,11 @@
           <a:bodyPr wrap="square" rtlCol="0" anchor="ctr"/>
           <a:lstStyle/>
           <a:p>
-            <a:pPr indent="0" marL="0">
+            <a:pPr marL="0" indent="0">
               <a:buNone/>
             </a:pPr>
             <a:r>
-              <a:rPr lang="en-US" sz="2400" b="1" dirty="0">
+              <a:rPr lang="en-US" sz="2400" b="1">
                 <a:solidFill>
                   <a:srgbClr val="FFFFFF"/>
                 </a:solidFill>
@@ -4467,7 +3902,7 @@
               </a:rPr>
               <a:t>02  |  Model Architecture — U-Net</a:t>
             </a:r>
-            <a:endParaRPr lang="en-US" sz="2400" dirty="0"/>
+            <a:endParaRPr lang="en-US" sz="2400"/>
           </a:p>
         </p:txBody>
       </p:sp>
@@ -4517,11 +3952,11 @@
           <a:bodyPr wrap="square" rtlCol="0" anchor="ctr"/>
           <a:lstStyle/>
           <a:p>
-            <a:pPr algn="ctr" indent="0" marL="0">
+            <a:pPr marL="0" indent="0" algn="ctr">
               <a:buNone/>
             </a:pPr>
             <a:r>
-              <a:rPr lang="en-US" sz="900" b="1" dirty="0">
+              <a:rPr lang="en-US" sz="900" b="1">
                 <a:solidFill>
                   <a:srgbClr val="FFFFFF"/>
                 </a:solidFill>
@@ -4531,14 +3966,14 @@
               </a:rPr>
               <a:t>Input</a:t>
             </a:r>
-            <a:endParaRPr lang="en-US" sz="900" dirty="0"/>
-          </a:p>
-          <a:p>
-            <a:pPr algn="ctr" indent="0" marL="0">
+            <a:endParaRPr lang="en-US" sz="900"/>
+          </a:p>
+          <a:p>
+            <a:pPr marL="0" indent="0" algn="ctr">
               <a:buNone/>
             </a:pPr>
             <a:r>
-              <a:rPr lang="en-US" sz="900" b="1" dirty="0">
+              <a:rPr lang="en-US" sz="900" b="1">
                 <a:solidFill>
                   <a:srgbClr val="FFFFFF"/>
                 </a:solidFill>
@@ -4548,7 +3983,7 @@
               </a:rPr>
               <a:t>[B,1,320,320]</a:t>
             </a:r>
-            <a:endParaRPr lang="en-US" sz="900" dirty="0"/>
+            <a:endParaRPr lang="en-US" sz="900"/>
           </a:p>
         </p:txBody>
       </p:sp>
@@ -4598,11 +4033,11 @@
           <a:bodyPr wrap="square" rtlCol="0" anchor="ctr"/>
           <a:lstStyle/>
           <a:p>
-            <a:pPr algn="ctr" indent="0" marL="0">
+            <a:pPr marL="0" indent="0" algn="ctr">
               <a:buNone/>
             </a:pPr>
             <a:r>
-              <a:rPr lang="en-US" sz="900" b="1" dirty="0">
+              <a:rPr lang="en-US" sz="900" b="1">
                 <a:solidFill>
                   <a:srgbClr val="FFFFFF"/>
                 </a:solidFill>
@@ -4612,14 +4047,14 @@
               </a:rPr>
               <a:t>Enc 1</a:t>
             </a:r>
-            <a:endParaRPr lang="en-US" sz="900" dirty="0"/>
-          </a:p>
-          <a:p>
-            <a:pPr algn="ctr" indent="0" marL="0">
+            <a:endParaRPr lang="en-US" sz="900"/>
+          </a:p>
+          <a:p>
+            <a:pPr marL="0" indent="0" algn="ctr">
               <a:buNone/>
             </a:pPr>
             <a:r>
-              <a:rPr lang="en-US" sz="900" b="1" dirty="0">
+              <a:rPr lang="en-US" sz="900" b="1">
                 <a:solidFill>
                   <a:srgbClr val="FFFFFF"/>
                 </a:solidFill>
@@ -4629,7 +4064,7 @@
               </a:rPr>
               <a:t>64 ch</a:t>
             </a:r>
-            <a:endParaRPr lang="en-US" sz="900" dirty="0"/>
+            <a:endParaRPr lang="en-US" sz="900"/>
           </a:p>
         </p:txBody>
       </p:sp>
@@ -4702,11 +4137,11 @@
           <a:bodyPr wrap="square" rtlCol="0" anchor="ctr"/>
           <a:lstStyle/>
           <a:p>
-            <a:pPr algn="ctr" indent="0" marL="0">
+            <a:pPr marL="0" indent="0" algn="ctr">
               <a:buNone/>
             </a:pPr>
             <a:r>
-              <a:rPr lang="en-US" sz="900" b="1" dirty="0">
+              <a:rPr lang="en-US" sz="900" b="1">
                 <a:solidFill>
                   <a:srgbClr val="FFFFFF"/>
                 </a:solidFill>
@@ -4716,14 +4151,14 @@
               </a:rPr>
               <a:t>Enc 2</a:t>
             </a:r>
-            <a:endParaRPr lang="en-US" sz="900" dirty="0"/>
-          </a:p>
-          <a:p>
-            <a:pPr algn="ctr" indent="0" marL="0">
+            <a:endParaRPr lang="en-US" sz="900"/>
+          </a:p>
+          <a:p>
+            <a:pPr marL="0" indent="0" algn="ctr">
               <a:buNone/>
             </a:pPr>
             <a:r>
-              <a:rPr lang="en-US" sz="900" b="1" dirty="0">
+              <a:rPr lang="en-US" sz="900" b="1">
                 <a:solidFill>
                   <a:srgbClr val="FFFFFF"/>
                 </a:solidFill>
@@ -4733,7 +4168,7 @@
               </a:rPr>
               <a:t>128 ch</a:t>
             </a:r>
-            <a:endParaRPr lang="en-US" sz="900" dirty="0"/>
+            <a:endParaRPr lang="en-US" sz="900"/>
           </a:p>
         </p:txBody>
       </p:sp>
@@ -4806,11 +4241,11 @@
           <a:bodyPr wrap="square" rtlCol="0" anchor="ctr"/>
           <a:lstStyle/>
           <a:p>
-            <a:pPr algn="ctr" indent="0" marL="0">
+            <a:pPr marL="0" indent="0" algn="ctr">
               <a:buNone/>
             </a:pPr>
             <a:r>
-              <a:rPr lang="en-US" sz="900" b="1" dirty="0">
+              <a:rPr lang="en-US" sz="900" b="1">
                 <a:solidFill>
                   <a:srgbClr val="FFFFFF"/>
                 </a:solidFill>
@@ -4820,14 +4255,14 @@
               </a:rPr>
               <a:t>Enc 3</a:t>
             </a:r>
-            <a:endParaRPr lang="en-US" sz="900" dirty="0"/>
-          </a:p>
-          <a:p>
-            <a:pPr algn="ctr" indent="0" marL="0">
+            <a:endParaRPr lang="en-US" sz="900"/>
+          </a:p>
+          <a:p>
+            <a:pPr marL="0" indent="0" algn="ctr">
               <a:buNone/>
             </a:pPr>
             <a:r>
-              <a:rPr lang="en-US" sz="900" b="1" dirty="0">
+              <a:rPr lang="en-US" sz="900" b="1">
                 <a:solidFill>
                   <a:srgbClr val="FFFFFF"/>
                 </a:solidFill>
@@ -4837,7 +4272,7 @@
               </a:rPr>
               <a:t>256 ch</a:t>
             </a:r>
-            <a:endParaRPr lang="en-US" sz="900" dirty="0"/>
+            <a:endParaRPr lang="en-US" sz="900"/>
           </a:p>
         </p:txBody>
       </p:sp>
@@ -4910,11 +4345,11 @@
           <a:bodyPr wrap="square" rtlCol="0" anchor="ctr"/>
           <a:lstStyle/>
           <a:p>
-            <a:pPr algn="ctr" indent="0" marL="0">
+            <a:pPr marL="0" indent="0" algn="ctr">
               <a:buNone/>
             </a:pPr>
             <a:r>
-              <a:rPr lang="en-US" sz="900" b="1" dirty="0">
+              <a:rPr lang="en-US" sz="900" b="1">
                 <a:solidFill>
                   <a:srgbClr val="FFFFFF"/>
                 </a:solidFill>
@@ -4924,14 +4359,14 @@
               </a:rPr>
               <a:t>Bottleneck</a:t>
             </a:r>
-            <a:endParaRPr lang="en-US" sz="900" dirty="0"/>
-          </a:p>
-          <a:p>
-            <a:pPr algn="ctr" indent="0" marL="0">
+            <a:endParaRPr lang="en-US" sz="900"/>
+          </a:p>
+          <a:p>
+            <a:pPr marL="0" indent="0" algn="ctr">
               <a:buNone/>
             </a:pPr>
             <a:r>
-              <a:rPr lang="en-US" sz="900" b="1" dirty="0">
+              <a:rPr lang="en-US" sz="900" b="1">
                 <a:solidFill>
                   <a:srgbClr val="FFFFFF"/>
                 </a:solidFill>
@@ -4941,7 +4376,7 @@
               </a:rPr>
               <a:t>512 ch</a:t>
             </a:r>
-            <a:endParaRPr lang="en-US" sz="900" dirty="0"/>
+            <a:endParaRPr lang="en-US" sz="900"/>
           </a:p>
         </p:txBody>
       </p:sp>
@@ -4989,11 +4424,11 @@
           <a:bodyPr wrap="square" rtlCol="0" anchor="ctr"/>
           <a:lstStyle/>
           <a:p>
-            <a:pPr algn="ctr" indent="0" marL="0">
+            <a:pPr marL="0" indent="0" algn="ctr">
               <a:buNone/>
             </a:pPr>
             <a:r>
-              <a:rPr lang="en-US" sz="800" i="1" dirty="0">
+              <a:rPr lang="en-US" sz="800" i="1">
                 <a:solidFill>
                   <a:srgbClr val="CEB888"/>
                 </a:solidFill>
@@ -5003,14 +4438,14 @@
               </a:rPr>
               <a:t>Skip</a:t>
             </a:r>
-            <a:endParaRPr lang="en-US" sz="800" dirty="0"/>
-          </a:p>
-          <a:p>
-            <a:pPr algn="ctr" indent="0" marL="0">
+            <a:endParaRPr lang="en-US" sz="800"/>
+          </a:p>
+          <a:p>
+            <a:pPr marL="0" indent="0" algn="ctr">
               <a:buNone/>
             </a:pPr>
             <a:r>
-              <a:rPr lang="en-US" sz="800" i="1" dirty="0">
+              <a:rPr lang="en-US" sz="800" i="1">
                 <a:solidFill>
                   <a:srgbClr val="CEB888"/>
                 </a:solidFill>
@@ -5020,7 +4455,7 @@
               </a:rPr>
               <a:t>Connections</a:t>
             </a:r>
-            <a:endParaRPr lang="en-US" sz="800" dirty="0"/>
+            <a:endParaRPr lang="en-US" sz="800"/>
           </a:p>
         </p:txBody>
       </p:sp>
@@ -5070,11 +4505,11 @@
           <a:bodyPr wrap="square" rtlCol="0" anchor="ctr"/>
           <a:lstStyle/>
           <a:p>
-            <a:pPr algn="ctr" indent="0" marL="0">
+            <a:pPr marL="0" indent="0" algn="ctr">
               <a:buNone/>
             </a:pPr>
             <a:r>
-              <a:rPr lang="en-US" sz="900" b="1" dirty="0">
+              <a:rPr lang="en-US" sz="900" b="1">
                 <a:solidFill>
                   <a:srgbClr val="FFFFFF"/>
                 </a:solidFill>
@@ -5084,14 +4519,14 @@
               </a:rPr>
               <a:t>Dec 3</a:t>
             </a:r>
-            <a:endParaRPr lang="en-US" sz="900" dirty="0"/>
-          </a:p>
-          <a:p>
-            <a:pPr algn="ctr" indent="0" marL="0">
+            <a:endParaRPr lang="en-US" sz="900"/>
+          </a:p>
+          <a:p>
+            <a:pPr marL="0" indent="0" algn="ctr">
               <a:buNone/>
             </a:pPr>
             <a:r>
-              <a:rPr lang="en-US" sz="900" b="1" dirty="0">
+              <a:rPr lang="en-US" sz="900" b="1">
                 <a:solidFill>
                   <a:srgbClr val="FFFFFF"/>
                 </a:solidFill>
@@ -5101,7 +4536,7 @@
               </a:rPr>
               <a:t>256 ch</a:t>
             </a:r>
-            <a:endParaRPr lang="en-US" sz="900" dirty="0"/>
+            <a:endParaRPr lang="en-US" sz="900"/>
           </a:p>
         </p:txBody>
       </p:sp>
@@ -5174,11 +4609,11 @@
           <a:bodyPr wrap="square" rtlCol="0" anchor="ctr"/>
           <a:lstStyle/>
           <a:p>
-            <a:pPr algn="ctr" indent="0" marL="0">
+            <a:pPr marL="0" indent="0" algn="ctr">
               <a:buNone/>
             </a:pPr>
             <a:r>
-              <a:rPr lang="en-US" sz="900" b="1" dirty="0">
+              <a:rPr lang="en-US" sz="900" b="1">
                 <a:solidFill>
                   <a:srgbClr val="FFFFFF"/>
                 </a:solidFill>
@@ -5188,14 +4623,14 @@
               </a:rPr>
               <a:t>Dec 2</a:t>
             </a:r>
-            <a:endParaRPr lang="en-US" sz="900" dirty="0"/>
-          </a:p>
-          <a:p>
-            <a:pPr algn="ctr" indent="0" marL="0">
+            <a:endParaRPr lang="en-US" sz="900"/>
+          </a:p>
+          <a:p>
+            <a:pPr marL="0" indent="0" algn="ctr">
               <a:buNone/>
             </a:pPr>
             <a:r>
-              <a:rPr lang="en-US" sz="900" b="1" dirty="0">
+              <a:rPr lang="en-US" sz="900" b="1">
                 <a:solidFill>
                   <a:srgbClr val="FFFFFF"/>
                 </a:solidFill>
@@ -5205,7 +4640,7 @@
               </a:rPr>
               <a:t>128 ch</a:t>
             </a:r>
-            <a:endParaRPr lang="en-US" sz="900" dirty="0"/>
+            <a:endParaRPr lang="en-US" sz="900"/>
           </a:p>
         </p:txBody>
       </p:sp>
@@ -5278,11 +4713,11 @@
           <a:bodyPr wrap="square" rtlCol="0" anchor="ctr"/>
           <a:lstStyle/>
           <a:p>
-            <a:pPr algn="ctr" indent="0" marL="0">
+            <a:pPr marL="0" indent="0" algn="ctr">
               <a:buNone/>
             </a:pPr>
             <a:r>
-              <a:rPr lang="en-US" sz="900" b="1" dirty="0">
+              <a:rPr lang="en-US" sz="900" b="1">
                 <a:solidFill>
                   <a:srgbClr val="FFFFFF"/>
                 </a:solidFill>
@@ -5292,14 +4727,14 @@
               </a:rPr>
               <a:t>Dec 1</a:t>
             </a:r>
-            <a:endParaRPr lang="en-US" sz="900" dirty="0"/>
-          </a:p>
-          <a:p>
-            <a:pPr algn="ctr" indent="0" marL="0">
+            <a:endParaRPr lang="en-US" sz="900"/>
+          </a:p>
+          <a:p>
+            <a:pPr marL="0" indent="0" algn="ctr">
               <a:buNone/>
             </a:pPr>
             <a:r>
-              <a:rPr lang="en-US" sz="900" b="1" dirty="0">
+              <a:rPr lang="en-US" sz="900" b="1">
                 <a:solidFill>
                   <a:srgbClr val="FFFFFF"/>
                 </a:solidFill>
@@ -5309,7 +4744,7 @@
               </a:rPr>
               <a:t>64 ch</a:t>
             </a:r>
-            <a:endParaRPr lang="en-US" sz="900" dirty="0"/>
+            <a:endParaRPr lang="en-US" sz="900"/>
           </a:p>
         </p:txBody>
       </p:sp>
@@ -5359,11 +4794,11 @@
           <a:bodyPr wrap="square" rtlCol="0" anchor="ctr"/>
           <a:lstStyle/>
           <a:p>
-            <a:pPr algn="ctr" indent="0" marL="0">
+            <a:pPr marL="0" indent="0" algn="ctr">
               <a:buNone/>
             </a:pPr>
             <a:r>
-              <a:rPr lang="en-US" sz="900" b="1" dirty="0">
+              <a:rPr lang="en-US" sz="900" b="1">
                 <a:solidFill>
                   <a:srgbClr val="3D0C1F"/>
                 </a:solidFill>
@@ -5373,14 +4808,14 @@
               </a:rPr>
               <a:t>Output</a:t>
             </a:r>
-            <a:endParaRPr lang="en-US" sz="900" dirty="0"/>
-          </a:p>
-          <a:p>
-            <a:pPr algn="ctr" indent="0" marL="0">
+            <a:endParaRPr lang="en-US" sz="900"/>
+          </a:p>
+          <a:p>
+            <a:pPr marL="0" indent="0" algn="ctr">
               <a:buNone/>
             </a:pPr>
             <a:r>
-              <a:rPr lang="en-US" sz="900" b="1" dirty="0">
+              <a:rPr lang="en-US" sz="900" b="1">
                 <a:solidFill>
                   <a:srgbClr val="3D0C1F"/>
                 </a:solidFill>
@@ -5390,7 +4825,7 @@
               </a:rPr>
               <a:t>[B,3,320,320]</a:t>
             </a:r>
-            <a:endParaRPr lang="en-US" sz="900" dirty="0"/>
+            <a:endParaRPr lang="en-US" sz="900"/>
           </a:p>
         </p:txBody>
       </p:sp>
@@ -5418,7 +4853,7 @@
             <a:prstDash val="solid"/>
           </a:ln>
           <a:effectLst>
-            <a:outerShdw sx="100000" sy="100000" kx="0" ky="0" algn="bl" rotWithShape="0" blurRad="101600" dist="38100" dir="8100000">
+            <a:outerShdw blurRad="101600" dist="38100" dir="8100000" algn="bl" rotWithShape="0">
               <a:srgbClr val="000000">
                 <a:alpha val="12000"/>
               </a:srgbClr>
@@ -5472,11 +4907,11 @@
           <a:bodyPr wrap="square" rtlCol="0" anchor="ctr"/>
           <a:lstStyle/>
           <a:p>
-            <a:pPr indent="0" marL="0">
+            <a:pPr marL="0" indent="0">
               <a:buNone/>
             </a:pPr>
             <a:r>
-              <a:rPr lang="en-US" sz="1200" b="1" dirty="0">
+              <a:rPr lang="en-US" sz="1200" b="1">
                 <a:solidFill>
                   <a:srgbClr val="FFFFFF"/>
                 </a:solidFill>
@@ -5486,7 +4921,7 @@
               </a:rPr>
               <a:t>Input / Output</a:t>
             </a:r>
-            <a:endParaRPr lang="en-US" sz="1200" dirty="0"/>
+            <a:endParaRPr lang="en-US" sz="1200"/>
           </a:p>
         </p:txBody>
       </p:sp>
@@ -5508,14 +4943,35 @@
           <a:ln/>
         </p:spPr>
         <p:txBody>
-          <a:bodyPr wrap="square" rtlCol="0" anchor="ctr"/>
+          <a:bodyPr wrap="square" lIns="91440" tIns="45720" rIns="91440" bIns="45720" rtlCol="0" anchor="ctr"/>
           <a:lstStyle/>
           <a:p>
-            <a:pPr indent="0" marL="0">
+            <a:pPr marL="0" indent="0">
               <a:buNone/>
             </a:pPr>
             <a:r>
-              <a:rPr lang="en-US" sz="1150" dirty="0">
+              <a:rPr lang="en-US" sz="1150">
+                <a:solidFill>
+                  <a:srgbClr val="1A1A1A"/>
+                </a:solidFill>
+                <a:latin typeface="Calibri"/>
+                <a:ea typeface="Calibri"/>
+                <a:cs typeface="Calibri"/>
+              </a:rPr>
+              <a:t>Input: [B, 1, 224, 224]</a:t>
+            </a:r>
+            <a:endParaRPr lang="en-US" sz="1150">
+              <a:latin typeface="Calibri"/>
+              <a:ea typeface="Calibri"/>
+              <a:cs typeface="Calibri"/>
+            </a:endParaRPr>
+          </a:p>
+          <a:p>
+            <a:pPr marL="0" indent="0">
+              <a:buNone/>
+            </a:pPr>
+            <a:r>
+              <a:rPr lang="en-US" sz="1150">
                 <a:solidFill>
                   <a:srgbClr val="1A1A1A"/>
                 </a:solidFill>
@@ -5523,16 +4979,22 @@
                 <a:ea typeface="Calibri" pitchFamily="34" charset="-122"/>
                 <a:cs typeface="Calibri" pitchFamily="34" charset="-120"/>
               </a:rPr>
-              <a:t>Input: [B, 1, 320, 320]</a:t>
-            </a:r>
-            <a:endParaRPr lang="en-US" sz="1150" dirty="0"/>
-          </a:p>
-          <a:p>
-            <a:pPr indent="0" marL="0">
+              <a:t>Normalized float32 (μ=0, σ=1)</a:t>
+            </a:r>
+            <a:endParaRPr lang="en-US" sz="1150"/>
+          </a:p>
+          <a:p>
+            <a:pPr marL="0" indent="0">
               <a:buNone/>
             </a:pPr>
-            <a:r>
-              <a:rPr lang="en-US" sz="1150" dirty="0">
+            <a:endParaRPr lang="en-US" sz="1150"/>
+          </a:p>
+          <a:p>
+            <a:pPr marL="0" indent="0">
+              <a:buNone/>
+            </a:pPr>
+            <a:r>
+              <a:rPr lang="en-US" sz="1150">
                 <a:solidFill>
                   <a:srgbClr val="1A1A1A"/>
                 </a:solidFill>
@@ -5540,22 +5002,16 @@
                 <a:ea typeface="Calibri" pitchFamily="34" charset="-122"/>
                 <a:cs typeface="Calibri" pitchFamily="34" charset="-120"/>
               </a:rPr>
-              <a:t>Normalized float32 (μ=0, σ=1)</a:t>
-            </a:r>
-            <a:endParaRPr lang="en-US" sz="1150" dirty="0"/>
-          </a:p>
-          <a:p>
-            <a:pPr indent="0" marL="0">
+              <a:t>Output: [B, 3, 320, 320]</a:t>
+            </a:r>
+            <a:endParaRPr lang="en-US" sz="1150"/>
+          </a:p>
+          <a:p>
+            <a:pPr marL="0" indent="0">
               <a:buNone/>
             </a:pPr>
-            <a:endParaRPr lang="en-US" sz="1150" dirty="0"/>
-          </a:p>
-          <a:p>
-            <a:pPr indent="0" marL="0">
-              <a:buNone/>
-            </a:pPr>
-            <a:r>
-              <a:rPr lang="en-US" sz="1150" dirty="0">
+            <a:r>
+              <a:rPr lang="en-US" sz="1150">
                 <a:solidFill>
                   <a:srgbClr val="1A1A1A"/>
                 </a:solidFill>
@@ -5563,26 +5019,9 @@
                 <a:ea typeface="Calibri" pitchFamily="34" charset="-122"/>
                 <a:cs typeface="Calibri" pitchFamily="34" charset="-120"/>
               </a:rPr>
-              <a:t>Output: [B, 3, 320, 320]</a:t>
-            </a:r>
-            <a:endParaRPr lang="en-US" sz="1150" dirty="0"/>
-          </a:p>
-          <a:p>
-            <a:pPr indent="0" marL="0">
-              <a:buNone/>
-            </a:pPr>
-            <a:r>
-              <a:rPr lang="en-US" sz="1150" dirty="0">
-                <a:solidFill>
-                  <a:srgbClr val="1A1A1A"/>
-                </a:solidFill>
-                <a:latin typeface="Calibri" pitchFamily="34" charset="0"/>
-                <a:ea typeface="Calibri" pitchFamily="34" charset="-122"/>
-                <a:cs typeface="Calibri" pitchFamily="34" charset="-120"/>
-              </a:rPr>
               <a:t>Per-class binary sigmoid masks</a:t>
             </a:r>
-            <a:endParaRPr lang="en-US" sz="1150" dirty="0"/>
+            <a:endParaRPr lang="en-US" sz="1150"/>
           </a:p>
         </p:txBody>
       </p:sp>
@@ -5610,7 +5049,7 @@
             <a:prstDash val="solid"/>
           </a:ln>
           <a:effectLst>
-            <a:outerShdw sx="100000" sy="100000" kx="0" ky="0" algn="bl" rotWithShape="0" blurRad="101600" dist="38100" dir="8100000">
+            <a:outerShdw blurRad="101600" dist="38100" dir="8100000" algn="bl" rotWithShape="0">
               <a:srgbClr val="000000">
                 <a:alpha val="12000"/>
               </a:srgbClr>
@@ -5664,11 +5103,11 @@
           <a:bodyPr wrap="square" rtlCol="0" anchor="ctr"/>
           <a:lstStyle/>
           <a:p>
-            <a:pPr indent="0" marL="0">
+            <a:pPr marL="0" indent="0">
               <a:buNone/>
             </a:pPr>
             <a:r>
-              <a:rPr lang="en-US" sz="1200" b="1" dirty="0">
+              <a:rPr lang="en-US" sz="1200" b="1">
                 <a:solidFill>
                   <a:srgbClr val="FFFFFF"/>
                 </a:solidFill>
@@ -5678,7 +5117,7 @@
               </a:rPr>
               <a:t>Architecture Details</a:t>
             </a:r>
-            <a:endParaRPr lang="en-US" sz="1200" dirty="0"/>
+            <a:endParaRPr lang="en-US" sz="1200"/>
           </a:p>
         </p:txBody>
       </p:sp>
@@ -5703,11 +5142,11 @@
           <a:bodyPr wrap="square" rtlCol="0" anchor="ctr"/>
           <a:lstStyle/>
           <a:p>
-            <a:pPr indent="0" marL="0">
+            <a:pPr marL="0" indent="0">
               <a:buNone/>
             </a:pPr>
             <a:r>
-              <a:rPr lang="en-US" sz="1150" dirty="0">
+              <a:rPr lang="en-US" sz="1150">
                 <a:solidFill>
                   <a:srgbClr val="1A1A1A"/>
                 </a:solidFill>
@@ -5717,14 +5156,14 @@
               </a:rPr>
               <a:t>2D U-Net (encoder-decoder)</a:t>
             </a:r>
-            <a:endParaRPr lang="en-US" sz="1150" dirty="0"/>
-          </a:p>
-          <a:p>
-            <a:pPr indent="0" marL="0">
+            <a:endParaRPr lang="en-US" sz="1150"/>
+          </a:p>
+          <a:p>
+            <a:pPr marL="0" indent="0">
               <a:buNone/>
             </a:pPr>
             <a:r>
-              <a:rPr lang="en-US" sz="1150" dirty="0">
+              <a:rPr lang="en-US" sz="1150">
                 <a:solidFill>
                   <a:srgbClr val="1A1A1A"/>
                 </a:solidFill>
@@ -5734,14 +5173,14 @@
               </a:rPr>
               <a:t>Skip connections preserve edges</a:t>
             </a:r>
-            <a:endParaRPr lang="en-US" sz="1150" dirty="0"/>
-          </a:p>
-          <a:p>
-            <a:pPr indent="0" marL="0">
+            <a:endParaRPr lang="en-US" sz="1150"/>
+          </a:p>
+          <a:p>
+            <a:pPr marL="0" indent="0">
               <a:buNone/>
             </a:pPr>
             <a:r>
-              <a:rPr lang="en-US" sz="1150" dirty="0">
+              <a:rPr lang="en-US" sz="1150">
                 <a:solidFill>
                   <a:srgbClr val="1A1A1A"/>
                 </a:solidFill>
@@ -5751,14 +5190,14 @@
               </a:rPr>
               <a:t>Batch Norm + ReLU per block</a:t>
             </a:r>
-            <a:endParaRPr lang="en-US" sz="1150" dirty="0"/>
-          </a:p>
-          <a:p>
-            <a:pPr indent="0" marL="0">
+            <a:endParaRPr lang="en-US" sz="1150"/>
+          </a:p>
+          <a:p>
+            <a:pPr marL="0" indent="0">
               <a:buNone/>
             </a:pPr>
             <a:r>
-              <a:rPr lang="en-US" sz="1150" dirty="0">
+              <a:rPr lang="en-US" sz="1150">
                 <a:solidFill>
                   <a:srgbClr val="1A1A1A"/>
                 </a:solidFill>
@@ -5768,7 +5207,7 @@
               </a:rPr>
               <a:t>Pretrained backbone: EfficientNet-B4</a:t>
             </a:r>
-            <a:endParaRPr lang="en-US" sz="1150" dirty="0"/>
+            <a:endParaRPr lang="en-US" sz="1150"/>
           </a:p>
         </p:txBody>
       </p:sp>
@@ -5796,7 +5235,7 @@
             <a:prstDash val="solid"/>
           </a:ln>
           <a:effectLst>
-            <a:outerShdw sx="100000" sy="100000" kx="0" ky="0" algn="bl" rotWithShape="0" blurRad="101600" dist="38100" dir="8100000">
+            <a:outerShdw blurRad="101600" dist="38100" dir="8100000" algn="bl" rotWithShape="0">
               <a:srgbClr val="000000">
                 <a:alpha val="12000"/>
               </a:srgbClr>
@@ -5850,11 +5289,11 @@
           <a:bodyPr wrap="square" rtlCol="0" anchor="ctr"/>
           <a:lstStyle/>
           <a:p>
-            <a:pPr indent="0" marL="0">
+            <a:pPr marL="0" indent="0">
               <a:buNone/>
             </a:pPr>
             <a:r>
-              <a:rPr lang="en-US" sz="1200" b="1" dirty="0">
+              <a:rPr lang="en-US" sz="1200" b="1">
                 <a:solidFill>
                   <a:srgbClr val="3D0C1F"/>
                 </a:solidFill>
@@ -5864,7 +5303,7 @@
               </a:rPr>
               <a:t>2.5D Extension (Planned)</a:t>
             </a:r>
-            <a:endParaRPr lang="en-US" sz="1200" dirty="0"/>
+            <a:endParaRPr lang="en-US" sz="1200"/>
           </a:p>
         </p:txBody>
       </p:sp>
@@ -5889,11 +5328,11 @@
           <a:bodyPr wrap="square" rtlCol="0" anchor="ctr"/>
           <a:lstStyle/>
           <a:p>
-            <a:pPr indent="0" marL="0">
+            <a:pPr marL="0" indent="0">
               <a:buNone/>
             </a:pPr>
             <a:r>
-              <a:rPr lang="en-US" sz="1150" dirty="0">
+              <a:rPr lang="en-US" sz="1150">
                 <a:solidFill>
                   <a:srgbClr val="1A1A1A"/>
                 </a:solidFill>
@@ -5903,14 +5342,14 @@
               </a:rPr>
               <a:t>Stack N=3 adjacent slices</a:t>
             </a:r>
-            <a:endParaRPr lang="en-US" sz="1150" dirty="0"/>
-          </a:p>
-          <a:p>
-            <a:pPr indent="0" marL="0">
+            <a:endParaRPr lang="en-US" sz="1150"/>
+          </a:p>
+          <a:p>
+            <a:pPr marL="0" indent="0">
               <a:buNone/>
             </a:pPr>
             <a:r>
-              <a:rPr lang="en-US" sz="1150" dirty="0">
+              <a:rPr lang="en-US" sz="1150">
                 <a:solidFill>
                   <a:srgbClr val="1A1A1A"/>
                 </a:solidFill>
@@ -5920,14 +5359,14 @@
               </a:rPr>
               <a:t>as input channels [B, 3, H, W]</a:t>
             </a:r>
-            <a:endParaRPr lang="en-US" sz="1150" dirty="0"/>
-          </a:p>
-          <a:p>
-            <a:pPr indent="0" marL="0">
+            <a:endParaRPr lang="en-US" sz="1150"/>
+          </a:p>
+          <a:p>
+            <a:pPr marL="0" indent="0">
               <a:buNone/>
             </a:pPr>
             <a:r>
-              <a:rPr lang="en-US" sz="1150" dirty="0">
+              <a:rPr lang="en-US" sz="1150">
                 <a:solidFill>
                   <a:srgbClr val="1A1A1A"/>
                 </a:solidFill>
@@ -5937,14 +5376,14 @@
               </a:rPr>
               <a:t>Adds depth context without</a:t>
             </a:r>
-            <a:endParaRPr lang="en-US" sz="1150" dirty="0"/>
-          </a:p>
-          <a:p>
-            <a:pPr indent="0" marL="0">
+            <a:endParaRPr lang="en-US" sz="1150"/>
+          </a:p>
+          <a:p>
+            <a:pPr marL="0" indent="0">
               <a:buNone/>
             </a:pPr>
             <a:r>
-              <a:rPr lang="en-US" sz="1150" dirty="0">
+              <a:rPr lang="en-US" sz="1150">
                 <a:solidFill>
                   <a:srgbClr val="1A1A1A"/>
                 </a:solidFill>
@@ -5954,7 +5393,53 @@
               </a:rPr>
               <a:t>3D convolution overhead</a:t>
             </a:r>
-            <a:endParaRPr lang="en-US" sz="1150" dirty="0"/>
+            <a:endParaRPr lang="en-US" sz="1150"/>
+          </a:p>
+        </p:txBody>
+      </p:sp>
+      <p:sp>
+        <p:nvSpPr>
+          <p:cNvPr id="42" name="TextBox 41">
+            <a:extLst>
+              <a:ext uri="{FF2B5EF4-FFF2-40B4-BE49-F238E27FC236}">
+                <a16:creationId xmlns:a16="http://schemas.microsoft.com/office/drawing/2014/main" id="{008A1E5B-F23E-0688-D85D-A49A35853C47}"/>
+              </a:ext>
+            </a:extLst>
+          </p:cNvPr>
+          <p:cNvSpPr txBox="1"/>
+          <p:nvPr/>
+        </p:nvSpPr>
+        <p:spPr>
+          <a:xfrm>
+            <a:off x="8877586" y="4829819"/>
+            <a:ext cx="163285" cy="246221"/>
+          </a:xfrm>
+          <a:prstGeom prst="rect">
+            <a:avLst/>
+          </a:prstGeom>
+          <a:noFill/>
+        </p:spPr>
+        <p:txBody>
+          <a:bodyPr rot="0" spcFirstLastPara="0" vertOverflow="overflow" horzOverflow="overflow" vert="horz" wrap="square" lIns="91440" tIns="45720" rIns="91440" bIns="45720" numCol="1" spcCol="0" rtlCol="0" fromWordArt="0" anchor="t" anchorCtr="0" forceAA="0" compatLnSpc="1">
+            <a:prstTxWarp prst="textNoShape">
+              <a:avLst/>
+            </a:prstTxWarp>
+            <a:spAutoFit/>
+          </a:bodyPr>
+          <a:lstStyle/>
+          <a:p>
+            <a:pPr algn="l"/>
+            <a:r>
+              <a:rPr lang="en-US" sz="1000">
+                <a:ea typeface="Calibri"/>
+                <a:cs typeface="Calibri"/>
+              </a:rPr>
+              <a:t>4</a:t>
+            </a:r>
+            <a:endParaRPr lang="en-US" sz="1000" dirty="0">
+              <a:ea typeface="Calibri"/>
+              <a:cs typeface="Calibri"/>
+            </a:endParaRPr>
           </a:p>
         </p:txBody>
       </p:sp>
@@ -5974,6 +5459,7 @@
         <a:solidFill>
           <a:srgbClr val="FAF7F5"/>
         </a:solidFill>
+        <a:effectLst/>
       </p:bgPr>
     </p:bg>
     <p:spTree>
@@ -6036,11 +5522,11 @@
           <a:bodyPr wrap="square" rtlCol="0" anchor="ctr"/>
           <a:lstStyle/>
           <a:p>
-            <a:pPr indent="0" marL="0">
+            <a:pPr marL="0" indent="0">
               <a:buNone/>
             </a:pPr>
             <a:r>
-              <a:rPr lang="en-US" sz="2400" b="1" dirty="0">
+              <a:rPr lang="en-US" sz="2400" b="1">
                 <a:solidFill>
                   <a:srgbClr val="FFFFFF"/>
                 </a:solidFill>
@@ -6050,7 +5536,7 @@
               </a:rPr>
               <a:t>03  |  Training &amp; Validation Results</a:t>
             </a:r>
-            <a:endParaRPr lang="en-US" sz="2400" dirty="0"/>
+            <a:endParaRPr lang="en-US" sz="2400"/>
           </a:p>
         </p:txBody>
       </p:sp>
@@ -6078,7 +5564,7 @@
             <a:prstDash val="solid"/>
           </a:ln>
           <a:effectLst>
-            <a:outerShdw sx="100000" sy="100000" kx="0" ky="0" algn="bl" rotWithShape="0" blurRad="101600" dist="38100" dir="8100000">
+            <a:outerShdw blurRad="101600" dist="38100" dir="8100000" algn="bl" rotWithShape="0">
               <a:srgbClr val="000000">
                 <a:alpha val="12000"/>
               </a:srgbClr>
@@ -6132,11 +5618,11 @@
           <a:bodyPr wrap="square" rtlCol="0" anchor="ctr"/>
           <a:lstStyle/>
           <a:p>
-            <a:pPr indent="0" marL="0">
+            <a:pPr marL="0" indent="0">
               <a:buNone/>
             </a:pPr>
             <a:r>
-              <a:rPr lang="en-US" sz="1300" b="1" dirty="0">
+              <a:rPr lang="en-US" sz="1300" b="1">
                 <a:solidFill>
                   <a:srgbClr val="FFFFFF"/>
                 </a:solidFill>
@@ -6146,7 +5632,7 @@
               </a:rPr>
               <a:t>Training Setup</a:t>
             </a:r>
-            <a:endParaRPr lang="en-US" sz="1300" dirty="0"/>
+            <a:endParaRPr lang="en-US" sz="1300"/>
           </a:p>
         </p:txBody>
       </p:sp>
@@ -6168,154 +5654,237 @@
           <a:ln/>
         </p:spPr>
         <p:txBody>
-          <a:bodyPr wrap="square" rtlCol="0" anchor="ctr"/>
+          <a:bodyPr wrap="square" lIns="91440" tIns="45720" rIns="91440" bIns="45720" rtlCol="0" anchor="ctr"/>
           <a:lstStyle/>
           <a:p>
-            <a:pPr indent="0" marL="0">
-              <a:buNone/>
-            </a:pPr>
             <a:r>
               <a:rPr lang="en-US" sz="1150" b="1" dirty="0">
                 <a:solidFill>
                   <a:srgbClr val="1A1A1A"/>
                 </a:solidFill>
-                <a:latin typeface="Calibri" pitchFamily="34" charset="0"/>
-                <a:ea typeface="Calibri" pitchFamily="34" charset="-122"/>
-                <a:cs typeface="Calibri" pitchFamily="34" charset="-120"/>
+                <a:latin typeface="Calibri"/>
+                <a:ea typeface="Calibri"/>
+                <a:cs typeface="Calibri"/>
               </a:rPr>
               <a:t>Optimizer:</a:t>
             </a:r>
-            <a:pPr indent="0" marL="0">
-              <a:buNone/>
-            </a:pPr>
             <a:r>
               <a:rPr lang="en-US" sz="1150" dirty="0">
                 <a:solidFill>
                   <a:srgbClr val="1A1A1A"/>
                 </a:solidFill>
-                <a:latin typeface="Calibri" pitchFamily="34" charset="0"/>
-                <a:ea typeface="Calibri" pitchFamily="34" charset="-122"/>
-                <a:cs typeface="Calibri" pitchFamily="34" charset="-120"/>
-              </a:rPr>
-              <a:t>  AdamW (lr=1e-4)
+                <a:latin typeface="Calibri"/>
+                <a:ea typeface="Calibri"/>
+                <a:cs typeface="Calibri"/>
+              </a:rPr>
+              <a:t>  </a:t>
+            </a:r>
+            <a:r>
+              <a:rPr lang="en-US" sz="1150" dirty="0" err="1">
+                <a:solidFill>
+                  <a:srgbClr val="1A1A1A"/>
+                </a:solidFill>
+                <a:latin typeface="Calibri"/>
+                <a:ea typeface="Calibri"/>
+                <a:cs typeface="Calibri"/>
+              </a:rPr>
+              <a:t>AdamW</a:t>
+            </a:r>
+            <a:r>
+              <a:rPr lang="en-US" sz="1150" dirty="0">
+                <a:solidFill>
+                  <a:srgbClr val="1A1A1A"/>
+                </a:solidFill>
+                <a:latin typeface="Calibri"/>
+                <a:ea typeface="Calibri"/>
+                <a:cs typeface="Calibri"/>
+              </a:rPr>
+              <a:t> (</a:t>
+            </a:r>
+            <a:r>
+              <a:rPr lang="en-US" sz="1150" dirty="0" err="1">
+                <a:solidFill>
+                  <a:srgbClr val="1A1A1A"/>
+                </a:solidFill>
+                <a:latin typeface="Calibri"/>
+                <a:ea typeface="Calibri"/>
+                <a:cs typeface="Calibri"/>
+              </a:rPr>
+              <a:t>lr</a:t>
+            </a:r>
+            <a:r>
+              <a:rPr lang="en-US" sz="1150" dirty="0">
+                <a:solidFill>
+                  <a:srgbClr val="1A1A1A"/>
+                </a:solidFill>
+                <a:latin typeface="Calibri"/>
+                <a:ea typeface="Calibri"/>
+                <a:cs typeface="Calibri"/>
+              </a:rPr>
+              <a:t>=1e-4)
 </a:t>
             </a:r>
-            <a:pPr indent="0" marL="0">
-              <a:buNone/>
-            </a:pPr>
             <a:r>
               <a:rPr lang="en-US" sz="1150" b="1" dirty="0">
                 <a:solidFill>
                   <a:srgbClr val="1A1A1A"/>
                 </a:solidFill>
-                <a:latin typeface="Calibri" pitchFamily="34" charset="0"/>
-                <a:ea typeface="Calibri" pitchFamily="34" charset="-122"/>
-                <a:cs typeface="Calibri" pitchFamily="34" charset="-120"/>
+                <a:latin typeface="Calibri"/>
+                <a:ea typeface="Calibri"/>
+                <a:cs typeface="Calibri"/>
               </a:rPr>
               <a:t>Scheduler:</a:t>
             </a:r>
-            <a:pPr indent="0" marL="0">
-              <a:buNone/>
-            </a:pPr>
             <a:r>
               <a:rPr lang="en-US" sz="1150" dirty="0">
                 <a:solidFill>
                   <a:srgbClr val="1A1A1A"/>
                 </a:solidFill>
-                <a:latin typeface="Calibri" pitchFamily="34" charset="0"/>
-                <a:ea typeface="Calibri" pitchFamily="34" charset="-122"/>
-                <a:cs typeface="Calibri" pitchFamily="34" charset="-120"/>
-              </a:rPr>
-              <a:t>  CosineAnnealing
+                <a:latin typeface="Calibri"/>
+                <a:ea typeface="Calibri"/>
+                <a:cs typeface="Calibri"/>
+              </a:rPr>
+              <a:t>  </a:t>
+            </a:r>
+            <a:r>
+              <a:rPr lang="en-US" sz="1150" dirty="0" err="1">
+                <a:solidFill>
+                  <a:srgbClr val="1A1A1A"/>
+                </a:solidFill>
+                <a:latin typeface="Calibri"/>
+                <a:ea typeface="Calibri"/>
+                <a:cs typeface="Calibri"/>
+              </a:rPr>
+              <a:t>CosineAnnealing</a:t>
+            </a:r>
+            <a:r>
+              <a:rPr lang="en-US" sz="1150" dirty="0">
+                <a:solidFill>
+                  <a:srgbClr val="1A1A1A"/>
+                </a:solidFill>
+                <a:latin typeface="Calibri"/>
+                <a:ea typeface="Calibri"/>
+                <a:cs typeface="Calibri"/>
+              </a:rPr>
+              <a:t>
 </a:t>
             </a:r>
-            <a:pPr indent="0" marL="0">
-              <a:buNone/>
-            </a:pPr>
             <a:r>
               <a:rPr lang="en-US" sz="1150" b="1" dirty="0">
                 <a:solidFill>
                   <a:srgbClr val="1A1A1A"/>
                 </a:solidFill>
-                <a:latin typeface="Calibri" pitchFamily="34" charset="0"/>
-                <a:ea typeface="Calibri" pitchFamily="34" charset="-122"/>
-                <a:cs typeface="Calibri" pitchFamily="34" charset="-120"/>
+                <a:latin typeface="Calibri"/>
+                <a:ea typeface="Calibri"/>
+                <a:cs typeface="Calibri"/>
               </a:rPr>
               <a:t>Batch Size:</a:t>
             </a:r>
-            <a:pPr indent="0" marL="0">
-              <a:buNone/>
-            </a:pPr>
             <a:r>
               <a:rPr lang="en-US" sz="1150" dirty="0">
                 <a:solidFill>
                   <a:srgbClr val="1A1A1A"/>
                 </a:solidFill>
-                <a:latin typeface="Calibri" pitchFamily="34" charset="0"/>
-                <a:ea typeface="Calibri" pitchFamily="34" charset="-122"/>
-                <a:cs typeface="Calibri" pitchFamily="34" charset="-120"/>
-              </a:rPr>
-              <a:t>  16  |  Workers: 4
+                <a:latin typeface="Calibri"/>
+                <a:ea typeface="Calibri"/>
+                <a:cs typeface="Calibri"/>
+              </a:rPr>
+              <a:t>  16  |  Workers: 2</a:t>
+            </a:r>
+            <a:endParaRPr lang="en-US" sz="1150" dirty="0" err="1">
+              <a:solidFill>
+                <a:srgbClr val="000000"/>
+              </a:solidFill>
+              <a:latin typeface="Calibri"/>
+              <a:ea typeface="Calibri"/>
+              <a:cs typeface="Calibri"/>
+            </a:endParaRPr>
+          </a:p>
+          <a:p>
+            <a:r>
+              <a:rPr lang="en-US" sz="1150" b="1" dirty="0">
+                <a:solidFill>
+                  <a:srgbClr val="1A1A1A"/>
+                </a:solidFill>
+                <a:latin typeface="Calibri"/>
+                <a:ea typeface="Calibri"/>
+                <a:cs typeface="Calibri"/>
+              </a:rPr>
+              <a:t>Image Size:</a:t>
+            </a:r>
+            <a:r>
+              <a:rPr lang="en-US" sz="1150" dirty="0">
+                <a:solidFill>
+                  <a:srgbClr val="1A1A1A"/>
+                </a:solidFill>
+                <a:latin typeface="Calibri"/>
+                <a:ea typeface="Calibri"/>
+                <a:cs typeface="Calibri"/>
+              </a:rPr>
+              <a:t> 224 x 224
 </a:t>
             </a:r>
-            <a:pPr indent="0" marL="0">
-              <a:buNone/>
-            </a:pPr>
             <a:r>
               <a:rPr lang="en-US" sz="1150" b="1" dirty="0">
                 <a:solidFill>
                   <a:srgbClr val="1A1A1A"/>
                 </a:solidFill>
-                <a:latin typeface="Calibri" pitchFamily="34" charset="0"/>
-                <a:ea typeface="Calibri" pitchFamily="34" charset="-122"/>
-                <a:cs typeface="Calibri" pitchFamily="34" charset="-120"/>
+                <a:latin typeface="Calibri"/>
+                <a:ea typeface="Calibri"/>
+                <a:cs typeface="Calibri"/>
               </a:rPr>
               <a:t>Epochs Run:</a:t>
             </a:r>
-            <a:pPr indent="0" marL="0">
-              <a:buNone/>
-            </a:pPr>
             <a:r>
               <a:rPr lang="en-US" sz="1150" dirty="0">
                 <a:solidFill>
                   <a:srgbClr val="1A1A1A"/>
                 </a:solidFill>
-                <a:latin typeface="Calibri" pitchFamily="34" charset="0"/>
-                <a:ea typeface="Calibri" pitchFamily="34" charset="-122"/>
-                <a:cs typeface="Calibri" pitchFamily="34" charset="-120"/>
-              </a:rPr>
-              <a:t>  30
+                <a:latin typeface="Calibri"/>
+                <a:ea typeface="Calibri"/>
+                <a:cs typeface="Calibri"/>
+              </a:rPr>
+              <a:t>  100
 </a:t>
             </a:r>
-            <a:pPr indent="0" marL="0">
-              <a:buNone/>
-            </a:pPr>
             <a:r>
               <a:rPr lang="en-US" sz="1150" b="1" dirty="0">
                 <a:solidFill>
                   <a:srgbClr val="1A1A1A"/>
                 </a:solidFill>
-                <a:latin typeface="Calibri" pitchFamily="34" charset="0"/>
-                <a:ea typeface="Calibri" pitchFamily="34" charset="-122"/>
-                <a:cs typeface="Calibri" pitchFamily="34" charset="-120"/>
+                <a:latin typeface="Calibri"/>
+                <a:ea typeface="Calibri"/>
+                <a:cs typeface="Calibri"/>
               </a:rPr>
               <a:t>Loss:</a:t>
             </a:r>
-            <a:pPr indent="0" marL="0">
-              <a:buNone/>
-            </a:pPr>
             <a:r>
               <a:rPr lang="en-US" sz="1150" dirty="0">
                 <a:solidFill>
                   <a:srgbClr val="1A1A1A"/>
                 </a:solidFill>
-                <a:latin typeface="Calibri" pitchFamily="34" charset="0"/>
-                <a:ea typeface="Calibri" pitchFamily="34" charset="-122"/>
-                <a:cs typeface="Calibri" pitchFamily="34" charset="-120"/>
-              </a:rPr>
-              <a:t>  BCEWithLogitsLoss</a:t>
-            </a:r>
-            <a:endParaRPr lang="en-US" sz="1150" dirty="0"/>
+                <a:latin typeface="Calibri"/>
+                <a:ea typeface="Calibri"/>
+                <a:cs typeface="Calibri"/>
+              </a:rPr>
+              <a:t>  </a:t>
+            </a:r>
+            <a:r>
+              <a:rPr lang="en-US" sz="1150" dirty="0" err="1">
+                <a:solidFill>
+                  <a:srgbClr val="1A1A1A"/>
+                </a:solidFill>
+                <a:latin typeface="Calibri"/>
+                <a:ea typeface="Calibri"/>
+                <a:cs typeface="Calibri"/>
+              </a:rPr>
+              <a:t>BCEWithLogitsLoss</a:t>
+            </a:r>
+            <a:endParaRPr lang="en-US" sz="1150" dirty="0">
+              <a:latin typeface="Calibri"/>
+              <a:ea typeface="Calibri"/>
+              <a:cs typeface="Calibri"/>
+            </a:endParaRPr>
           </a:p>
         </p:txBody>
       </p:sp>
@@ -6327,8 +5896,8 @@
         </p:nvSpPr>
         <p:spPr>
           <a:xfrm>
-            <a:off x="3337560" y="777240"/>
-            <a:ext cx="5394960" cy="1920240"/>
+            <a:off x="3341177" y="777240"/>
+            <a:ext cx="5742200" cy="1931091"/>
           </a:xfrm>
           <a:prstGeom prst="rect">
             <a:avLst/>
@@ -6343,7 +5912,7 @@
             <a:prstDash val="solid"/>
           </a:ln>
           <a:effectLst>
-            <a:outerShdw sx="100000" sy="100000" kx="0" ky="0" algn="bl" rotWithShape="0" blurRad="101600" dist="38100" dir="8100000">
+            <a:outerShdw blurRad="101600" dist="38100" dir="8100000" algn="bl" rotWithShape="0">
               <a:srgbClr val="000000">
                 <a:alpha val="12000"/>
               </a:srgbClr>
@@ -6359,8 +5928,8 @@
         </p:nvSpPr>
         <p:spPr>
           <a:xfrm>
-            <a:off x="3337560" y="777240"/>
-            <a:ext cx="5394960" cy="329184"/>
+            <a:off x="3344794" y="777240"/>
+            <a:ext cx="5738583" cy="329184"/>
           </a:xfrm>
           <a:prstGeom prst="rect">
             <a:avLst/>
@@ -6394,54 +5963,97 @@
           <a:ln/>
         </p:spPr>
         <p:txBody>
-          <a:bodyPr wrap="square" rtlCol="0" anchor="ctr"/>
+          <a:bodyPr wrap="square" lIns="91440" tIns="45720" rIns="91440" bIns="45720" rtlCol="0" anchor="ctr"/>
           <a:lstStyle/>
           <a:p>
-            <a:pPr indent="0" marL="0">
-              <a:buNone/>
-            </a:pPr>
+            <a:r>
+              <a:rPr lang="en-US" sz="1200" b="1">
+                <a:solidFill>
+                  <a:srgbClr val="3D0C1F"/>
+                </a:solidFill>
+                <a:latin typeface="Calibri"/>
+                <a:ea typeface="Calibri"/>
+                <a:cs typeface="Calibri"/>
+              </a:rPr>
+              <a:t>Sample Output from Epoch 52 –&gt; </a:t>
+            </a:r>
             <a:r>
               <a:rPr lang="en-US" sz="1200" b="1" dirty="0">
                 <a:solidFill>
                   <a:srgbClr val="3D0C1F"/>
                 </a:solidFill>
-                <a:latin typeface="Calibri" pitchFamily="34" charset="0"/>
-                <a:ea typeface="Calibri" pitchFamily="34" charset="-122"/>
-                <a:cs typeface="Calibri" pitchFamily="34" charset="-120"/>
-              </a:rPr>
-              <a:t>Quantitative Results (Epoch 30 — Validation Set)</a:t>
-            </a:r>
-            <a:endParaRPr lang="en-US" sz="1200" dirty="0"/>
+                <a:latin typeface="Calibri"/>
+                <a:ea typeface="Calibri"/>
+                <a:cs typeface="Calibri"/>
+              </a:rPr>
+              <a:t>Epoc</a:t>
+            </a:r>
+            <a:r>
+              <a:rPr lang="en-US" sz="1200" b="1">
+                <a:solidFill>
+                  <a:srgbClr val="3D0C1F"/>
+                </a:solidFill>
+                <a:latin typeface="Calibri"/>
+                <a:ea typeface="Calibri"/>
+                <a:cs typeface="Calibri"/>
+              </a:rPr>
+              <a:t>h 53</a:t>
+            </a:r>
+            <a:endParaRPr lang="en-US"/>
           </a:p>
         </p:txBody>
       </p:sp>
       <p:graphicFrame>
         <p:nvGraphicFramePr>
-          <p:cNvPr id="6" name="Table 0"/>
+          <p:cNvPr id="11" name="Table 0"/>
           <p:cNvGraphicFramePr>
             <a:graphicFrameLocks noGrp="1"/>
           </p:cNvGraphicFramePr>
           <p:nvPr>
             <p:extLst>
               <p:ext uri="{D42A27DB-BD31-4B8C-83A1-F6EECF244321}">
-                <p14:modId xmlns:p14="http://schemas.microsoft.com/office/powerpoint/2010/main" val="1579011935"/>
+                <p14:modId xmlns:p14="http://schemas.microsoft.com/office/powerpoint/2010/main" val="784069540"/>
               </p:ext>
             </p:extLst>
           </p:nvPr>
         </p:nvGraphicFramePr>
         <p:xfrm>
-          <a:off x="3429000" y="1170432"/>
-          <a:ext cx="5212080" cy="1417320"/>
+          <a:off x="3356658" y="1171936"/>
+          <a:ext cx="5732331" cy="1575816"/>
         </p:xfrm>
         <a:graphic>
           <a:graphicData uri="http://schemas.openxmlformats.org/drawingml/2006/table">
             <a:tbl>
               <a:tblPr/>
               <a:tblGrid>
-                <a:gridCol w="1188720"/>
-                <a:gridCol w="1005840"/>
-                <a:gridCol w="1280160"/>
-                <a:gridCol w="1737360"/>
+                <a:gridCol w="1307372">
+                  <a:extLst>
+                    <a:ext uri="{9D8B030D-6E8A-4147-A177-3AD203B41FA5}">
+                      <a16:colId xmlns:a16="http://schemas.microsoft.com/office/drawing/2014/main" val="20000"/>
+                    </a:ext>
+                  </a:extLst>
+                </a:gridCol>
+                <a:gridCol w="1106240">
+                  <a:extLst>
+                    <a:ext uri="{9D8B030D-6E8A-4147-A177-3AD203B41FA5}">
+                      <a16:colId xmlns:a16="http://schemas.microsoft.com/office/drawing/2014/main" val="20001"/>
+                    </a:ext>
+                  </a:extLst>
+                </a:gridCol>
+                <a:gridCol w="1407941">
+                  <a:extLst>
+                    <a:ext uri="{9D8B030D-6E8A-4147-A177-3AD203B41FA5}">
+                      <a16:colId xmlns:a16="http://schemas.microsoft.com/office/drawing/2014/main" val="20002"/>
+                    </a:ext>
+                  </a:extLst>
+                </a:gridCol>
+                <a:gridCol w="1910778">
+                  <a:extLst>
+                    <a:ext uri="{9D8B030D-6E8A-4147-A177-3AD203B41FA5}">
+                      <a16:colId xmlns:a16="http://schemas.microsoft.com/office/drawing/2014/main" val="20003"/>
+                    </a:ext>
+                  </a:extLst>
+                </a:gridCol>
               </a:tblGrid>
               <a:tr h="283464">
                 <a:tc>
@@ -6449,11 +6061,11 @@
                     <a:bodyPr/>
                     <a:lstStyle/>
                     <a:p>
-                      <a:pPr indent="0" marL="0">
+                      <a:pPr marL="0" indent="0">
                         <a:buNone/>
                       </a:pPr>
                       <a:r>
-                        <a:rPr lang="en-US" sz="1150" b="1" dirty="0">
+                        <a:rPr lang="en-US" sz="1150" b="1">
                           <a:solidFill>
                             <a:srgbClr val="FFFFFF"/>
                           </a:solidFill>
@@ -6463,14 +6075,14 @@
                         </a:rPr>
                         <a:t>Class</a:t>
                       </a:r>
-                      <a:endParaRPr lang="en-US" sz="1150" dirty="0">
+                      <a:endParaRPr lang="en-US" sz="1150">
                         <a:latin typeface="Calibri" charset="0"/>
                         <a:ea typeface="Calibri" charset="0"/>
                         <a:cs typeface="Calibri" charset="0"/>
                       </a:endParaRPr>
                     </a:p>
                   </a:txBody>
-                  <a:tcPr marL="91440" marR="91440" marT="45720" marB="45720">
+                  <a:tcPr>
                     <a:lnL w="6350" cap="flat" cmpd="sng" algn="ctr">
                       <a:solidFill>
                         <a:srgbClr val="D0C4BC"/>
@@ -6517,11 +6129,11 @@
                     <a:bodyPr/>
                     <a:lstStyle/>
                     <a:p>
-                      <a:pPr indent="0" marL="0">
+                      <a:pPr marL="0" indent="0">
                         <a:buNone/>
                       </a:pPr>
                       <a:r>
-                        <a:rPr lang="en-US" sz="1150" b="1" dirty="0">
+                        <a:rPr lang="en-US" sz="1150" b="1">
                           <a:solidFill>
                             <a:srgbClr val="FFFFFF"/>
                           </a:solidFill>
@@ -6531,14 +6143,14 @@
                         </a:rPr>
                         <a:t>Dice ↑</a:t>
                       </a:r>
-                      <a:endParaRPr lang="en-US" sz="1150" dirty="0">
+                      <a:endParaRPr lang="en-US" sz="1150">
                         <a:latin typeface="Calibri" charset="0"/>
                         <a:ea typeface="Calibri" charset="0"/>
                         <a:cs typeface="Calibri" charset="0"/>
                       </a:endParaRPr>
                     </a:p>
                   </a:txBody>
-                  <a:tcPr marL="91440" marR="91440" marT="45720" marB="45720">
+                  <a:tcPr>
                     <a:lnL w="6350" cap="flat" cmpd="sng" algn="ctr">
                       <a:solidFill>
                         <a:srgbClr val="D0C4BC"/>
@@ -6585,28 +6197,39 @@
                     <a:bodyPr/>
                     <a:lstStyle/>
                     <a:p>
-                      <a:pPr indent="0" marL="0">
+                      <a:pPr marL="0" indent="0">
                         <a:buNone/>
                       </a:pPr>
+                      <a:r>
+                        <a:rPr lang="en-US" sz="1150" b="1" dirty="0" err="1">
+                          <a:solidFill>
+                            <a:srgbClr val="FFFFFF"/>
+                          </a:solidFill>
+                          <a:latin typeface="Calibri"/>
+                          <a:ea typeface="Calibri"/>
+                          <a:cs typeface="Calibri"/>
+                        </a:rPr>
+                        <a:t>Hausdorff</a:t>
+                      </a:r>
                       <a:r>
                         <a:rPr lang="en-US" sz="1150" b="1" dirty="0">
                           <a:solidFill>
                             <a:srgbClr val="FFFFFF"/>
                           </a:solidFill>
-                          <a:latin typeface="Calibri" pitchFamily="34" charset="0"/>
-                          <a:ea typeface="Calibri" pitchFamily="34" charset="-122"/>
-                          <a:cs typeface="Calibri" pitchFamily="34" charset="-120"/>
+                          <a:latin typeface="Calibri"/>
+                          <a:ea typeface="Calibri"/>
+                          <a:cs typeface="Calibri"/>
                         </a:rPr>
-                        <a:t>Hausdorff ↓</a:t>
+                        <a:t> ↓</a:t>
                       </a:r>
                       <a:endParaRPr lang="en-US" sz="1150" dirty="0">
-                        <a:latin typeface="Calibri" charset="0"/>
-                        <a:ea typeface="Calibri" charset="0"/>
-                        <a:cs typeface="Calibri" charset="0"/>
+                        <a:latin typeface="Calibri"/>
+                        <a:ea typeface="Calibri"/>
+                        <a:cs typeface="Calibri"/>
                       </a:endParaRPr>
                     </a:p>
                   </a:txBody>
-                  <a:tcPr marL="91440" marR="91440" marT="45720" marB="45720">
+                  <a:tcPr>
                     <a:lnL w="6350" cap="flat" cmpd="sng" algn="ctr">
                       <a:solidFill>
                         <a:srgbClr val="D0C4BC"/>
@@ -6653,11 +6276,11 @@
                     <a:bodyPr/>
                     <a:lstStyle/>
                     <a:p>
-                      <a:pPr indent="0" marL="0">
+                      <a:pPr marL="0" indent="0">
                         <a:buNone/>
                       </a:pPr>
                       <a:r>
-                        <a:rPr lang="en-US" sz="1150" b="1" dirty="0">
+                        <a:rPr lang="en-US" sz="1150" b="1">
                           <a:solidFill>
                             <a:srgbClr val="FFFFFF"/>
                           </a:solidFill>
@@ -6667,14 +6290,14 @@
                         </a:rPr>
                         <a:t>Notes</a:t>
                       </a:r>
-                      <a:endParaRPr lang="en-US" sz="1150" dirty="0">
+                      <a:endParaRPr lang="en-US" sz="1150">
                         <a:latin typeface="Calibri" charset="0"/>
                         <a:ea typeface="Calibri" charset="0"/>
                         <a:cs typeface="Calibri" charset="0"/>
                       </a:endParaRPr>
                     </a:p>
                   </a:txBody>
-                  <a:tcPr marL="91440" marR="91440" marT="45720" marB="45720">
+                  <a:tcPr>
                     <a:lnL w="6350" cap="flat" cmpd="sng" algn="ctr">
                       <a:solidFill>
                         <a:srgbClr val="D0C4BC"/>
@@ -6716,6 +6339,11 @@
                     </a:solidFill>
                   </a:tcPr>
                 </a:tc>
+                <a:extLst>
+                  <a:ext uri="{0D108BD9-81ED-4DB2-BD59-A6C34878D82A}">
+                    <a16:rowId xmlns:a16="http://schemas.microsoft.com/office/drawing/2014/main" val="10000"/>
+                  </a:ext>
+                </a:extLst>
               </a:tr>
               <a:tr h="283464">
                 <a:tc>
@@ -6723,11 +6351,11 @@
                     <a:bodyPr/>
                     <a:lstStyle/>
                     <a:p>
-                      <a:pPr indent="0" marL="0">
+                      <a:pPr marL="0" indent="0">
                         <a:buNone/>
                       </a:pPr>
                       <a:r>
-                        <a:rPr lang="en-US" sz="1150" dirty="0">
+                        <a:rPr lang="en-US" sz="1150">
                           <a:solidFill>
                             <a:srgbClr val="000000"/>
                           </a:solidFill>
@@ -6737,14 +6365,14 @@
                         </a:rPr>
                         <a:t>Stomach</a:t>
                       </a:r>
-                      <a:endParaRPr lang="en-US" sz="1150" dirty="0">
+                      <a:endParaRPr lang="en-US" sz="1150">
                         <a:latin typeface="Calibri" charset="0"/>
                         <a:ea typeface="Calibri" charset="0"/>
                         <a:cs typeface="Calibri" charset="0"/>
                       </a:endParaRPr>
                     </a:p>
                   </a:txBody>
-                  <a:tcPr marL="91440" marR="91440" marT="45720" marB="45720">
+                  <a:tcPr>
                     <a:lnL w="6350" cap="flat" cmpd="sng" algn="ctr">
                       <a:solidFill>
                         <a:srgbClr val="D0C4BC"/>
@@ -6788,28 +6416,32 @@
                     <a:bodyPr/>
                     <a:lstStyle/>
                     <a:p>
-                      <a:pPr indent="0" marL="0">
+                      <a:pPr marL="0" lvl="0" indent="0">
                         <a:buNone/>
                       </a:pPr>
                       <a:r>
-                        <a:rPr lang="en-US" sz="1150" dirty="0">
+                        <a:rPr lang="en-US" sz="1150" b="0" i="0" u="none" strike="noStrike" noProof="0">
                           <a:solidFill>
                             <a:srgbClr val="000000"/>
                           </a:solidFill>
-                          <a:latin typeface="Calibri" pitchFamily="34" charset="0"/>
-                          <a:ea typeface="Calibri" pitchFamily="34" charset="-122"/>
-                          <a:cs typeface="Calibri" pitchFamily="34" charset="-120"/>
                         </a:rPr>
-                        <a:t>0.842</a:t>
+                        <a:t>0.793 -&gt; </a:t>
                       </a:r>
-                      <a:endParaRPr lang="en-US" sz="1150" dirty="0">
-                        <a:latin typeface="Calibri" charset="0"/>
-                        <a:ea typeface="Calibri" charset="0"/>
-                        <a:cs typeface="Calibri" charset="0"/>
-                      </a:endParaRPr>
+                      <a:r>
+                        <a:rPr lang="en-US" sz="1150" b="0" i="0" u="none" strike="noStrike" noProof="0">
+                          <a:solidFill>
+                            <a:srgbClr val="000000"/>
+                          </a:solidFill>
+                          <a:latin typeface="Calibri"/>
+                          <a:ea typeface="Calibri"/>
+                          <a:cs typeface="Calibri"/>
+                        </a:rPr>
+                        <a:t>0.808 </a:t>
+                      </a:r>
+                      <a:endParaRPr lang="en-US"/>
                     </a:p>
                   </a:txBody>
-                  <a:tcPr marL="91440" marR="91440" marT="45720" marB="45720">
+                  <a:tcPr>
                     <a:lnL w="6350" cap="flat" cmpd="sng" algn="ctr">
                       <a:solidFill>
                         <a:srgbClr val="D0C4BC"/>
@@ -6853,28 +6485,20 @@
                     <a:bodyPr/>
                     <a:lstStyle/>
                     <a:p>
-                      <a:pPr indent="0" marL="0">
+                      <a:pPr marL="0" indent="0">
                         <a:buNone/>
                       </a:pPr>
-                      <a:r>
-                        <a:rPr lang="en-US" sz="1150" dirty="0">
-                          <a:solidFill>
-                            <a:srgbClr val="000000"/>
-                          </a:solidFill>
-                          <a:latin typeface="Calibri" pitchFamily="34" charset="0"/>
-                          <a:ea typeface="Calibri" pitchFamily="34" charset="-122"/>
-                          <a:cs typeface="Calibri" pitchFamily="34" charset="-120"/>
-                        </a:rPr>
-                        <a:t>4.31 mm</a:t>
-                      </a:r>
                       <a:endParaRPr lang="en-US" sz="1150" dirty="0">
-                        <a:latin typeface="Calibri" charset="0"/>
-                        <a:ea typeface="Calibri" charset="0"/>
-                        <a:cs typeface="Calibri" charset="0"/>
+                        <a:solidFill>
+                          <a:srgbClr val="000000"/>
+                        </a:solidFill>
+                        <a:latin typeface="Calibri"/>
+                        <a:ea typeface="Calibri"/>
+                        <a:cs typeface="Calibri"/>
                       </a:endParaRPr>
                     </a:p>
                   </a:txBody>
-                  <a:tcPr marL="91440" marR="91440" marT="45720" marB="45720">
+                  <a:tcPr>
                     <a:lnL w="6350" cap="flat" cmpd="sng" algn="ctr">
                       <a:solidFill>
                         <a:srgbClr val="D0C4BC"/>
@@ -6918,11 +6542,11 @@
                     <a:bodyPr/>
                     <a:lstStyle/>
                     <a:p>
-                      <a:pPr indent="0" marL="0">
+                      <a:pPr marL="0" indent="0">
                         <a:buNone/>
                       </a:pPr>
                       <a:r>
-                        <a:rPr lang="en-US" sz="1150" dirty="0">
+                        <a:rPr lang="en-US" sz="1150">
                           <a:solidFill>
                             <a:srgbClr val="000000"/>
                           </a:solidFill>
@@ -6932,14 +6556,14 @@
                         </a:rPr>
                         <a:t>Strongest performance</a:t>
                       </a:r>
-                      <a:endParaRPr lang="en-US" sz="1150" dirty="0">
+                      <a:endParaRPr lang="en-US" sz="1150">
                         <a:latin typeface="Calibri" charset="0"/>
                         <a:ea typeface="Calibri" charset="0"/>
                         <a:cs typeface="Calibri" charset="0"/>
                       </a:endParaRPr>
                     </a:p>
                   </a:txBody>
-                  <a:tcPr marL="91440" marR="91440" marT="45720" marB="45720">
+                  <a:tcPr>
                     <a:lnL w="6350" cap="flat" cmpd="sng" algn="ctr">
                       <a:solidFill>
                         <a:srgbClr val="D0C4BC"/>
@@ -6978,6 +6602,11 @@
                     </a:lnB>
                   </a:tcPr>
                 </a:tc>
+                <a:extLst>
+                  <a:ext uri="{0D108BD9-81ED-4DB2-BD59-A6C34878D82A}">
+                    <a16:rowId xmlns:a16="http://schemas.microsoft.com/office/drawing/2014/main" val="10001"/>
+                  </a:ext>
+                </a:extLst>
               </a:tr>
               <a:tr h="283464">
                 <a:tc>
@@ -6985,11 +6614,11 @@
                     <a:bodyPr/>
                     <a:lstStyle/>
                     <a:p>
-                      <a:pPr indent="0" marL="0">
+                      <a:pPr marL="0" indent="0">
                         <a:buNone/>
                       </a:pPr>
                       <a:r>
-                        <a:rPr lang="en-US" sz="1150" dirty="0">
+                        <a:rPr lang="en-US" sz="1150">
                           <a:solidFill>
                             <a:srgbClr val="000000"/>
                           </a:solidFill>
@@ -6999,14 +6628,14 @@
                         </a:rPr>
                         <a:t>Small Bowel</a:t>
                       </a:r>
-                      <a:endParaRPr lang="en-US" sz="1150" dirty="0">
+                      <a:endParaRPr lang="en-US" sz="1150">
                         <a:latin typeface="Calibri" charset="0"/>
                         <a:ea typeface="Calibri" charset="0"/>
                         <a:cs typeface="Calibri" charset="0"/>
                       </a:endParaRPr>
                     </a:p>
                   </a:txBody>
-                  <a:tcPr marL="91440" marR="91440" marT="45720" marB="45720">
+                  <a:tcPr>
                     <a:lnL w="6350" cap="flat" cmpd="sng" algn="ctr">
                       <a:solidFill>
                         <a:srgbClr val="D0C4BC"/>
@@ -7050,28 +6679,32 @@
                     <a:bodyPr/>
                     <a:lstStyle/>
                     <a:p>
-                      <a:pPr indent="0" marL="0">
+                      <a:pPr marL="0" lvl="0" indent="0">
                         <a:buNone/>
                       </a:pPr>
                       <a:r>
-                        <a:rPr lang="en-US" sz="1150" dirty="0">
+                        <a:rPr lang="en-US" sz="1150" b="0" i="0" u="none" strike="noStrike" noProof="0">
                           <a:solidFill>
                             <a:srgbClr val="000000"/>
                           </a:solidFill>
-                          <a:latin typeface="Calibri" pitchFamily="34" charset="0"/>
-                          <a:ea typeface="Calibri" pitchFamily="34" charset="-122"/>
-                          <a:cs typeface="Calibri" pitchFamily="34" charset="-120"/>
                         </a:rPr>
-                        <a:t>0.761</a:t>
+                        <a:t>0.714 -&gt; </a:t>
                       </a:r>
-                      <a:endParaRPr lang="en-US" sz="1150" dirty="0">
-                        <a:latin typeface="Calibri" charset="0"/>
-                        <a:ea typeface="Calibri" charset="0"/>
-                        <a:cs typeface="Calibri" charset="0"/>
-                      </a:endParaRPr>
+                      <a:r>
+                        <a:rPr lang="en-US" sz="1150" b="0" i="0" u="none" strike="noStrike" noProof="0">
+                          <a:solidFill>
+                            <a:srgbClr val="000000"/>
+                          </a:solidFill>
+                          <a:latin typeface="Calibri"/>
+                          <a:ea typeface="Calibri"/>
+                          <a:cs typeface="Calibri"/>
+                        </a:rPr>
+                        <a:t>0.710</a:t>
+                      </a:r>
+                      <a:endParaRPr lang="en-US"/>
                     </a:p>
                   </a:txBody>
-                  <a:tcPr marL="91440" marR="91440" marT="45720" marB="45720">
+                  <a:tcPr>
                     <a:lnL w="6350" cap="flat" cmpd="sng" algn="ctr">
                       <a:solidFill>
                         <a:srgbClr val="D0C4BC"/>
@@ -7115,28 +6748,20 @@
                     <a:bodyPr/>
                     <a:lstStyle/>
                     <a:p>
-                      <a:pPr indent="0" marL="0">
+                      <a:pPr marL="0" indent="0">
                         <a:buNone/>
                       </a:pPr>
-                      <a:r>
-                        <a:rPr lang="en-US" sz="1150" dirty="0">
-                          <a:solidFill>
-                            <a:srgbClr val="000000"/>
-                          </a:solidFill>
-                          <a:latin typeface="Calibri" pitchFamily="34" charset="0"/>
-                          <a:ea typeface="Calibri" pitchFamily="34" charset="-122"/>
-                          <a:cs typeface="Calibri" pitchFamily="34" charset="-120"/>
-                        </a:rPr>
-                        <a:t>7.84 mm</a:t>
-                      </a:r>
                       <a:endParaRPr lang="en-US" sz="1150" dirty="0">
-                        <a:latin typeface="Calibri" charset="0"/>
-                        <a:ea typeface="Calibri" charset="0"/>
-                        <a:cs typeface="Calibri" charset="0"/>
+                        <a:solidFill>
+                          <a:srgbClr val="000000"/>
+                        </a:solidFill>
+                        <a:latin typeface="Calibri"/>
+                        <a:ea typeface="Calibri"/>
+                        <a:cs typeface="Calibri"/>
                       </a:endParaRPr>
                     </a:p>
                   </a:txBody>
-                  <a:tcPr marL="91440" marR="91440" marT="45720" marB="45720">
+                  <a:tcPr>
                     <a:lnL w="6350" cap="flat" cmpd="sng" algn="ctr">
                       <a:solidFill>
                         <a:srgbClr val="D0C4BC"/>
@@ -7180,11 +6805,11 @@
                     <a:bodyPr/>
                     <a:lstStyle/>
                     <a:p>
-                      <a:pPr indent="0" marL="0">
+                      <a:pPr marL="0" indent="0">
                         <a:buNone/>
                       </a:pPr>
                       <a:r>
-                        <a:rPr lang="en-US" sz="1150" dirty="0">
+                        <a:rPr lang="en-US" sz="1150">
                           <a:solidFill>
                             <a:srgbClr val="000000"/>
                           </a:solidFill>
@@ -7194,14 +6819,14 @@
                         </a:rPr>
                         <a:t>High shape variability</a:t>
                       </a:r>
-                      <a:endParaRPr lang="en-US" sz="1150" dirty="0">
+                      <a:endParaRPr lang="en-US" sz="1150">
                         <a:latin typeface="Calibri" charset="0"/>
                         <a:ea typeface="Calibri" charset="0"/>
                         <a:cs typeface="Calibri" charset="0"/>
                       </a:endParaRPr>
                     </a:p>
                   </a:txBody>
-                  <a:tcPr marL="91440" marR="91440" marT="45720" marB="45720">
+                  <a:tcPr>
                     <a:lnL w="6350" cap="flat" cmpd="sng" algn="ctr">
                       <a:solidFill>
                         <a:srgbClr val="D0C4BC"/>
@@ -7240,6 +6865,11 @@
                     </a:lnB>
                   </a:tcPr>
                 </a:tc>
+                <a:extLst>
+                  <a:ext uri="{0D108BD9-81ED-4DB2-BD59-A6C34878D82A}">
+                    <a16:rowId xmlns:a16="http://schemas.microsoft.com/office/drawing/2014/main" val="10002"/>
+                  </a:ext>
+                </a:extLst>
               </a:tr>
               <a:tr h="283464">
                 <a:tc>
@@ -7247,11 +6877,11 @@
                     <a:bodyPr/>
                     <a:lstStyle/>
                     <a:p>
-                      <a:pPr indent="0" marL="0">
+                      <a:pPr marL="0" indent="0">
                         <a:buNone/>
                       </a:pPr>
                       <a:r>
-                        <a:rPr lang="en-US" sz="1150" dirty="0">
+                        <a:rPr lang="en-US" sz="1150">
                           <a:solidFill>
                             <a:srgbClr val="000000"/>
                           </a:solidFill>
@@ -7261,14 +6891,14 @@
                         </a:rPr>
                         <a:t>Large Bowel</a:t>
                       </a:r>
-                      <a:endParaRPr lang="en-US" sz="1150" dirty="0">
+                      <a:endParaRPr lang="en-US" sz="1150">
                         <a:latin typeface="Calibri" charset="0"/>
                         <a:ea typeface="Calibri" charset="0"/>
                         <a:cs typeface="Calibri" charset="0"/>
                       </a:endParaRPr>
                     </a:p>
                   </a:txBody>
-                  <a:tcPr marL="91440" marR="91440" marT="45720" marB="45720">
+                  <a:tcPr>
                     <a:lnL w="6350" cap="flat" cmpd="sng" algn="ctr">
                       <a:solidFill>
                         <a:srgbClr val="D0C4BC"/>
@@ -7312,28 +6942,32 @@
                     <a:bodyPr/>
                     <a:lstStyle/>
                     <a:p>
-                      <a:pPr indent="0" marL="0">
+                      <a:pPr marL="0" lvl="0" indent="0">
                         <a:buNone/>
                       </a:pPr>
                       <a:r>
-                        <a:rPr lang="en-US" sz="1150" dirty="0">
+                        <a:rPr lang="en-US" sz="1150" b="0" i="0" u="none" strike="noStrike" noProof="0">
                           <a:solidFill>
                             <a:srgbClr val="000000"/>
                           </a:solidFill>
-                          <a:latin typeface="Calibri" pitchFamily="34" charset="0"/>
-                          <a:ea typeface="Calibri" pitchFamily="34" charset="-122"/>
-                          <a:cs typeface="Calibri" pitchFamily="34" charset="-120"/>
                         </a:rPr>
-                        <a:t>0.793</a:t>
+                        <a:t>0.685 -&gt; </a:t>
                       </a:r>
-                      <a:endParaRPr lang="en-US" sz="1150" dirty="0">
-                        <a:latin typeface="Calibri" charset="0"/>
-                        <a:ea typeface="Calibri" charset="0"/>
-                        <a:cs typeface="Calibri" charset="0"/>
-                      </a:endParaRPr>
+                      <a:r>
+                        <a:rPr lang="en-US" sz="1150" b="0" i="0" u="none" strike="noStrike" noProof="0">
+                          <a:solidFill>
+                            <a:srgbClr val="000000"/>
+                          </a:solidFill>
+                          <a:latin typeface="Calibri"/>
+                          <a:ea typeface="Calibri"/>
+                          <a:cs typeface="Calibri"/>
+                        </a:rPr>
+                        <a:t>0.685 </a:t>
+                      </a:r>
+                      <a:endParaRPr lang="en-US"/>
                     </a:p>
                   </a:txBody>
-                  <a:tcPr marL="91440" marR="91440" marT="45720" marB="45720">
+                  <a:tcPr>
                     <a:lnL w="6350" cap="flat" cmpd="sng" algn="ctr">
                       <a:solidFill>
                         <a:srgbClr val="D0C4BC"/>
@@ -7377,28 +7011,20 @@
                     <a:bodyPr/>
                     <a:lstStyle/>
                     <a:p>
-                      <a:pPr indent="0" marL="0">
+                      <a:pPr marL="0" indent="0">
                         <a:buNone/>
                       </a:pPr>
-                      <a:r>
-                        <a:rPr lang="en-US" sz="1150" dirty="0">
-                          <a:solidFill>
-                            <a:srgbClr val="000000"/>
-                          </a:solidFill>
-                          <a:latin typeface="Calibri" pitchFamily="34" charset="0"/>
-                          <a:ea typeface="Calibri" pitchFamily="34" charset="-122"/>
-                          <a:cs typeface="Calibri" pitchFamily="34" charset="-120"/>
-                        </a:rPr>
-                        <a:t>6.12 mm</a:t>
-                      </a:r>
                       <a:endParaRPr lang="en-US" sz="1150" dirty="0">
-                        <a:latin typeface="Calibri" charset="0"/>
-                        <a:ea typeface="Calibri" charset="0"/>
-                        <a:cs typeface="Calibri" charset="0"/>
+                        <a:solidFill>
+                          <a:srgbClr val="000000"/>
+                        </a:solidFill>
+                        <a:latin typeface="Calibri"/>
+                        <a:ea typeface="Calibri"/>
+                        <a:cs typeface="Calibri"/>
                       </a:endParaRPr>
                     </a:p>
                   </a:txBody>
-                  <a:tcPr marL="91440" marR="91440" marT="45720" marB="45720">
+                  <a:tcPr>
                     <a:lnL w="6350" cap="flat" cmpd="sng" algn="ctr">
                       <a:solidFill>
                         <a:srgbClr val="D0C4BC"/>
@@ -7442,7 +7068,7 @@
                     <a:bodyPr/>
                     <a:lstStyle/>
                     <a:p>
-                      <a:pPr indent="0" marL="0">
+                      <a:pPr marL="0" lvl="0" indent="0">
                         <a:buNone/>
                       </a:pPr>
                       <a:r>
@@ -7450,20 +7076,27 @@
                           <a:solidFill>
                             <a:srgbClr val="000000"/>
                           </a:solidFill>
-                          <a:latin typeface="Calibri" pitchFamily="34" charset="0"/>
-                          <a:ea typeface="Calibri" pitchFamily="34" charset="-122"/>
-                          <a:cs typeface="Calibri" pitchFamily="34" charset="-120"/>
+                          <a:latin typeface="Calibri"/>
+                          <a:ea typeface="Calibri"/>
+                          <a:cs typeface="Calibri"/>
                         </a:rPr>
-                        <a:t>Slight edge blurring</a:t>
+                        <a:t>Major </a:t>
                       </a:r>
-                      <a:endParaRPr lang="en-US" sz="1150" dirty="0">
-                        <a:latin typeface="Calibri" charset="0"/>
-                        <a:ea typeface="Calibri" charset="0"/>
-                        <a:cs typeface="Calibri" charset="0"/>
-                      </a:endParaRPr>
+                      <a:r>
+                        <a:rPr lang="en-US" sz="1150" dirty="0" err="1">
+                          <a:solidFill>
+                            <a:srgbClr val="000000"/>
+                          </a:solidFill>
+                          <a:latin typeface="Calibri"/>
+                          <a:ea typeface="Calibri"/>
+                          <a:cs typeface="Calibri"/>
+                        </a:rPr>
+                        <a:t>BottleNeck</a:t>
+                      </a:r>
+                      <a:endParaRPr lang="en-US" dirty="0" err="1"/>
                     </a:p>
                   </a:txBody>
-                  <a:tcPr marL="91440" marR="91440" marT="45720" marB="45720">
+                  <a:tcPr>
                     <a:lnL w="6350" cap="flat" cmpd="sng" algn="ctr">
                       <a:solidFill>
                         <a:srgbClr val="D0C4BC"/>
@@ -7502,6 +7135,11 @@
                     </a:lnB>
                   </a:tcPr>
                 </a:tc>
+                <a:extLst>
+                  <a:ext uri="{0D108BD9-81ED-4DB2-BD59-A6C34878D82A}">
+                    <a16:rowId xmlns:a16="http://schemas.microsoft.com/office/drawing/2014/main" val="10003"/>
+                  </a:ext>
+                </a:extLst>
               </a:tr>
               <a:tr h="283464">
                 <a:tc>
@@ -7509,11 +7147,11 @@
                     <a:bodyPr/>
                     <a:lstStyle/>
                     <a:p>
-                      <a:pPr indent="0" marL="0">
+                      <a:pPr marL="0" indent="0">
                         <a:buNone/>
                       </a:pPr>
                       <a:r>
-                        <a:rPr lang="en-US" sz="1150" b="1" dirty="0">
+                        <a:rPr lang="en-US" sz="1150" b="1">
                           <a:solidFill>
                             <a:srgbClr val="000000"/>
                           </a:solidFill>
@@ -7523,14 +7161,14 @@
                         </a:rPr>
                         <a:t>Mean</a:t>
                       </a:r>
-                      <a:endParaRPr lang="en-US" sz="1150" dirty="0">
+                      <a:endParaRPr lang="en-US" sz="1150">
                         <a:latin typeface="Calibri" charset="0"/>
                         <a:ea typeface="Calibri" charset="0"/>
                         <a:cs typeface="Calibri" charset="0"/>
                       </a:endParaRPr>
                     </a:p>
                   </a:txBody>
-                  <a:tcPr marL="91440" marR="91440" marT="45720" marB="45720">
+                  <a:tcPr>
                     <a:lnL w="6350" cap="flat" cmpd="sng" algn="ctr">
                       <a:solidFill>
                         <a:srgbClr val="D0C4BC"/>
@@ -7574,28 +7212,21 @@
                     <a:bodyPr/>
                     <a:lstStyle/>
                     <a:p>
-                      <a:pPr indent="0" marL="0">
+                      <a:pPr marL="0" lvl="0" indent="0">
                         <a:buNone/>
                       </a:pPr>
                       <a:r>
-                        <a:rPr lang="en-US" sz="1150" b="1" dirty="0">
+                        <a:rPr lang="en-US" sz="1150" b="0" i="0" u="none" strike="noStrike" noProof="0">
                           <a:solidFill>
                             <a:srgbClr val="000000"/>
                           </a:solidFill>
-                          <a:latin typeface="Calibri" pitchFamily="34" charset="0"/>
-                          <a:ea typeface="Calibri" pitchFamily="34" charset="-122"/>
-                          <a:cs typeface="Calibri" pitchFamily="34" charset="-120"/>
                         </a:rPr>
-                        <a:t>0.799</a:t>
+                        <a:t>0.731 -&gt;  0.734</a:t>
                       </a:r>
-                      <a:endParaRPr lang="en-US" sz="1150" dirty="0">
-                        <a:latin typeface="Calibri" charset="0"/>
-                        <a:ea typeface="Calibri" charset="0"/>
-                        <a:cs typeface="Calibri" charset="0"/>
-                      </a:endParaRPr>
+                      <a:endParaRPr lang="en-US"/>
                     </a:p>
                   </a:txBody>
-                  <a:tcPr marL="91440" marR="91440" marT="45720" marB="45720">
+                  <a:tcPr>
                     <a:lnL w="6350" cap="flat" cmpd="sng" algn="ctr">
                       <a:solidFill>
                         <a:srgbClr val="D0C4BC"/>
@@ -7639,28 +7270,44 @@
                     <a:bodyPr/>
                     <a:lstStyle/>
                     <a:p>
-                      <a:pPr indent="0" marL="0">
+                      <a:pPr marL="0" lvl="0" indent="0">
                         <a:buNone/>
                       </a:pPr>
                       <a:r>
-                        <a:rPr lang="en-US" sz="1150" b="1" dirty="0">
+                        <a:rPr lang="en-US" sz="1150" b="0" i="0" u="none" strike="noStrike" noProof="0">
                           <a:solidFill>
                             <a:srgbClr val="000000"/>
                           </a:solidFill>
-                          <a:latin typeface="Calibri" pitchFamily="34" charset="0"/>
-                          <a:ea typeface="Calibri" pitchFamily="34" charset="-122"/>
-                          <a:cs typeface="Calibri" pitchFamily="34" charset="-120"/>
                         </a:rPr>
-                        <a:t>6.09 mm</a:t>
+                        <a:t>0.2026 </a:t>
                       </a:r>
-                      <a:endParaRPr lang="en-US" sz="1150" dirty="0">
-                        <a:latin typeface="Calibri" charset="0"/>
-                        <a:ea typeface="Calibri" charset="0"/>
-                        <a:cs typeface="Calibri" charset="0"/>
+                      <a:r>
+                        <a:rPr lang="en-US" sz="1150" b="1">
+                          <a:solidFill>
+                            <a:srgbClr val="000000"/>
+                          </a:solidFill>
+                          <a:latin typeface="Calibri"/>
+                          <a:ea typeface="Calibri"/>
+                          <a:cs typeface="Calibri"/>
+                        </a:rPr>
+                        <a:t>-&gt; </a:t>
+                      </a:r>
+                      <a:r>
+                        <a:rPr lang="en-US" sz="1150" b="0" i="0" u="none" strike="noStrike" noProof="0">
+                          <a:solidFill>
+                            <a:srgbClr val="000000"/>
+                          </a:solidFill>
+                        </a:rPr>
+                        <a:t>0.2001</a:t>
+                      </a:r>
+                      <a:endParaRPr lang="en-US" sz="1150">
+                        <a:latin typeface="Calibri"/>
+                        <a:ea typeface="Calibri"/>
+                        <a:cs typeface="Calibri"/>
                       </a:endParaRPr>
                     </a:p>
                   </a:txBody>
-                  <a:tcPr marL="91440" marR="91440" marT="45720" marB="45720">
+                  <a:tcPr>
                     <a:lnL w="6350" cap="flat" cmpd="sng" algn="ctr">
                       <a:solidFill>
                         <a:srgbClr val="D0C4BC"/>
@@ -7704,19 +7351,38 @@
                     <a:bodyPr/>
                     <a:lstStyle/>
                     <a:p>
-                      <a:pPr indent="0" marL="0">
+                      <a:pPr marL="0" indent="0">
                         <a:buNone/>
                       </a:pPr>
                       <a:r>
-                        <a:rPr lang="en-US" sz="1150" b="1" dirty="0">
+                        <a:rPr lang="en-US" sz="1150" b="1">
                           <a:solidFill>
                             <a:srgbClr val="000000"/>
                           </a:solidFill>
-                          <a:latin typeface="Calibri" pitchFamily="34" charset="0"/>
-                          <a:ea typeface="Calibri" pitchFamily="34" charset="-122"/>
-                          <a:cs typeface="Calibri" pitchFamily="34" charset="-120"/>
+                          <a:latin typeface="Calibri"/>
+                          <a:ea typeface="Calibri"/>
+                          <a:cs typeface="Calibri"/>
                         </a:rPr>
-                        <a:t>Composite Score: 0.756</a:t>
+                        <a:t>Comp Score: </a:t>
+                      </a:r>
+                      <a:r>
+                        <a:rPr lang="en-US" sz="1150" b="0" i="0" u="none" strike="noStrike" noProof="0" dirty="0">
+                          <a:solidFill>
+                            <a:srgbClr val="000000"/>
+                          </a:solidFill>
+                        </a:rPr>
+                        <a:t>0.7708 -&gt;</a:t>
+                      </a:r>
+                      <a:r>
+                        <a:rPr lang="en-US" sz="1150" b="0" i="0" u="none" strike="noStrike" noProof="0" dirty="0">
+                          <a:solidFill>
+                            <a:srgbClr val="000000"/>
+                          </a:solidFill>
+                          <a:latin typeface="Calibri"/>
+                          <a:ea typeface="Calibri"/>
+                          <a:cs typeface="Calibri"/>
+                        </a:rPr>
+                        <a:t>0.7737</a:t>
                       </a:r>
                       <a:endParaRPr lang="en-US" sz="1150" dirty="0">
                         <a:latin typeface="Calibri" charset="0"/>
@@ -7725,7 +7391,7 @@
                       </a:endParaRPr>
                     </a:p>
                   </a:txBody>
-                  <a:tcPr marL="91440" marR="91440" marT="45720" marB="45720">
+                  <a:tcPr>
                     <a:lnL w="6350" cap="flat" cmpd="sng" algn="ctr">
                       <a:solidFill>
                         <a:srgbClr val="D0C4BC"/>
@@ -7764,27 +7430,62 @@
                     </a:lnB>
                   </a:tcPr>
                 </a:tc>
+                <a:extLst>
+                  <a:ext uri="{0D108BD9-81ED-4DB2-BD59-A6C34878D82A}">
+                    <a16:rowId xmlns:a16="http://schemas.microsoft.com/office/drawing/2014/main" val="10004"/>
+                  </a:ext>
+                </a:extLst>
               </a:tr>
             </a:tbl>
           </a:graphicData>
         </a:graphic>
       </p:graphicFrame>
-      <p:graphicFrame>
-        <p:nvGraphicFramePr>
-          <p:cNvPr id="12" name="Chart 0" descr=""/>
-          <p:cNvGraphicFramePr/>
-          <p:nvPr/>
-        </p:nvGraphicFramePr>
-        <p:xfrm>
-          <a:off x="228600" y="2834640"/>
-          <a:ext cx="8686800" cy="2103120"/>
-        </p:xfrm>
-        <a:graphic xmlns:a="http://schemas.openxmlformats.org/drawingml/2006/main">
-          <a:graphicData uri="http://schemas.openxmlformats.org/drawingml/2006/chart">
-            <c:chart xmlns:c="http://schemas.openxmlformats.org/drawingml/2006/chart" r:id="rId1"/>
-          </a:graphicData>
-        </a:graphic>
-      </p:graphicFrame>
+      <p:sp>
+        <p:nvSpPr>
+          <p:cNvPr id="14" name="TextBox 13">
+            <a:extLst>
+              <a:ext uri="{FF2B5EF4-FFF2-40B4-BE49-F238E27FC236}">
+                <a16:creationId xmlns:a16="http://schemas.microsoft.com/office/drawing/2014/main" id="{4788B573-E901-D723-7427-1BABFBA71C45}"/>
+              </a:ext>
+            </a:extLst>
+          </p:cNvPr>
+          <p:cNvSpPr txBox="1"/>
+          <p:nvPr/>
+        </p:nvSpPr>
+        <p:spPr>
+          <a:xfrm>
+            <a:off x="8877586" y="4898571"/>
+            <a:ext cx="163285" cy="246221"/>
+          </a:xfrm>
+          <a:prstGeom prst="rect">
+            <a:avLst/>
+          </a:prstGeom>
+          <a:noFill/>
+        </p:spPr>
+        <p:txBody>
+          <a:bodyPr rot="0" spcFirstLastPara="0" vertOverflow="overflow" horzOverflow="overflow" vert="horz" wrap="square" lIns="91440" tIns="45720" rIns="91440" bIns="45720" numCol="1" spcCol="0" rtlCol="0" fromWordArt="0" anchor="t" anchorCtr="0" forceAA="0" compatLnSpc="1">
+            <a:prstTxWarp prst="textNoShape">
+              <a:avLst/>
+            </a:prstTxWarp>
+            <a:spAutoFit/>
+          </a:bodyPr>
+          <a:lstStyle/>
+          <a:p>
+            <a:pPr algn="l"/>
+            <a:r>
+              <a:rPr lang="en-US" sz="1000">
+                <a:ea typeface="Calibri"/>
+                <a:cs typeface="Calibri"/>
+              </a:rPr>
+              <a:t>5</a:t>
+            </a:r>
+            <a:endParaRPr lang="en-US" sz="1000" dirty="0">
+              <a:ea typeface="Calibri"/>
+              <a:cs typeface="Calibri"/>
+            </a:endParaRPr>
+          </a:p>
+        </p:txBody>
+      </p:sp>
     </p:spTree>
   </p:cSld>
   <p:clrMapOvr>
@@ -7795,12 +7496,412 @@
 
 <file path=ppt/slides/slide6.xml><?xml version="1.0" encoding="utf-8"?>
 <p:sld xmlns:a="http://schemas.openxmlformats.org/drawingml/2006/main" xmlns:r="http://schemas.openxmlformats.org/officeDocument/2006/relationships" xmlns:p="http://schemas.openxmlformats.org/presentationml/2006/main">
+  <p:cSld>
+    <p:bg>
+      <p:bgPr>
+        <a:solidFill>
+          <a:srgbClr val="FAF7F5"/>
+        </a:solidFill>
+        <a:effectLst/>
+      </p:bgPr>
+    </p:bg>
+    <p:spTree>
+      <p:nvGrpSpPr>
+        <p:cNvPr id="1" name="">
+          <a:extLst>
+            <a:ext uri="{FF2B5EF4-FFF2-40B4-BE49-F238E27FC236}">
+              <a16:creationId xmlns:a16="http://schemas.microsoft.com/office/drawing/2014/main" id="{861C75E0-3F9C-686D-8148-78E02D4550CB}"/>
+            </a:ext>
+          </a:extLst>
+        </p:cNvPr>
+        <p:cNvGrpSpPr/>
+        <p:nvPr/>
+      </p:nvGrpSpPr>
+      <p:grpSpPr>
+        <a:xfrm>
+          <a:off x="0" y="0"/>
+          <a:ext cx="0" cy="0"/>
+          <a:chOff x="0" y="0"/>
+          <a:chExt cx="0" cy="0"/>
+        </a:xfrm>
+      </p:grpSpPr>
+      <p:sp>
+        <p:nvSpPr>
+          <p:cNvPr id="2" name="Shape 0">
+            <a:extLst>
+              <a:ext uri="{FF2B5EF4-FFF2-40B4-BE49-F238E27FC236}">
+                <a16:creationId xmlns:a16="http://schemas.microsoft.com/office/drawing/2014/main" id="{3AEED313-B62B-B4C2-F38F-F1F2EB6497DA}"/>
+              </a:ext>
+            </a:extLst>
+          </p:cNvPr>
+          <p:cNvSpPr/>
+          <p:nvPr/>
+        </p:nvSpPr>
+        <p:spPr>
+          <a:xfrm>
+            <a:off x="0" y="0"/>
+            <a:ext cx="9144000" cy="658368"/>
+          </a:xfrm>
+          <a:prstGeom prst="rect">
+            <a:avLst/>
+          </a:prstGeom>
+          <a:solidFill>
+            <a:srgbClr val="6B1E3C"/>
+          </a:solidFill>
+          <a:ln w="12700">
+            <a:solidFill>
+              <a:srgbClr val="6B1E3C"/>
+            </a:solidFill>
+            <a:prstDash val="solid"/>
+          </a:ln>
+        </p:spPr>
+      </p:sp>
+      <p:sp>
+        <p:nvSpPr>
+          <p:cNvPr id="3" name="Text 1">
+            <a:extLst>
+              <a:ext uri="{FF2B5EF4-FFF2-40B4-BE49-F238E27FC236}">
+                <a16:creationId xmlns:a16="http://schemas.microsoft.com/office/drawing/2014/main" id="{56660074-50B6-DAAE-179B-ADDC8D619A7A}"/>
+              </a:ext>
+            </a:extLst>
+          </p:cNvPr>
+          <p:cNvSpPr/>
+          <p:nvPr/>
+        </p:nvSpPr>
+        <p:spPr>
+          <a:xfrm>
+            <a:off x="365760" y="0"/>
+            <a:ext cx="8229600" cy="658368"/>
+          </a:xfrm>
+          <a:prstGeom prst="rect">
+            <a:avLst/>
+          </a:prstGeom>
+          <a:noFill/>
+          <a:ln/>
+        </p:spPr>
+        <p:txBody>
+          <a:bodyPr wrap="square" lIns="91440" tIns="45720" rIns="91440" bIns="45720" rtlCol="0" anchor="ctr"/>
+          <a:lstStyle/>
+          <a:p>
+            <a:r>
+              <a:rPr lang="en-US" sz="2400" b="1" dirty="0">
+                <a:solidFill>
+                  <a:srgbClr val="FFFFFF"/>
+                </a:solidFill>
+                <a:latin typeface="Calibri"/>
+                <a:ea typeface="Calibri"/>
+                <a:cs typeface="Calibri"/>
+              </a:rPr>
+              <a:t>04 | Visualizing </a:t>
+            </a:r>
+            <a:r>
+              <a:rPr lang="en-US" sz="2400" b="1" dirty="0" err="1">
+                <a:solidFill>
+                  <a:srgbClr val="FFFFFF"/>
+                </a:solidFill>
+                <a:latin typeface="Calibri"/>
+                <a:ea typeface="Calibri"/>
+                <a:cs typeface="Calibri"/>
+              </a:rPr>
+              <a:t>Traininng</a:t>
+            </a:r>
+            <a:r>
+              <a:rPr lang="en-US" sz="2400" b="1" dirty="0">
+                <a:solidFill>
+                  <a:srgbClr val="FFFFFF"/>
+                </a:solidFill>
+                <a:latin typeface="Calibri"/>
+                <a:ea typeface="Calibri"/>
+                <a:cs typeface="Calibri"/>
+              </a:rPr>
+              <a:t> Issues</a:t>
+            </a:r>
+            <a:endParaRPr lang="en-US" sz="2400" dirty="0">
+              <a:latin typeface="Calibri"/>
+              <a:ea typeface="Calibri"/>
+              <a:cs typeface="Calibri"/>
+            </a:endParaRPr>
+          </a:p>
+        </p:txBody>
+      </p:sp>
+      <p:sp>
+        <p:nvSpPr>
+          <p:cNvPr id="5" name="Shape 3">
+            <a:extLst>
+              <a:ext uri="{FF2B5EF4-FFF2-40B4-BE49-F238E27FC236}">
+                <a16:creationId xmlns:a16="http://schemas.microsoft.com/office/drawing/2014/main" id="{4354CE00-A93A-3CD1-01FF-FE9AA4118901}"/>
+              </a:ext>
+            </a:extLst>
+          </p:cNvPr>
+          <p:cNvSpPr/>
+          <p:nvPr/>
+        </p:nvSpPr>
+        <p:spPr>
+          <a:xfrm>
+            <a:off x="376900" y="777240"/>
+            <a:ext cx="3385451" cy="419611"/>
+          </a:xfrm>
+          <a:prstGeom prst="rect">
+            <a:avLst/>
+          </a:prstGeom>
+          <a:solidFill>
+            <a:srgbClr val="A0243C"/>
+          </a:solidFill>
+          <a:ln w="12700">
+            <a:solidFill>
+              <a:srgbClr val="A0243C"/>
+            </a:solidFill>
+            <a:prstDash val="solid"/>
+          </a:ln>
+        </p:spPr>
+      </p:sp>
+      <p:sp>
+        <p:nvSpPr>
+          <p:cNvPr id="6" name="Text 4">
+            <a:extLst>
+              <a:ext uri="{FF2B5EF4-FFF2-40B4-BE49-F238E27FC236}">
+                <a16:creationId xmlns:a16="http://schemas.microsoft.com/office/drawing/2014/main" id="{AA3AC700-0DC3-526F-A0CE-41FB0DD55963}"/>
+              </a:ext>
+            </a:extLst>
+          </p:cNvPr>
+          <p:cNvSpPr/>
+          <p:nvPr/>
+        </p:nvSpPr>
+        <p:spPr>
+          <a:xfrm>
+            <a:off x="320040" y="777240"/>
+            <a:ext cx="3444915" cy="430462"/>
+          </a:xfrm>
+          <a:prstGeom prst="rect">
+            <a:avLst/>
+          </a:prstGeom>
+          <a:noFill/>
+          <a:ln/>
+        </p:spPr>
+        <p:txBody>
+          <a:bodyPr wrap="square" lIns="91440" tIns="45720" rIns="91440" bIns="45720" rtlCol="0" anchor="ctr"/>
+          <a:lstStyle/>
+          <a:p>
+            <a:r>
+              <a:rPr lang="en-US" sz="1300" b="1">
+                <a:solidFill>
+                  <a:srgbClr val="FFFFFF"/>
+                </a:solidFill>
+                <a:ea typeface="Calibri"/>
+                <a:cs typeface="Calibri"/>
+              </a:rPr>
+              <a:t>Getting Deep into Code</a:t>
+            </a:r>
+            <a:endParaRPr lang="en-US" sz="1300" b="1" dirty="0">
+              <a:solidFill>
+                <a:srgbClr val="FFFFFF"/>
+              </a:solidFill>
+              <a:ea typeface="Calibri"/>
+              <a:cs typeface="Calibri"/>
+            </a:endParaRPr>
+          </a:p>
+        </p:txBody>
+      </p:sp>
+      <p:sp>
+        <p:nvSpPr>
+          <p:cNvPr id="7" name="Text 5">
+            <a:extLst>
+              <a:ext uri="{FF2B5EF4-FFF2-40B4-BE49-F238E27FC236}">
+                <a16:creationId xmlns:a16="http://schemas.microsoft.com/office/drawing/2014/main" id="{5A395483-9460-3EE4-24AD-6978E77F8F04}"/>
+              </a:ext>
+            </a:extLst>
+          </p:cNvPr>
+          <p:cNvSpPr/>
+          <p:nvPr/>
+        </p:nvSpPr>
+        <p:spPr>
+          <a:xfrm>
+            <a:off x="347472" y="1170432"/>
+            <a:ext cx="3331772" cy="1847753"/>
+          </a:xfrm>
+          <a:prstGeom prst="rect">
+            <a:avLst/>
+          </a:prstGeom>
+          <a:noFill/>
+          <a:ln/>
+        </p:spPr>
+        <p:txBody>
+          <a:bodyPr wrap="square" lIns="91440" tIns="45720" rIns="91440" bIns="45720" rtlCol="0" anchor="ctr"/>
+          <a:lstStyle/>
+          <a:p>
+            <a:endParaRPr lang="en-US" sz="1150" dirty="0">
+              <a:solidFill>
+                <a:srgbClr val="1A1A1A"/>
+              </a:solidFill>
+              <a:latin typeface="Calibri"/>
+              <a:ea typeface="Calibri"/>
+              <a:cs typeface="Calibri"/>
+            </a:endParaRPr>
+          </a:p>
+        </p:txBody>
+      </p:sp>
+      <p:sp>
+        <p:nvSpPr>
+          <p:cNvPr id="9" name="Shape 7">
+            <a:extLst>
+              <a:ext uri="{FF2B5EF4-FFF2-40B4-BE49-F238E27FC236}">
+                <a16:creationId xmlns:a16="http://schemas.microsoft.com/office/drawing/2014/main" id="{BF1FBAC4-C248-B8FB-7B3A-E047053843EB}"/>
+              </a:ext>
+            </a:extLst>
+          </p:cNvPr>
+          <p:cNvSpPr/>
+          <p:nvPr/>
+        </p:nvSpPr>
+        <p:spPr>
+          <a:xfrm>
+            <a:off x="4715670" y="777240"/>
+            <a:ext cx="4302600" cy="329184"/>
+          </a:xfrm>
+          <a:prstGeom prst="rect">
+            <a:avLst/>
+          </a:prstGeom>
+          <a:solidFill>
+            <a:srgbClr val="CEB888"/>
+          </a:solidFill>
+          <a:ln w="12700">
+            <a:solidFill>
+              <a:srgbClr val="CEB888"/>
+            </a:solidFill>
+            <a:prstDash val="solid"/>
+          </a:ln>
+        </p:spPr>
+      </p:sp>
+      <p:sp>
+        <p:nvSpPr>
+          <p:cNvPr id="10" name="Text 8">
+            <a:extLst>
+              <a:ext uri="{FF2B5EF4-FFF2-40B4-BE49-F238E27FC236}">
+                <a16:creationId xmlns:a16="http://schemas.microsoft.com/office/drawing/2014/main" id="{AB23203D-8DF8-108B-494F-AA6D5B1C3827}"/>
+              </a:ext>
+            </a:extLst>
+          </p:cNvPr>
+          <p:cNvSpPr/>
+          <p:nvPr/>
+        </p:nvSpPr>
+        <p:spPr>
+          <a:xfrm>
+            <a:off x="4698597" y="777240"/>
+            <a:ext cx="4304193" cy="329184"/>
+          </a:xfrm>
+          <a:prstGeom prst="rect">
+            <a:avLst/>
+          </a:prstGeom>
+          <a:noFill/>
+          <a:ln/>
+        </p:spPr>
+        <p:txBody>
+          <a:bodyPr wrap="square" lIns="91440" tIns="45720" rIns="91440" bIns="45720" rtlCol="0" anchor="ctr"/>
+          <a:lstStyle/>
+          <a:p>
+            <a:pPr algn="ctr"/>
+            <a:r>
+              <a:rPr lang="en-US" sz="1200" b="1">
+                <a:solidFill>
+                  <a:srgbClr val="3D0C1F"/>
+                </a:solidFill>
+                <a:latin typeface="Calibri"/>
+                <a:ea typeface="Calibri"/>
+                <a:cs typeface="Calibri"/>
+              </a:rPr>
+              <a:t>50 Epoch training snippet of Dice</a:t>
+            </a:r>
+            <a:endParaRPr lang="en-US" sz="1200" b="1">
+              <a:solidFill>
+                <a:srgbClr val="3D0C1F"/>
+              </a:solidFill>
+              <a:ea typeface="Calibri"/>
+              <a:cs typeface="Calibri"/>
+            </a:endParaRPr>
+          </a:p>
+        </p:txBody>
+      </p:sp>
+      <p:pic>
+        <p:nvPicPr>
+          <p:cNvPr id="12" name="Picture 11" descr="A graph with green and purple lines&#10;&#10;AI-generated content may be incorrect.">
+            <a:extLst>
+              <a:ext uri="{FF2B5EF4-FFF2-40B4-BE49-F238E27FC236}">
+                <a16:creationId xmlns:a16="http://schemas.microsoft.com/office/drawing/2014/main" id="{ABE274C0-9201-9E34-230D-BDAEF597434A}"/>
+              </a:ext>
+            </a:extLst>
+          </p:cNvPr>
+          <p:cNvPicPr>
+            <a:picLocks noChangeAspect="1"/>
+          </p:cNvPicPr>
+          <p:nvPr/>
+        </p:nvPicPr>
+        <p:blipFill>
+          <a:blip r:embed="rId3"/>
+          <a:stretch>
+            <a:fillRect/>
+          </a:stretch>
+        </p:blipFill>
+        <p:spPr>
+          <a:xfrm>
+            <a:off x="4713066" y="1169570"/>
+            <a:ext cx="4304336" cy="2073708"/>
+          </a:xfrm>
+          <a:prstGeom prst="rect">
+            <a:avLst/>
+          </a:prstGeom>
+        </p:spPr>
+      </p:pic>
+      <p:pic>
+        <p:nvPicPr>
+          <p:cNvPr id="13" name="Picture 12" descr="A computer screen shot of a program&#10;&#10;AI-generated content may be incorrect.">
+            <a:extLst>
+              <a:ext uri="{FF2B5EF4-FFF2-40B4-BE49-F238E27FC236}">
+                <a16:creationId xmlns:a16="http://schemas.microsoft.com/office/drawing/2014/main" id="{D4C0BCE0-8A8D-26C9-063E-B0892C2D8DDF}"/>
+              </a:ext>
+            </a:extLst>
+          </p:cNvPr>
+          <p:cNvPicPr>
+            <a:picLocks noChangeAspect="1"/>
+          </p:cNvPicPr>
+          <p:nvPr/>
+        </p:nvPicPr>
+        <p:blipFill>
+          <a:blip r:embed="rId4"/>
+          <a:stretch>
+            <a:fillRect/>
+          </a:stretch>
+        </p:blipFill>
+        <p:spPr>
+          <a:xfrm>
+            <a:off x="372854" y="1208107"/>
+            <a:ext cx="3395861" cy="2940694"/>
+          </a:xfrm>
+          <a:prstGeom prst="rect">
+            <a:avLst/>
+          </a:prstGeom>
+        </p:spPr>
+      </p:pic>
+    </p:spTree>
+    <p:extLst>
+      <p:ext uri="{BB962C8B-B14F-4D97-AF65-F5344CB8AC3E}">
+        <p14:creationId xmlns:p14="http://schemas.microsoft.com/office/powerpoint/2010/main" val="1772713354"/>
+      </p:ext>
+    </p:extLst>
+  </p:cSld>
+  <p:clrMapOvr>
+    <a:masterClrMapping/>
+  </p:clrMapOvr>
+</p:sld>
+</file>
+
+<file path=ppt/slides/slide7.xml><?xml version="1.0" encoding="utf-8"?>
+<p:sld xmlns:a="http://schemas.openxmlformats.org/drawingml/2006/main" xmlns:r="http://schemas.openxmlformats.org/officeDocument/2006/relationships" xmlns:p="http://schemas.openxmlformats.org/presentationml/2006/main">
   <p:cSld name="Slide 6">
     <p:bg>
       <p:bgPr>
         <a:solidFill>
           <a:srgbClr val="FAF7F5"/>
         </a:solidFill>
+        <a:effectLst/>
       </p:bgPr>
     </p:bg>
     <p:spTree>
@@ -7860,24 +7961,28 @@
           <a:ln/>
         </p:spPr>
         <p:txBody>
-          <a:bodyPr wrap="square" rtlCol="0" anchor="ctr"/>
+          <a:bodyPr wrap="square" lIns="91440" tIns="45720" rIns="91440" bIns="45720" rtlCol="0" anchor="ctr"/>
           <a:lstStyle/>
           <a:p>
-            <a:pPr indent="0" marL="0">
+            <a:pPr marL="0" indent="0">
               <a:buNone/>
             </a:pPr>
             <a:r>
-              <a:rPr lang="en-US" sz="2400" b="1" dirty="0">
+              <a:rPr lang="en-US" sz="2400" b="1">
                 <a:solidFill>
                   <a:srgbClr val="FFFFFF"/>
                 </a:solidFill>
-                <a:latin typeface="Calibri" pitchFamily="34" charset="0"/>
-                <a:ea typeface="Calibri" pitchFamily="34" charset="-122"/>
-                <a:cs typeface="Calibri" pitchFamily="34" charset="-120"/>
-              </a:rPr>
-              <a:t>04  |  Preliminary Interpretation</a:t>
-            </a:r>
-            <a:endParaRPr lang="en-US" sz="2400" dirty="0"/>
+                <a:latin typeface="Calibri"/>
+                <a:ea typeface="Calibri"/>
+                <a:cs typeface="Calibri"/>
+              </a:rPr>
+              <a:t>05 |  Preliminary Interpretation</a:t>
+            </a:r>
+            <a:endParaRPr lang="en-US" sz="2400">
+              <a:latin typeface="Calibri"/>
+              <a:ea typeface="Calibri"/>
+              <a:cs typeface="Calibri"/>
+            </a:endParaRPr>
           </a:p>
         </p:txBody>
       </p:sp>
@@ -7905,7 +8010,7 @@
             <a:prstDash val="solid"/>
           </a:ln>
           <a:effectLst>
-            <a:outerShdw sx="100000" sy="100000" kx="0" ky="0" algn="bl" rotWithShape="0" blurRad="101600" dist="38100" dir="8100000">
+            <a:outerShdw blurRad="101600" dist="38100" dir="8100000" algn="bl" rotWithShape="0">
               <a:srgbClr val="000000">
                 <a:alpha val="12000"/>
               </a:srgbClr>
@@ -7959,11 +8064,11 @@
           <a:bodyPr wrap="square" rtlCol="0" anchor="ctr"/>
           <a:lstStyle/>
           <a:p>
-            <a:pPr indent="0" marL="0">
+            <a:pPr marL="0" indent="0">
               <a:buNone/>
             </a:pPr>
             <a:r>
-              <a:rPr lang="en-US" sz="1300" b="1" dirty="0">
+              <a:rPr lang="en-US" sz="1300" b="1">
                 <a:solidFill>
                   <a:srgbClr val="FFFFFF"/>
                 </a:solidFill>
@@ -7973,7 +8078,7 @@
               </a:rPr>
               <a:t>What's Working</a:t>
             </a:r>
-            <a:endParaRPr lang="en-US" sz="1300" dirty="0"/>
+            <a:endParaRPr lang="en-US" sz="1300"/>
           </a:p>
         </p:txBody>
       </p:sp>
@@ -7995,7 +8100,7 @@
           <a:ln/>
         </p:spPr>
         <p:txBody>
-          <a:bodyPr wrap="square" rtlCol="0" anchor="ctr"/>
+          <a:bodyPr wrap="square" lIns="91440" tIns="45720" rIns="91440" bIns="45720" rtlCol="0" anchor="ctr"/>
           <a:lstStyle/>
           <a:p>
             <a:pPr marL="342900" indent="-342900">
@@ -8006,17 +8111,52 @@
               <a:buChar char="•"/>
             </a:pPr>
             <a:r>
+              <a:rPr lang="en-US" sz="1250" dirty="0" err="1">
+                <a:solidFill>
+                  <a:srgbClr val="1A1A1A"/>
+                </a:solidFill>
+                <a:latin typeface="Calibri"/>
+                <a:ea typeface="Calibri"/>
+                <a:cs typeface="Calibri"/>
+              </a:rPr>
+              <a:t>Hausdorff</a:t>
+            </a:r>
+            <a:r>
               <a:rPr lang="en-US" sz="1250" dirty="0">
                 <a:solidFill>
                   <a:srgbClr val="1A1A1A"/>
                 </a:solidFill>
-                <a:latin typeface="Calibri" pitchFamily="34" charset="0"/>
-                <a:ea typeface="Calibri" pitchFamily="34" charset="-122"/>
-                <a:cs typeface="Calibri" pitchFamily="34" charset="-120"/>
-              </a:rPr>
-              <a:t>Stomach segmentation is strongest (Dice 0.842) — clear fluid-filled boundary in MRI</a:t>
-            </a:r>
-            <a:endParaRPr lang="en-US" sz="1250" dirty="0"/>
+                <a:latin typeface="Calibri"/>
+                <a:ea typeface="Calibri"/>
+                <a:cs typeface="Calibri"/>
+              </a:rPr>
+              <a:t> mean is doing well, decreasing at a rate of around .003 per Epoch </a:t>
+            </a:r>
+          </a:p>
+          <a:p>
+            <a:pPr marL="342900" indent="-342900">
+              <a:spcAft>
+                <a:spcPts val="600"/>
+              </a:spcAft>
+              <a:buSzPct val="100000"/>
+              <a:buFont typeface="Arial"/>
+              <a:buChar char="•"/>
+            </a:pPr>
+            <a:r>
+              <a:rPr lang="en-US" sz="1250" dirty="0">
+                <a:solidFill>
+                  <a:srgbClr val="1A1A1A"/>
+                </a:solidFill>
+                <a:ea typeface="+mn-lt"/>
+                <a:cs typeface="+mn-lt"/>
+              </a:rPr>
+              <a:t>Stomach — consistently 0.79-0.81 Dice, easiest anatomy for the model to find. Well-defined shape, large surface area, appears frequently in slices.</a:t>
+            </a:r>
+            <a:endParaRPr lang="en-US" sz="1250" dirty="0">
+              <a:latin typeface="Calibri"/>
+              <a:ea typeface="Calibri"/>
+              <a:cs typeface="Calibri"/>
+            </a:endParaRPr>
           </a:p>
           <a:p>
             <a:pPr marL="342900" indent="-342900">
@@ -8031,11 +8171,11 @@
                 <a:solidFill>
                   <a:srgbClr val="1A1A1A"/>
                 </a:solidFill>
-                <a:latin typeface="Calibri" pitchFamily="34" charset="0"/>
-                <a:ea typeface="Calibri" pitchFamily="34" charset="-122"/>
-                <a:cs typeface="Calibri" pitchFamily="34" charset="-120"/>
-              </a:rPr>
-              <a:t>Loss curves converge smoothly; no training instability detected</a:t>
+                <a:latin typeface="Calibri"/>
+                <a:ea typeface="Calibri"/>
+                <a:cs typeface="Calibri"/>
+              </a:rPr>
+              <a:t>Loss curves converge smoothly; no training instability detected, so architecture isn't a problem.</a:t>
             </a:r>
             <a:endParaRPr lang="en-US" sz="1250" dirty="0"/>
           </a:p>
@@ -8052,13 +8192,61 @@
                 <a:solidFill>
                   <a:srgbClr val="1A1A1A"/>
                 </a:solidFill>
-                <a:latin typeface="Calibri" pitchFamily="34" charset="0"/>
-                <a:ea typeface="Calibri" pitchFamily="34" charset="-122"/>
-                <a:cs typeface="Calibri" pitchFamily="34" charset="-120"/>
-              </a:rPr>
-              <a:t>Global normalization (calcStats.json) consistent across train/val split</a:t>
-            </a:r>
-            <a:endParaRPr lang="en-US" sz="1250" dirty="0"/>
+                <a:latin typeface="Calibri"/>
+                <a:ea typeface="Calibri"/>
+                <a:cs typeface="Calibri"/>
+              </a:rPr>
+              <a:t>Global normalization (</a:t>
+            </a:r>
+            <a:r>
+              <a:rPr lang="en-US" sz="1250" dirty="0" err="1">
+                <a:solidFill>
+                  <a:srgbClr val="1A1A1A"/>
+                </a:solidFill>
+                <a:latin typeface="Calibri"/>
+                <a:ea typeface="Calibri"/>
+                <a:cs typeface="Calibri"/>
+              </a:rPr>
+              <a:t>calcStats.json</a:t>
+            </a:r>
+            <a:r>
+              <a:rPr lang="en-US" sz="1250" dirty="0">
+                <a:solidFill>
+                  <a:srgbClr val="1A1A1A"/>
+                </a:solidFill>
+                <a:latin typeface="Calibri"/>
+                <a:ea typeface="Calibri"/>
+                <a:cs typeface="Calibri"/>
+              </a:rPr>
+              <a:t>) consistent across train/</a:t>
+            </a:r>
+            <a:r>
+              <a:rPr lang="en-US" sz="1250" dirty="0" err="1">
+                <a:solidFill>
+                  <a:srgbClr val="1A1A1A"/>
+                </a:solidFill>
+                <a:latin typeface="Calibri"/>
+                <a:ea typeface="Calibri"/>
+                <a:cs typeface="Calibri"/>
+              </a:rPr>
+              <a:t>val</a:t>
+            </a:r>
+            <a:r>
+              <a:rPr lang="en-US" sz="1250" dirty="0">
+                <a:solidFill>
+                  <a:srgbClr val="1A1A1A"/>
+                </a:solidFill>
+                <a:latin typeface="Calibri"/>
+                <a:ea typeface="Calibri"/>
+                <a:cs typeface="Calibri"/>
+              </a:rPr>
+              <a:t> split</a:t>
+            </a:r>
+            <a:endParaRPr lang="en-US" sz="1250" dirty="0">
+              <a:latin typeface="Calibri"/>
+              <a:ea typeface="Calibri"/>
+              <a:cs typeface="Calibri"/>
+            </a:endParaRPr>
           </a:p>
           <a:p>
             <a:pPr marL="342900" indent="-342900">
@@ -8069,17 +8257,75 @@
               <a:buChar char="•"/>
             </a:pPr>
             <a:r>
+              <a:rPr lang="en-US" sz="1250" dirty="0" err="1">
+                <a:solidFill>
+                  <a:srgbClr val="1A1A1A"/>
+                </a:solidFill>
+                <a:latin typeface="Calibri"/>
+                <a:ea typeface="Calibri"/>
+                <a:cs typeface="Calibri"/>
+              </a:rPr>
+              <a:t>DataLoader</a:t>
+            </a:r>
+            <a:r>
               <a:rPr lang="en-US" sz="1250" dirty="0">
                 <a:solidFill>
                   <a:srgbClr val="1A1A1A"/>
                 </a:solidFill>
-                <a:latin typeface="Calibri" pitchFamily="34" charset="0"/>
-                <a:ea typeface="Calibri" pitchFamily="34" charset="-122"/>
-                <a:cs typeface="Calibri" pitchFamily="34" charset="-120"/>
-              </a:rPr>
-              <a:t>DataLoader pipeline verified — images and masks align correctly</a:t>
-            </a:r>
-            <a:endParaRPr lang="en-US" sz="1250" dirty="0"/>
+                <a:latin typeface="Calibri"/>
+                <a:ea typeface="Calibri"/>
+                <a:cs typeface="Calibri"/>
+              </a:rPr>
+              <a:t> pipeline verified — images and masks align correctly</a:t>
+            </a:r>
+          </a:p>
+          <a:p>
+            <a:pPr marL="342900" indent="-342900">
+              <a:spcAft>
+                <a:spcPts val="600"/>
+              </a:spcAft>
+              <a:buSzPct val="100000"/>
+              <a:buChar char="•"/>
+            </a:pPr>
+            <a:r>
+              <a:rPr lang="en-US" sz="1250">
+                <a:solidFill>
+                  <a:srgbClr val="1A1A1A"/>
+                </a:solidFill>
+                <a:latin typeface="Calibri"/>
+                <a:ea typeface="Calibri"/>
+                <a:cs typeface="Calibri"/>
+              </a:rPr>
+              <a:t>Composite Score – Since HD Mean takes up 60% this is still relatively high</a:t>
+            </a:r>
+          </a:p>
+          <a:p>
+            <a:pPr marL="342900" indent="-342900">
+              <a:spcAft>
+                <a:spcPts val="600"/>
+              </a:spcAft>
+              <a:buSzPct val="100000"/>
+              <a:buFont typeface="Arial"/>
+              <a:buChar char="•"/>
+            </a:pPr>
+            <a:r>
+              <a:rPr lang="en-US" sz="1250">
+                <a:solidFill>
+                  <a:srgbClr val="1A1A1A"/>
+                </a:solidFill>
+                <a:ea typeface="+mn-lt"/>
+                <a:cs typeface="+mn-lt"/>
+              </a:rPr>
+              <a:t>Implements 50/50 BCE + Dice loss for Combined Loss</a:t>
+            </a:r>
+            <a:endParaRPr lang="en-US" sz="1250" dirty="0">
+              <a:solidFill>
+                <a:srgbClr val="1A1A1A"/>
+              </a:solidFill>
+              <a:latin typeface="Calibri"/>
+              <a:ea typeface="Calibri"/>
+              <a:cs typeface="Calibri"/>
+            </a:endParaRPr>
           </a:p>
         </p:txBody>
       </p:sp>
@@ -8107,7 +8353,7 @@
             <a:prstDash val="solid"/>
           </a:ln>
           <a:effectLst>
-            <a:outerShdw sx="100000" sy="100000" kx="0" ky="0" algn="bl" rotWithShape="0" blurRad="101600" dist="38100" dir="8100000">
+            <a:outerShdw blurRad="101600" dist="38100" dir="8100000" algn="bl" rotWithShape="0">
               <a:srgbClr val="000000">
                 <a:alpha val="12000"/>
               </a:srgbClr>
@@ -8161,11 +8407,11 @@
           <a:bodyPr wrap="square" rtlCol="0" anchor="ctr"/>
           <a:lstStyle/>
           <a:p>
-            <a:pPr indent="0" marL="0">
+            <a:pPr marL="0" indent="0">
               <a:buNone/>
             </a:pPr>
             <a:r>
-              <a:rPr lang="en-US" sz="1300" b="1" dirty="0">
+              <a:rPr lang="en-US" sz="1300" b="1">
                 <a:solidFill>
                   <a:srgbClr val="FFFFFF"/>
                 </a:solidFill>
@@ -8175,7 +8421,7 @@
               </a:rPr>
               <a:t>What's Struggling</a:t>
             </a:r>
-            <a:endParaRPr lang="en-US" sz="1300" dirty="0"/>
+            <a:endParaRPr lang="en-US" sz="1300"/>
           </a:p>
         </p:txBody>
       </p:sp>
@@ -8197,7 +8443,7 @@
           <a:ln/>
         </p:spPr>
         <p:txBody>
-          <a:bodyPr wrap="square" rtlCol="0" anchor="ctr"/>
+          <a:bodyPr wrap="square" lIns="91440" tIns="45720" rIns="91440" bIns="45720" rtlCol="0" anchor="ctr"/>
           <a:lstStyle/>
           <a:p>
             <a:pPr marL="342900" indent="-342900">
@@ -8208,17 +8454,23 @@
               <a:buChar char="•"/>
             </a:pPr>
             <a:r>
-              <a:rPr lang="en-US" sz="1250" dirty="0">
+              <a:rPr lang="en-US" sz="1250">
                 <a:solidFill>
                   <a:srgbClr val="1A1A1A"/>
                 </a:solidFill>
-                <a:latin typeface="Calibri" pitchFamily="34" charset="0"/>
-                <a:ea typeface="Calibri" pitchFamily="34" charset="-122"/>
-                <a:cs typeface="Calibri" pitchFamily="34" charset="-120"/>
-              </a:rPr>
-              <a:t>Small bowel: High shape variability leads to boundary blur (HD: 7.84 mm)</a:t>
-            </a:r>
-            <a:endParaRPr lang="en-US" sz="1250" dirty="0"/>
+                <a:latin typeface="Calibri"/>
+                <a:ea typeface="Calibri"/>
+                <a:cs typeface="Calibri"/>
+              </a:rPr>
+              <a:t>Small bowel: High shape variability leads to lower shape recognition than stomach</a:t>
+            </a:r>
+            <a:endParaRPr lang="en-US" sz="1250">
+              <a:solidFill>
+                <a:srgbClr val="1A1A1A"/>
+              </a:solidFill>
+              <a:ea typeface="Calibri"/>
+              <a:cs typeface="Calibri"/>
+            </a:endParaRPr>
           </a:p>
           <a:p>
             <a:pPr marL="342900" indent="-342900">
@@ -8226,6 +8478,7 @@
                 <a:spcPts val="600"/>
               </a:spcAft>
               <a:buSzPct val="100000"/>
+              <a:buFont typeface="Arial"/>
               <a:buChar char="•"/>
             </a:pPr>
             <a:r>
@@ -8233,13 +8486,11 @@
                 <a:solidFill>
                   <a:srgbClr val="1A1A1A"/>
                 </a:solidFill>
-                <a:latin typeface="Calibri" pitchFamily="34" charset="0"/>
-                <a:ea typeface="Calibri" pitchFamily="34" charset="-122"/>
-                <a:cs typeface="Calibri" pitchFamily="34" charset="-120"/>
-              </a:rPr>
-              <a:t>Empty slices introduce false positives — background class dominance</a:t>
-            </a:r>
-            <a:endParaRPr lang="en-US" sz="1250" dirty="0"/>
+                <a:ea typeface="Calibri"/>
+                <a:cs typeface="Calibri"/>
+              </a:rPr>
+              <a:t>Large Bowel improvements stop possibly due to lack of annotation in the dataset</a:t>
+            </a:r>
           </a:p>
           <a:p>
             <a:pPr marL="342900" indent="-342900">
@@ -8247,20 +8498,20 @@
                 <a:spcPts val="600"/>
               </a:spcAft>
               <a:buSzPct val="100000"/>
+              <a:buFont typeface="Arial"/>
               <a:buChar char="•"/>
             </a:pPr>
             <a:r>
-              <a:rPr lang="en-US" sz="1250" dirty="0">
+              <a:rPr lang="en-US" sz="1250">
                 <a:solidFill>
                   <a:srgbClr val="1A1A1A"/>
                 </a:solidFill>
-                <a:latin typeface="Calibri" pitchFamily="34" charset="0"/>
-                <a:ea typeface="Calibri" pitchFamily="34" charset="-122"/>
-                <a:cs typeface="Calibri" pitchFamily="34" charset="-120"/>
-              </a:rPr>
-              <a:t>Model tends to over-segment large bowel at organ edges</a:t>
-            </a:r>
-            <a:endParaRPr lang="en-US" sz="1250" dirty="0"/>
+                <a:latin typeface="Calibri" panose="020F0502020204030204"/>
+                <a:ea typeface="Calibri"/>
+                <a:cs typeface="Calibri"/>
+              </a:rPr>
+              <a:t>Low worker amounts of 2 potentially means unoptimized parallelization when training</a:t>
+            </a:r>
           </a:p>
           <a:p>
             <a:pPr marL="342900" indent="-342900">
@@ -8268,6 +8519,7 @@
                 <a:spcPts val="600"/>
               </a:spcAft>
               <a:buSzPct val="100000"/>
+              <a:buFont typeface="Arial"/>
               <a:buChar char="•"/>
             </a:pPr>
             <a:r>
@@ -8275,13 +8527,82 @@
                 <a:solidFill>
                   <a:srgbClr val="1A1A1A"/>
                 </a:solidFill>
-                <a:latin typeface="Calibri" pitchFamily="34" charset="0"/>
-                <a:ea typeface="Calibri" pitchFamily="34" charset="-122"/>
-                <a:cs typeface="Calibri" pitchFamily="34" charset="-120"/>
-              </a:rPr>
-              <a:t>2D U-Net lacks depth context — adjacent slices not yet leveraged</a:t>
-            </a:r>
-            <a:endParaRPr lang="en-US" sz="1250" dirty="0"/>
+                <a:ea typeface="+mn-lt"/>
+                <a:cs typeface="+mn-lt"/>
+              </a:rPr>
+              <a:t>The loss function — </a:t>
+            </a:r>
+            <a:r>
+              <a:rPr lang="en-US" sz="1250" dirty="0" err="1">
+                <a:solidFill>
+                  <a:srgbClr val="1A1A1A"/>
+                </a:solidFill>
+                <a:ea typeface="+mn-lt"/>
+                <a:cs typeface="+mn-lt"/>
+              </a:rPr>
+              <a:t>DiceLoss</a:t>
+            </a:r>
+            <a:r>
+              <a:rPr lang="en-US" sz="1250" dirty="0">
+                <a:solidFill>
+                  <a:srgbClr val="1A1A1A"/>
+                </a:solidFill>
+                <a:ea typeface="+mn-lt"/>
+                <a:cs typeface="+mn-lt"/>
+              </a:rPr>
+              <a:t> was flattening across all classes before averaging, meaning large bowel was never getting targeted pressure.</a:t>
+            </a:r>
+            <a:endParaRPr lang="en-US" sz="1250" dirty="0">
+              <a:solidFill>
+                <a:srgbClr val="1A1A1A"/>
+              </a:solidFill>
+              <a:latin typeface="Calibri" panose="020F0502020204030204"/>
+              <a:ea typeface="Calibri"/>
+              <a:cs typeface="Calibri"/>
+            </a:endParaRPr>
+          </a:p>
+        </p:txBody>
+      </p:sp>
+      <p:sp>
+        <p:nvSpPr>
+          <p:cNvPr id="13" name="TextBox 12">
+            <a:extLst>
+              <a:ext uri="{FF2B5EF4-FFF2-40B4-BE49-F238E27FC236}">
+                <a16:creationId xmlns:a16="http://schemas.microsoft.com/office/drawing/2014/main" id="{D2EF6896-FEF3-F0FB-75DA-A60B334E9D51}"/>
+              </a:ext>
+            </a:extLst>
+          </p:cNvPr>
+          <p:cNvSpPr txBox="1"/>
+          <p:nvPr/>
+        </p:nvSpPr>
+        <p:spPr>
+          <a:xfrm>
+            <a:off x="8877586" y="4898571"/>
+            <a:ext cx="163285" cy="246221"/>
+          </a:xfrm>
+          <a:prstGeom prst="rect">
+            <a:avLst/>
+          </a:prstGeom>
+          <a:noFill/>
+        </p:spPr>
+        <p:txBody>
+          <a:bodyPr rot="0" spcFirstLastPara="0" vertOverflow="overflow" horzOverflow="overflow" vert="horz" wrap="square" lIns="91440" tIns="45720" rIns="91440" bIns="45720" numCol="1" spcCol="0" rtlCol="0" fromWordArt="0" anchor="t" anchorCtr="0" forceAA="0" compatLnSpc="1">
+            <a:prstTxWarp prst="textNoShape">
+              <a:avLst/>
+            </a:prstTxWarp>
+            <a:spAutoFit/>
+          </a:bodyPr>
+          <a:lstStyle/>
+          <a:p>
+            <a:pPr algn="l"/>
+            <a:r>
+              <a:rPr lang="en-US" sz="1000">
+                <a:ea typeface="Calibri"/>
+                <a:cs typeface="Calibri"/>
+              </a:rPr>
+              <a:t>7</a:t>
+            </a:r>
+            <a:endParaRPr lang="en-US"/>
           </a:p>
         </p:txBody>
       </p:sp>
@@ -8293,7 +8614,7 @@
 </p:sld>
 </file>
 
-<file path=ppt/slides/slide7.xml><?xml version="1.0" encoding="utf-8"?>
+<file path=ppt/slides/slide8.xml><?xml version="1.0" encoding="utf-8"?>
 <p:sld xmlns:a="http://schemas.openxmlformats.org/drawingml/2006/main" xmlns:r="http://schemas.openxmlformats.org/officeDocument/2006/relationships" xmlns:p="http://schemas.openxmlformats.org/presentationml/2006/main">
   <p:cSld name="Slide 7">
     <p:bg>
@@ -8301,6 +8622,7 @@
         <a:solidFill>
           <a:srgbClr val="FAF7F5"/>
         </a:solidFill>
+        <a:effectLst/>
       </p:bgPr>
     </p:bg>
     <p:spTree>
@@ -8360,24 +8682,28 @@
           <a:ln/>
         </p:spPr>
         <p:txBody>
-          <a:bodyPr wrap="square" rtlCol="0" anchor="ctr"/>
+          <a:bodyPr wrap="square" lIns="91440" tIns="45720" rIns="91440" bIns="45720" rtlCol="0" anchor="ctr"/>
           <a:lstStyle/>
           <a:p>
-            <a:pPr indent="0" marL="0">
+            <a:pPr marL="0" indent="0">
               <a:buNone/>
             </a:pPr>
             <a:r>
-              <a:rPr lang="en-US" sz="2400" b="1" dirty="0">
+              <a:rPr lang="en-US" sz="2400" b="1">
                 <a:solidFill>
                   <a:srgbClr val="FFFFFF"/>
                 </a:solidFill>
-                <a:latin typeface="Calibri" pitchFamily="34" charset="0"/>
-                <a:ea typeface="Calibri" pitchFamily="34" charset="-122"/>
-                <a:cs typeface="Calibri" pitchFamily="34" charset="-120"/>
-              </a:rPr>
-              <a:t>05  |  Planned Improvements</a:t>
-            </a:r>
-            <a:endParaRPr lang="en-US" sz="2400" dirty="0"/>
+                <a:latin typeface="Calibri"/>
+                <a:ea typeface="Calibri"/>
+                <a:cs typeface="Calibri"/>
+              </a:rPr>
+              <a:t>06 |  Planned Improvements</a:t>
+            </a:r>
+            <a:endParaRPr lang="en-US" sz="2400">
+              <a:latin typeface="Calibri"/>
+              <a:ea typeface="Calibri"/>
+              <a:cs typeface="Calibri"/>
+            </a:endParaRPr>
           </a:p>
         </p:txBody>
       </p:sp>
@@ -8389,7 +8715,7 @@
         </p:nvSpPr>
         <p:spPr>
           <a:xfrm>
-            <a:off x="228600" y="822960"/>
+            <a:off x="4713790" y="815726"/>
             <a:ext cx="4251960" cy="1965960"/>
           </a:xfrm>
           <a:prstGeom prst="rect">
@@ -8405,7 +8731,7 @@
             <a:prstDash val="solid"/>
           </a:ln>
           <a:effectLst>
-            <a:outerShdw sx="100000" sy="100000" kx="0" ky="0" algn="bl" rotWithShape="0" blurRad="101600" dist="38100" dir="8100000">
+            <a:outerShdw blurRad="101600" dist="38100" dir="8100000" algn="bl" rotWithShape="0">
               <a:srgbClr val="000000">
                 <a:alpha val="12000"/>
               </a:srgbClr>
@@ -8421,7 +8747,7 @@
         </p:nvSpPr>
         <p:spPr>
           <a:xfrm>
-            <a:off x="228600" y="822960"/>
+            <a:off x="4713790" y="815726"/>
             <a:ext cx="329184" cy="1965960"/>
           </a:xfrm>
           <a:prstGeom prst="rect">
@@ -8446,7 +8772,7 @@
         </p:nvSpPr>
         <p:spPr>
           <a:xfrm>
-            <a:off x="274320" y="868680"/>
+            <a:off x="4759510" y="861446"/>
             <a:ext cx="237744" cy="237744"/>
           </a:xfrm>
           <a:prstGeom prst="rect">
@@ -8471,8 +8797,47 @@
         </p:nvSpPr>
         <p:spPr>
           <a:xfrm>
-            <a:off x="265176" y="859536"/>
+            <a:off x="4750366" y="852302"/>
             <a:ext cx="256032" cy="256032"/>
+          </a:xfrm>
+          <a:prstGeom prst="rect">
+            <a:avLst/>
+          </a:prstGeom>
+          <a:noFill/>
+          <a:ln/>
+        </p:spPr>
+        <p:txBody>
+          <a:bodyPr wrap="square" lIns="91440" tIns="45720" rIns="91440" bIns="45720" rtlCol="0" anchor="ctr"/>
+          <a:lstStyle/>
+          <a:p>
+            <a:pPr marL="0" indent="0" algn="ctr">
+              <a:buNone/>
+            </a:pPr>
+            <a:r>
+              <a:rPr lang="en-US" sz="1100" b="1">
+                <a:solidFill>
+                  <a:srgbClr val="065A82"/>
+                </a:solidFill>
+                <a:latin typeface="Calibri"/>
+                <a:ea typeface="Calibri"/>
+                <a:cs typeface="Calibri"/>
+              </a:rPr>
+              <a:t>B</a:t>
+            </a:r>
+            <a:endParaRPr lang="en-US" sz="1100"/>
+          </a:p>
+        </p:txBody>
+      </p:sp>
+      <p:sp>
+        <p:nvSpPr>
+          <p:cNvPr id="8" name="Text 6"/>
+          <p:cNvSpPr/>
+          <p:nvPr/>
+        </p:nvSpPr>
+        <p:spPr>
+          <a:xfrm>
+            <a:off x="5170990" y="888878"/>
+            <a:ext cx="3703320" cy="347472"/>
           </a:xfrm>
           <a:prstGeom prst="rect">
             <a:avLst/>
@@ -8484,34 +8849,34 @@
           <a:bodyPr wrap="square" rtlCol="0" anchor="ctr"/>
           <a:lstStyle/>
           <a:p>
-            <a:pPr algn="ctr" indent="0" marL="0">
+            <a:pPr marL="0" indent="0">
               <a:buNone/>
             </a:pPr>
             <a:r>
-              <a:rPr lang="en-US" sz="1100" b="1" dirty="0">
-                <a:solidFill>
-                  <a:srgbClr val="065A82"/>
+              <a:rPr lang="en-US" sz="1350" b="1">
+                <a:solidFill>
+                  <a:srgbClr val="1A1A1A"/>
                 </a:solidFill>
                 <a:latin typeface="Calibri" pitchFamily="34" charset="0"/>
                 <a:ea typeface="Calibri" pitchFamily="34" charset="-122"/>
                 <a:cs typeface="Calibri" pitchFamily="34" charset="-120"/>
               </a:rPr>
-              <a:t>A</a:t>
-            </a:r>
-            <a:endParaRPr lang="en-US" sz="1100" dirty="0"/>
+              <a:t>Preprocessing</a:t>
+            </a:r>
+            <a:endParaRPr lang="en-US" sz="1350"/>
           </a:p>
         </p:txBody>
       </p:sp>
       <p:sp>
         <p:nvSpPr>
-          <p:cNvPr id="8" name="Text 6"/>
-          <p:cNvSpPr/>
-          <p:nvPr/>
-        </p:nvSpPr>
-        <p:spPr>
-          <a:xfrm>
-            <a:off x="685800" y="896112"/>
-            <a:ext cx="3703320" cy="347472"/>
+          <p:cNvPr id="9" name="Text 7"/>
+          <p:cNvSpPr/>
+          <p:nvPr/>
+        </p:nvSpPr>
+        <p:spPr>
+          <a:xfrm>
+            <a:off x="5170990" y="1272926"/>
+            <a:ext cx="3703320" cy="1417320"/>
           </a:xfrm>
           <a:prstGeom prst="rect">
             <a:avLst/>
@@ -8520,46 +8885,7 @@
           <a:ln/>
         </p:spPr>
         <p:txBody>
-          <a:bodyPr wrap="square" rtlCol="0" anchor="ctr"/>
-          <a:lstStyle/>
-          <a:p>
-            <a:pPr indent="0" marL="0">
-              <a:buNone/>
-            </a:pPr>
-            <a:r>
-              <a:rPr lang="en-US" sz="1350" b="1" dirty="0">
-                <a:solidFill>
-                  <a:srgbClr val="1A1A1A"/>
-                </a:solidFill>
-                <a:latin typeface="Calibri" pitchFamily="34" charset="0"/>
-                <a:ea typeface="Calibri" pitchFamily="34" charset="-122"/>
-                <a:cs typeface="Calibri" pitchFamily="34" charset="-120"/>
-              </a:rPr>
-              <a:t>Preprocessing</a:t>
-            </a:r>
-            <a:endParaRPr lang="en-US" sz="1350" dirty="0"/>
-          </a:p>
-        </p:txBody>
-      </p:sp>
-      <p:sp>
-        <p:nvSpPr>
-          <p:cNvPr id="9" name="Text 7"/>
-          <p:cNvSpPr/>
-          <p:nvPr/>
-        </p:nvSpPr>
-        <p:spPr>
-          <a:xfrm>
-            <a:off x="685800" y="1280160"/>
-            <a:ext cx="3703320" cy="1417320"/>
-          </a:xfrm>
-          <a:prstGeom prst="rect">
-            <a:avLst/>
-          </a:prstGeom>
-          <a:noFill/>
-          <a:ln/>
-        </p:spPr>
-        <p:txBody>
-          <a:bodyPr wrap="square" rtlCol="0" anchor="ctr"/>
+          <a:bodyPr wrap="square" lIns="91440" tIns="45720" rIns="91440" bIns="45720" rtlCol="0" anchor="ctr"/>
           <a:lstStyle/>
           <a:p>
             <a:pPr marL="342900" indent="-342900">
@@ -8570,7 +8896,7 @@
               <a:buChar char="•"/>
             </a:pPr>
             <a:r>
-              <a:rPr lang="en-US" sz="1200" dirty="0">
+              <a:rPr lang="en-US" sz="1200">
                 <a:solidFill>
                   <a:srgbClr val="5A5A5A"/>
                 </a:solidFill>
@@ -8580,7 +8906,7 @@
               </a:rPr>
               <a:t>Apply CLAHE to normalize MRI scanner intensity drift</a:t>
             </a:r>
-            <a:endParaRPr lang="en-US" sz="1200" dirty="0"/>
+            <a:endParaRPr lang="en-US" sz="1200"/>
           </a:p>
           <a:p>
             <a:pPr marL="342900" indent="-342900">
@@ -8591,29 +8917,28 @@
               <a:buChar char="•"/>
             </a:pPr>
             <a:r>
-              <a:rPr lang="en-US" sz="1200" dirty="0">
+              <a:rPr lang="en-US" sz="1200">
                 <a:solidFill>
                   <a:srgbClr val="5A5A5A"/>
                 </a:solidFill>
-                <a:latin typeface="Calibri" pitchFamily="34" charset="0"/>
-                <a:ea typeface="Calibri" pitchFamily="34" charset="-122"/>
-                <a:cs typeface="Calibri" pitchFamily="34" charset="-120"/>
-              </a:rPr>
-              <a:t>Increase target resolution from 320→448 via upscale + crop</a:t>
-            </a:r>
-            <a:endParaRPr lang="en-US" sz="1200" dirty="0"/>
+                <a:latin typeface="Calibri"/>
+                <a:ea typeface="Calibri"/>
+                <a:cs typeface="Calibri"/>
+              </a:rPr>
+              <a:t>Increase target resolution from a downscaled 224 to a to-scale 320 and potential upscale comparison of 448</a:t>
+            </a:r>
           </a:p>
         </p:txBody>
       </p:sp>
       <p:sp>
         <p:nvSpPr>
-          <p:cNvPr id="10" name="Shape 8"/>
-          <p:cNvSpPr/>
-          <p:nvPr/>
-        </p:nvSpPr>
-        <p:spPr>
-          <a:xfrm>
-            <a:off x="4709160" y="822960"/>
+          <p:cNvPr id="16" name="Shape 14"/>
+          <p:cNvSpPr/>
+          <p:nvPr/>
+        </p:nvSpPr>
+        <p:spPr>
+          <a:xfrm>
+            <a:off x="221366" y="812398"/>
             <a:ext cx="4251960" cy="1965960"/>
           </a:xfrm>
           <a:prstGeom prst="rect">
@@ -8629,7 +8954,7 @@
             <a:prstDash val="solid"/>
           </a:ln>
           <a:effectLst>
-            <a:outerShdw sx="100000" sy="100000" kx="0" ky="0" algn="bl" rotWithShape="0" blurRad="101600" dist="38100" dir="8100000">
+            <a:outerShdw blurRad="101600" dist="38100" dir="8100000" algn="bl" rotWithShape="0">
               <a:srgbClr val="000000">
                 <a:alpha val="12000"/>
               </a:srgbClr>
@@ -8639,24 +8964,24 @@
       </p:sp>
       <p:sp>
         <p:nvSpPr>
-          <p:cNvPr id="11" name="Shape 9"/>
-          <p:cNvSpPr/>
-          <p:nvPr/>
-        </p:nvSpPr>
-        <p:spPr>
-          <a:xfrm>
-            <a:off x="4709160" y="822960"/>
+          <p:cNvPr id="17" name="Shape 15"/>
+          <p:cNvSpPr/>
+          <p:nvPr/>
+        </p:nvSpPr>
+        <p:spPr>
+          <a:xfrm>
+            <a:off x="221366" y="812398"/>
             <a:ext cx="329184" cy="1965960"/>
           </a:xfrm>
           <a:prstGeom prst="rect">
             <a:avLst/>
           </a:prstGeom>
           <a:solidFill>
-            <a:srgbClr val="6B1E3C"/>
+            <a:srgbClr val="2D6A4F"/>
           </a:solidFill>
           <a:ln w="12700">
             <a:solidFill>
-              <a:srgbClr val="6B1E3C"/>
+              <a:srgbClr val="2D6A4F"/>
             </a:solidFill>
             <a:prstDash val="solid"/>
           </a:ln>
@@ -8664,13 +8989,13 @@
       </p:sp>
       <p:sp>
         <p:nvSpPr>
-          <p:cNvPr id="12" name="Shape 10"/>
-          <p:cNvSpPr/>
-          <p:nvPr/>
-        </p:nvSpPr>
-        <p:spPr>
-          <a:xfrm>
-            <a:off x="4754880" y="868680"/>
+          <p:cNvPr id="18" name="Shape 16"/>
+          <p:cNvSpPr/>
+          <p:nvPr/>
+        </p:nvSpPr>
+        <p:spPr>
+          <a:xfrm>
+            <a:off x="267086" y="858118"/>
             <a:ext cx="237744" cy="237744"/>
           </a:xfrm>
           <a:prstGeom prst="rect">
@@ -8689,14 +9014,58 @@
       </p:sp>
       <p:sp>
         <p:nvSpPr>
-          <p:cNvPr id="13" name="Text 11"/>
-          <p:cNvSpPr/>
-          <p:nvPr/>
-        </p:nvSpPr>
-        <p:spPr>
-          <a:xfrm>
-            <a:off x="4745736" y="859536"/>
+          <p:cNvPr id="19" name="Text 17"/>
+          <p:cNvSpPr/>
+          <p:nvPr/>
+        </p:nvSpPr>
+        <p:spPr>
+          <a:xfrm>
+            <a:off x="257942" y="848974"/>
             <a:ext cx="256032" cy="256032"/>
+          </a:xfrm>
+          <a:prstGeom prst="rect">
+            <a:avLst/>
+          </a:prstGeom>
+          <a:noFill/>
+          <a:ln/>
+        </p:spPr>
+        <p:txBody>
+          <a:bodyPr wrap="square" lIns="91440" tIns="45720" rIns="91440" bIns="45720" rtlCol="0" anchor="ctr"/>
+          <a:lstStyle/>
+          <a:p>
+            <a:pPr marL="0" indent="0" algn="ctr">
+              <a:buNone/>
+            </a:pPr>
+            <a:r>
+              <a:rPr lang="en-US" sz="1100" b="1">
+                <a:solidFill>
+                  <a:srgbClr val="2D6A4F"/>
+                </a:solidFill>
+                <a:ea typeface="Calibri"/>
+                <a:cs typeface="Calibri"/>
+              </a:rPr>
+              <a:t>S</a:t>
+            </a:r>
+            <a:endParaRPr lang="en-US" sz="1100" b="1" dirty="0">
+              <a:solidFill>
+                <a:srgbClr val="2D6A4F"/>
+              </a:solidFill>
+              <a:ea typeface="Calibri"/>
+              <a:cs typeface="Calibri"/>
+            </a:endParaRPr>
+          </a:p>
+        </p:txBody>
+      </p:sp>
+      <p:sp>
+        <p:nvSpPr>
+          <p:cNvPr id="20" name="Text 18"/>
+          <p:cNvSpPr/>
+          <p:nvPr/>
+        </p:nvSpPr>
+        <p:spPr>
+          <a:xfrm>
+            <a:off x="678566" y="885550"/>
+            <a:ext cx="3703320" cy="347472"/>
           </a:xfrm>
           <a:prstGeom prst="rect">
             <a:avLst/>
@@ -8708,34 +9077,34 @@
           <a:bodyPr wrap="square" rtlCol="0" anchor="ctr"/>
           <a:lstStyle/>
           <a:p>
-            <a:pPr algn="ctr" indent="0" marL="0">
+            <a:pPr marL="0" indent="0">
               <a:buNone/>
             </a:pPr>
             <a:r>
-              <a:rPr lang="en-US" sz="1100" b="1" dirty="0">
-                <a:solidFill>
-                  <a:srgbClr val="6B1E3C"/>
+              <a:rPr lang="en-US" sz="1350" b="1">
+                <a:solidFill>
+                  <a:srgbClr val="1A1A1A"/>
                 </a:solidFill>
                 <a:latin typeface="Calibri" pitchFamily="34" charset="0"/>
                 <a:ea typeface="Calibri" pitchFamily="34" charset="-122"/>
                 <a:cs typeface="Calibri" pitchFamily="34" charset="-120"/>
               </a:rPr>
-              <a:t>B</a:t>
-            </a:r>
-            <a:endParaRPr lang="en-US" sz="1100" dirty="0"/>
+              <a:t>Training Strategy</a:t>
+            </a:r>
+            <a:endParaRPr lang="en-US" sz="1350"/>
           </a:p>
         </p:txBody>
       </p:sp>
       <p:sp>
         <p:nvSpPr>
-          <p:cNvPr id="14" name="Text 12"/>
-          <p:cNvSpPr/>
-          <p:nvPr/>
-        </p:nvSpPr>
-        <p:spPr>
-          <a:xfrm>
-            <a:off x="5166360" y="896112"/>
-            <a:ext cx="3703320" cy="347472"/>
+          <p:cNvPr id="21" name="Text 19"/>
+          <p:cNvSpPr/>
+          <p:nvPr/>
+        </p:nvSpPr>
+        <p:spPr>
+          <a:xfrm>
+            <a:off x="678566" y="1269598"/>
+            <a:ext cx="3703320" cy="1417320"/>
           </a:xfrm>
           <a:prstGeom prst="rect">
             <a:avLst/>
@@ -8744,67 +9113,43 @@
           <a:ln/>
         </p:spPr>
         <p:txBody>
-          <a:bodyPr wrap="square" rtlCol="0" anchor="ctr"/>
+          <a:bodyPr wrap="square" lIns="91440" tIns="45720" rIns="91440" bIns="45720" rtlCol="0" anchor="ctr"/>
           <a:lstStyle/>
           <a:p>
-            <a:pPr indent="0" marL="0">
-              <a:buNone/>
+            <a:pPr>
+              <a:spcAft>
+                <a:spcPts val="400"/>
+              </a:spcAft>
+              <a:buSzPct val="100000"/>
             </a:pPr>
-            <a:r>
-              <a:rPr lang="en-US" sz="1350" b="1" dirty="0">
-                <a:solidFill>
-                  <a:srgbClr val="1A1A1A"/>
-                </a:solidFill>
-                <a:latin typeface="Calibri" pitchFamily="34" charset="0"/>
-                <a:ea typeface="Calibri" pitchFamily="34" charset="-122"/>
-                <a:cs typeface="Calibri" pitchFamily="34" charset="-120"/>
-              </a:rPr>
-              <a:t>Model Architecture</a:t>
-            </a:r>
-            <a:endParaRPr lang="en-US" sz="1350" dirty="0"/>
-          </a:p>
-        </p:txBody>
-      </p:sp>
-      <p:sp>
-        <p:nvSpPr>
-          <p:cNvPr id="15" name="Text 13"/>
-          <p:cNvSpPr/>
-          <p:nvPr/>
-        </p:nvSpPr>
-        <p:spPr>
-          <a:xfrm>
-            <a:off x="5166360" y="1280160"/>
-            <a:ext cx="3703320" cy="1417320"/>
-          </a:xfrm>
-          <a:prstGeom prst="rect">
-            <a:avLst/>
-          </a:prstGeom>
-          <a:noFill/>
-          <a:ln/>
-        </p:spPr>
-        <p:txBody>
-          <a:bodyPr wrap="square" rtlCol="0" anchor="ctr"/>
-          <a:lstStyle/>
+            <a:endParaRPr lang="en-US" sz="1200" dirty="0">
+              <a:solidFill>
+                <a:srgbClr val="5A5A5A"/>
+              </a:solidFill>
+              <a:latin typeface="Calibri"/>
+              <a:ea typeface="Calibri"/>
+              <a:cs typeface="Calibri"/>
+            </a:endParaRPr>
+          </a:p>
           <a:p>
             <a:pPr marL="342900" indent="-342900">
               <a:spcAft>
                 <a:spcPts val="400"/>
               </a:spcAft>
               <a:buSzPct val="100000"/>
+              <a:buFont typeface="Arial"/>
               <a:buChar char="•"/>
             </a:pPr>
             <a:r>
-              <a:rPr lang="en-US" sz="1200" dirty="0">
+              <a:rPr lang="en-US" sz="1200">
                 <a:solidFill>
                   <a:srgbClr val="5A5A5A"/>
                 </a:solidFill>
-                <a:latin typeface="Calibri" pitchFamily="34" charset="0"/>
-                <a:ea typeface="Calibri" pitchFamily="34" charset="-122"/>
-                <a:cs typeface="Calibri" pitchFamily="34" charset="-120"/>
-              </a:rPr>
-              <a:t>Transition to 2.5D: stack 3 adjacent slices as input channels</a:t>
-            </a:r>
-            <a:endParaRPr lang="en-US" sz="1200" dirty="0"/>
+                <a:ea typeface="+mn-lt"/>
+                <a:cs typeface="+mn-lt"/>
+              </a:rPr>
+              <a:t>Compute per-class loss before averaging for per class weighting based on frequency in slices</a:t>
+            </a:r>
           </a:p>
           <a:p>
             <a:pPr marL="342900" indent="-342900">
@@ -8812,32 +9157,95 @@
                 <a:spcPts val="400"/>
               </a:spcAft>
               <a:buSzPct val="100000"/>
+              <a:buFont typeface="Arial"/>
               <a:buChar char="•"/>
             </a:pPr>
             <a:r>
+              <a:rPr lang="en-US" sz="1200">
+                <a:solidFill>
+                  <a:srgbClr val="5A5A5A"/>
+                </a:solidFill>
+                <a:ea typeface="+mn-lt"/>
+                <a:cs typeface="+mn-lt"/>
+              </a:rPr>
+              <a:t>Run a 5 slice 2.5D for depth comparisons</a:t>
+            </a:r>
+            <a:endParaRPr lang="en-US" sz="1200" dirty="0">
+              <a:solidFill>
+                <a:srgbClr val="5A5A5A"/>
+              </a:solidFill>
+              <a:ea typeface="+mn-lt"/>
+              <a:cs typeface="+mn-lt"/>
+            </a:endParaRPr>
+          </a:p>
+          <a:p>
+            <a:pPr marL="342900" indent="-342900">
+              <a:spcAft>
+                <a:spcPts val="400"/>
+              </a:spcAft>
+              <a:buSzPct val="100000"/>
+              <a:buFont typeface="Arial"/>
+              <a:buChar char="•"/>
+            </a:pPr>
+            <a:r>
               <a:rPr lang="en-US" sz="1200" dirty="0">
                 <a:solidFill>
                   <a:srgbClr val="5A5A5A"/>
                 </a:solidFill>
-                <a:latin typeface="Calibri" pitchFamily="34" charset="0"/>
-                <a:ea typeface="Calibri" pitchFamily="34" charset="-122"/>
-                <a:cs typeface="Calibri" pitchFamily="34" charset="-120"/>
-              </a:rPr>
-              <a:t>Swap backbone to EfficientNet-B5 for richer feature maps</a:t>
-            </a:r>
-            <a:endParaRPr lang="en-US" sz="1200" dirty="0"/>
+                <a:ea typeface="+mn-lt"/>
+                <a:cs typeface="+mn-lt"/>
+              </a:rPr>
+              <a:t>Increase number of workers from 2 – 4+ for </a:t>
+            </a:r>
+            <a:r>
+              <a:rPr lang="en-US" sz="1200" dirty="0" err="1">
+                <a:solidFill>
+                  <a:srgbClr val="5A5A5A"/>
+                </a:solidFill>
+                <a:ea typeface="+mn-lt"/>
+                <a:cs typeface="+mn-lt"/>
+              </a:rPr>
+              <a:t>gpu</a:t>
+            </a:r>
+            <a:r>
+              <a:rPr lang="en-US" sz="1200" dirty="0">
+                <a:solidFill>
+                  <a:srgbClr val="5A5A5A"/>
+                </a:solidFill>
+                <a:ea typeface="+mn-lt"/>
+                <a:cs typeface="+mn-lt"/>
+              </a:rPr>
+              <a:t> optimization</a:t>
+            </a:r>
+          </a:p>
+          <a:p>
+            <a:pPr marL="342900" indent="-342900">
+              <a:spcAft>
+                <a:spcPts val="400"/>
+              </a:spcAft>
+              <a:buSzPct val="100000"/>
+              <a:buFont typeface="Arial"/>
+              <a:buChar char="•"/>
+            </a:pPr>
+            <a:endParaRPr lang="en-US" sz="1200" dirty="0">
+              <a:solidFill>
+                <a:srgbClr val="5A5A5A"/>
+              </a:solidFill>
+              <a:ea typeface="+mn-lt"/>
+              <a:cs typeface="+mn-lt"/>
+            </a:endParaRPr>
           </a:p>
         </p:txBody>
       </p:sp>
       <p:sp>
         <p:nvSpPr>
-          <p:cNvPr id="16" name="Shape 14"/>
-          <p:cNvSpPr/>
-          <p:nvPr/>
-        </p:nvSpPr>
-        <p:spPr>
-          <a:xfrm>
-            <a:off x="228600" y="2971800"/>
+          <p:cNvPr id="22" name="Shape 20"/>
+          <p:cNvSpPr/>
+          <p:nvPr/>
+        </p:nvSpPr>
+        <p:spPr>
+          <a:xfrm>
+            <a:off x="223970" y="2964566"/>
             <a:ext cx="4251960" cy="1965960"/>
           </a:xfrm>
           <a:prstGeom prst="rect">
@@ -8853,7 +9261,7 @@
             <a:prstDash val="solid"/>
           </a:ln>
           <a:effectLst>
-            <a:outerShdw sx="100000" sy="100000" kx="0" ky="0" algn="bl" rotWithShape="0" blurRad="101600" dist="38100" dir="8100000">
+            <a:outerShdw blurRad="101600" dist="38100" dir="8100000" algn="bl" rotWithShape="0">
               <a:srgbClr val="000000">
                 <a:alpha val="12000"/>
               </a:srgbClr>
@@ -8863,24 +9271,24 @@
       </p:sp>
       <p:sp>
         <p:nvSpPr>
-          <p:cNvPr id="17" name="Shape 15"/>
-          <p:cNvSpPr/>
-          <p:nvPr/>
-        </p:nvSpPr>
-        <p:spPr>
-          <a:xfrm>
-            <a:off x="228600" y="2971800"/>
+          <p:cNvPr id="23" name="Shape 21"/>
+          <p:cNvSpPr/>
+          <p:nvPr/>
+        </p:nvSpPr>
+        <p:spPr>
+          <a:xfrm>
+            <a:off x="223970" y="2964566"/>
             <a:ext cx="329184" cy="1965960"/>
           </a:xfrm>
           <a:prstGeom prst="rect">
             <a:avLst/>
           </a:prstGeom>
           <a:solidFill>
-            <a:srgbClr val="2D6A4F"/>
+            <a:srgbClr val="7B2D8B"/>
           </a:solidFill>
           <a:ln w="12700">
             <a:solidFill>
-              <a:srgbClr val="2D6A4F"/>
+              <a:srgbClr val="7B2D8B"/>
             </a:solidFill>
             <a:prstDash val="solid"/>
           </a:ln>
@@ -8888,13 +9296,13 @@
       </p:sp>
       <p:sp>
         <p:nvSpPr>
-          <p:cNvPr id="18" name="Shape 16"/>
-          <p:cNvSpPr/>
-          <p:nvPr/>
-        </p:nvSpPr>
-        <p:spPr>
-          <a:xfrm>
-            <a:off x="274320" y="3017520"/>
+          <p:cNvPr id="24" name="Shape 22"/>
+          <p:cNvSpPr/>
+          <p:nvPr/>
+        </p:nvSpPr>
+        <p:spPr>
+          <a:xfrm>
+            <a:off x="269690" y="3010286"/>
             <a:ext cx="237744" cy="237744"/>
           </a:xfrm>
           <a:prstGeom prst="rect">
@@ -8913,14 +9321,53 @@
       </p:sp>
       <p:sp>
         <p:nvSpPr>
-          <p:cNvPr id="19" name="Text 17"/>
-          <p:cNvSpPr/>
-          <p:nvPr/>
-        </p:nvSpPr>
-        <p:spPr>
-          <a:xfrm>
-            <a:off x="265176" y="3008376"/>
+          <p:cNvPr id="25" name="Text 23"/>
+          <p:cNvSpPr/>
+          <p:nvPr/>
+        </p:nvSpPr>
+        <p:spPr>
+          <a:xfrm>
+            <a:off x="260546" y="3001142"/>
             <a:ext cx="256032" cy="256032"/>
+          </a:xfrm>
+          <a:prstGeom prst="rect">
+            <a:avLst/>
+          </a:prstGeom>
+          <a:noFill/>
+          <a:ln/>
+        </p:spPr>
+        <p:txBody>
+          <a:bodyPr wrap="square" lIns="91440" tIns="45720" rIns="91440" bIns="45720" rtlCol="0" anchor="ctr"/>
+          <a:lstStyle/>
+          <a:p>
+            <a:pPr marL="0" indent="0" algn="ctr">
+              <a:buNone/>
+            </a:pPr>
+            <a:r>
+              <a:rPr lang="en-US" sz="1100" b="1">
+                <a:solidFill>
+                  <a:srgbClr val="7B2D8B"/>
+                </a:solidFill>
+                <a:latin typeface="Calibri"/>
+                <a:ea typeface="Calibri"/>
+                <a:cs typeface="Calibri"/>
+              </a:rPr>
+              <a:t>C</a:t>
+            </a:r>
+            <a:endParaRPr lang="en-US" sz="1100"/>
+          </a:p>
+        </p:txBody>
+      </p:sp>
+      <p:sp>
+        <p:nvSpPr>
+          <p:cNvPr id="26" name="Text 24"/>
+          <p:cNvSpPr/>
+          <p:nvPr/>
+        </p:nvSpPr>
+        <p:spPr>
+          <a:xfrm>
+            <a:off x="681170" y="3037718"/>
+            <a:ext cx="3703320" cy="347472"/>
           </a:xfrm>
           <a:prstGeom prst="rect">
             <a:avLst/>
@@ -8932,72 +9379,33 @@
           <a:bodyPr wrap="square" rtlCol="0" anchor="ctr"/>
           <a:lstStyle/>
           <a:p>
-            <a:pPr algn="ctr" indent="0" marL="0">
+            <a:pPr marL="0" indent="0">
               <a:buNone/>
             </a:pPr>
             <a:r>
-              <a:rPr lang="en-US" sz="1100" b="1" dirty="0">
-                <a:solidFill>
-                  <a:srgbClr val="2D6A4F"/>
+              <a:rPr lang="en-US" sz="1350" b="1">
+                <a:solidFill>
+                  <a:srgbClr val="1A1A1A"/>
                 </a:solidFill>
                 <a:latin typeface="Calibri" pitchFamily="34" charset="0"/>
                 <a:ea typeface="Calibri" pitchFamily="34" charset="-122"/>
                 <a:cs typeface="Calibri" pitchFamily="34" charset="-120"/>
               </a:rPr>
-              <a:t>C</a:t>
-            </a:r>
-            <a:endParaRPr lang="en-US" sz="1100" dirty="0"/>
+              <a:t>Data Augmentation</a:t>
+            </a:r>
+            <a:endParaRPr lang="en-US" sz="1350"/>
           </a:p>
         </p:txBody>
       </p:sp>
       <p:sp>
         <p:nvSpPr>
-          <p:cNvPr id="20" name="Text 18"/>
-          <p:cNvSpPr/>
-          <p:nvPr/>
-        </p:nvSpPr>
-        <p:spPr>
-          <a:xfrm>
-            <a:off x="685800" y="3044952"/>
-            <a:ext cx="3703320" cy="347472"/>
-          </a:xfrm>
-          <a:prstGeom prst="rect">
-            <a:avLst/>
-          </a:prstGeom>
-          <a:noFill/>
-          <a:ln/>
-        </p:spPr>
-        <p:txBody>
-          <a:bodyPr wrap="square" rtlCol="0" anchor="ctr"/>
-          <a:lstStyle/>
-          <a:p>
-            <a:pPr indent="0" marL="0">
-              <a:buNone/>
-            </a:pPr>
-            <a:r>
-              <a:rPr lang="en-US" sz="1350" b="1" dirty="0">
-                <a:solidFill>
-                  <a:srgbClr val="1A1A1A"/>
-                </a:solidFill>
-                <a:latin typeface="Calibri" pitchFamily="34" charset="0"/>
-                <a:ea typeface="Calibri" pitchFamily="34" charset="-122"/>
-                <a:cs typeface="Calibri" pitchFamily="34" charset="-120"/>
-              </a:rPr>
-              <a:t>Training Strategy</a:t>
-            </a:r>
-            <a:endParaRPr lang="en-US" sz="1350" dirty="0"/>
-          </a:p>
-        </p:txBody>
-      </p:sp>
-      <p:sp>
-        <p:nvSpPr>
-          <p:cNvPr id="21" name="Text 19"/>
-          <p:cNvSpPr/>
-          <p:nvPr/>
-        </p:nvSpPr>
-        <p:spPr>
-          <a:xfrm>
-            <a:off x="685800" y="3429000"/>
+          <p:cNvPr id="27" name="Text 25"/>
+          <p:cNvSpPr/>
+          <p:nvPr/>
+        </p:nvSpPr>
+        <p:spPr>
+          <a:xfrm>
+            <a:off x="681170" y="3421766"/>
             <a:ext cx="3703320" cy="1417320"/>
           </a:xfrm>
           <a:prstGeom prst="rect">
@@ -9018,7 +9426,7 @@
               <a:buChar char="•"/>
             </a:pPr>
             <a:r>
-              <a:rPr lang="en-US" sz="1200" dirty="0">
+              <a:rPr lang="en-US" sz="1200">
                 <a:solidFill>
                   <a:srgbClr val="5A5A5A"/>
                 </a:solidFill>
@@ -9026,9 +9434,9 @@
                 <a:ea typeface="Calibri" pitchFamily="34" charset="-122"/>
                 <a:cs typeface="Calibri" pitchFamily="34" charset="-120"/>
               </a:rPr>
-              <a:t>Add Dice Loss component: Combined BCE + Dice (weighted 50/50)</a:t>
-            </a:r>
-            <a:endParaRPr lang="en-US" sz="1200" dirty="0"/>
+              <a:t>Elastic Transform + Grid Distortion to simulate organ deformation</a:t>
+            </a:r>
+            <a:endParaRPr lang="en-US" sz="1200"/>
           </a:p>
           <a:p>
             <a:pPr marL="342900" indent="-342900">
@@ -9039,7 +9447,7 @@
               <a:buChar char="•"/>
             </a:pPr>
             <a:r>
-              <a:rPr lang="en-US" sz="1200" dirty="0">
+              <a:rPr lang="en-US" sz="1200">
                 <a:solidFill>
                   <a:srgbClr val="5A5A5A"/>
                 </a:solidFill>
@@ -9047,21 +9455,27 @@
                 <a:ea typeface="Calibri" pitchFamily="34" charset="-122"/>
                 <a:cs typeface="Calibri" pitchFamily="34" charset="-120"/>
               </a:rPr>
-              <a:t>Use weighted sampling to address empty-slice imbalance</a:t>
-            </a:r>
-            <a:endParaRPr lang="en-US" sz="1200" dirty="0"/>
+              <a:t>Random ROI cropping focused on non-zero mask regions</a:t>
+            </a:r>
+            <a:endParaRPr lang="en-US" sz="1200"/>
           </a:p>
         </p:txBody>
       </p:sp>
       <p:sp>
         <p:nvSpPr>
-          <p:cNvPr id="22" name="Shape 20"/>
-          <p:cNvSpPr/>
-          <p:nvPr/>
-        </p:nvSpPr>
-        <p:spPr>
-          <a:xfrm>
-            <a:off x="4709160" y="2971800"/>
+          <p:cNvPr id="28" name="Shape 20">
+            <a:extLst>
+              <a:ext uri="{FF2B5EF4-FFF2-40B4-BE49-F238E27FC236}">
+                <a16:creationId xmlns:a16="http://schemas.microsoft.com/office/drawing/2014/main" id="{E3CFEF1B-A894-AC60-F0C6-CF82AAFD2AD1}"/>
+              </a:ext>
+            </a:extLst>
+          </p:cNvPr>
+          <p:cNvSpPr/>
+          <p:nvPr/>
+        </p:nvSpPr>
+        <p:spPr>
+          <a:xfrm>
+            <a:off x="4720011" y="2950097"/>
             <a:ext cx="4251960" cy="1965960"/>
           </a:xfrm>
           <a:prstGeom prst="rect">
@@ -9077,7 +9491,7 @@
             <a:prstDash val="solid"/>
           </a:ln>
           <a:effectLst>
-            <a:outerShdw sx="100000" sy="100000" kx="0" ky="0" algn="bl" rotWithShape="0" blurRad="101600" dist="38100" dir="8100000">
+            <a:outerShdw blurRad="101600" dist="38100" dir="8100000" algn="bl" rotWithShape="0">
               <a:srgbClr val="000000">
                 <a:alpha val="12000"/>
               </a:srgbClr>
@@ -9087,20 +9501,26 @@
       </p:sp>
       <p:sp>
         <p:nvSpPr>
-          <p:cNvPr id="23" name="Shape 21"/>
-          <p:cNvSpPr/>
-          <p:nvPr/>
-        </p:nvSpPr>
-        <p:spPr>
-          <a:xfrm>
-            <a:off x="4709160" y="2971800"/>
+          <p:cNvPr id="29" name="Shape 21">
+            <a:extLst>
+              <a:ext uri="{FF2B5EF4-FFF2-40B4-BE49-F238E27FC236}">
+                <a16:creationId xmlns:a16="http://schemas.microsoft.com/office/drawing/2014/main" id="{7997B4FD-E860-A054-C2F8-286E852551F7}"/>
+              </a:ext>
+            </a:extLst>
+          </p:cNvPr>
+          <p:cNvSpPr/>
+          <p:nvPr/>
+        </p:nvSpPr>
+        <p:spPr>
+          <a:xfrm>
+            <a:off x="4720011" y="2950097"/>
             <a:ext cx="329184" cy="1965960"/>
           </a:xfrm>
           <a:prstGeom prst="rect">
             <a:avLst/>
           </a:prstGeom>
           <a:solidFill>
-            <a:srgbClr val="7B2D8B"/>
+            <a:srgbClr val="ED7D31"/>
           </a:solidFill>
           <a:ln w="12700">
             <a:solidFill>
@@ -9112,13 +9532,19 @@
       </p:sp>
       <p:sp>
         <p:nvSpPr>
-          <p:cNvPr id="24" name="Shape 22"/>
-          <p:cNvSpPr/>
-          <p:nvPr/>
-        </p:nvSpPr>
-        <p:spPr>
-          <a:xfrm>
-            <a:off x="4754880" y="3017520"/>
+          <p:cNvPr id="30" name="Shape 22">
+            <a:extLst>
+              <a:ext uri="{FF2B5EF4-FFF2-40B4-BE49-F238E27FC236}">
+                <a16:creationId xmlns:a16="http://schemas.microsoft.com/office/drawing/2014/main" id="{C16EF2AA-D84B-E2A9-08A4-EE8C901A98F8}"/>
+              </a:ext>
+            </a:extLst>
+          </p:cNvPr>
+          <p:cNvSpPr/>
+          <p:nvPr/>
+        </p:nvSpPr>
+        <p:spPr>
+          <a:xfrm>
+            <a:off x="4765731" y="2995817"/>
             <a:ext cx="237744" cy="237744"/>
           </a:xfrm>
           <a:prstGeom prst="rect">
@@ -9137,13 +9563,19 @@
       </p:sp>
       <p:sp>
         <p:nvSpPr>
-          <p:cNvPr id="25" name="Text 23"/>
-          <p:cNvSpPr/>
-          <p:nvPr/>
-        </p:nvSpPr>
-        <p:spPr>
-          <a:xfrm>
-            <a:off x="4745736" y="3008376"/>
+          <p:cNvPr id="31" name="Text 23">
+            <a:extLst>
+              <a:ext uri="{FF2B5EF4-FFF2-40B4-BE49-F238E27FC236}">
+                <a16:creationId xmlns:a16="http://schemas.microsoft.com/office/drawing/2014/main" id="{28AF53A0-3842-7175-E197-6FB8A8C451E2}"/>
+              </a:ext>
+            </a:extLst>
+          </p:cNvPr>
+          <p:cNvSpPr/>
+          <p:nvPr/>
+        </p:nvSpPr>
+        <p:spPr>
+          <a:xfrm>
+            <a:off x="4756587" y="2986673"/>
             <a:ext cx="256032" cy="256032"/>
           </a:xfrm>
           <a:prstGeom prst="rect">
@@ -9153,36 +9585,42 @@
           <a:ln/>
         </p:spPr>
         <p:txBody>
-          <a:bodyPr wrap="square" rtlCol="0" anchor="ctr"/>
+          <a:bodyPr wrap="square" lIns="91440" tIns="45720" rIns="91440" bIns="45720" rtlCol="0" anchor="ctr"/>
           <a:lstStyle/>
           <a:p>
-            <a:pPr algn="ctr" indent="0" marL="0">
+            <a:pPr marL="0" indent="0" algn="ctr">
               <a:buNone/>
             </a:pPr>
             <a:r>
-              <a:rPr lang="en-US" sz="1100" b="1" dirty="0">
+              <a:rPr lang="en-US" sz="1100" b="1">
                 <a:solidFill>
                   <a:srgbClr val="7B2D8B"/>
                 </a:solidFill>
-                <a:latin typeface="Calibri" pitchFamily="34" charset="0"/>
-                <a:ea typeface="Calibri" pitchFamily="34" charset="-122"/>
-                <a:cs typeface="Calibri" pitchFamily="34" charset="-120"/>
-              </a:rPr>
-              <a:t>D</a:t>
-            </a:r>
-            <a:endParaRPr lang="en-US" sz="1100" dirty="0"/>
+                <a:latin typeface="Calibri"/>
+                <a:ea typeface="Calibri"/>
+                <a:cs typeface="Calibri"/>
+              </a:rPr>
+              <a:t>C</a:t>
+            </a:r>
+            <a:endParaRPr lang="en-US" sz="1100"/>
           </a:p>
         </p:txBody>
       </p:sp>
       <p:sp>
         <p:nvSpPr>
-          <p:cNvPr id="26" name="Text 24"/>
-          <p:cNvSpPr/>
-          <p:nvPr/>
-        </p:nvSpPr>
-        <p:spPr>
-          <a:xfrm>
-            <a:off x="5166360" y="3044952"/>
+          <p:cNvPr id="32" name="Text 24">
+            <a:extLst>
+              <a:ext uri="{FF2B5EF4-FFF2-40B4-BE49-F238E27FC236}">
+                <a16:creationId xmlns:a16="http://schemas.microsoft.com/office/drawing/2014/main" id="{94AE2813-0F11-B245-A46C-222EDFA74464}"/>
+              </a:ext>
+            </a:extLst>
+          </p:cNvPr>
+          <p:cNvSpPr/>
+          <p:nvPr/>
+        </p:nvSpPr>
+        <p:spPr>
+          <a:xfrm>
+            <a:off x="5177211" y="3023249"/>
             <a:ext cx="3703320" cy="347472"/>
           </a:xfrm>
           <a:prstGeom prst="rect">
@@ -9192,36 +9630,39 @@
           <a:ln/>
         </p:spPr>
         <p:txBody>
-          <a:bodyPr wrap="square" rtlCol="0" anchor="ctr"/>
+          <a:bodyPr wrap="square" lIns="91440" tIns="45720" rIns="91440" bIns="45720" rtlCol="0" anchor="ctr"/>
           <a:lstStyle/>
           <a:p>
-            <a:pPr indent="0" marL="0">
-              <a:buNone/>
-            </a:pPr>
-            <a:r>
-              <a:rPr lang="en-US" sz="1350" b="1" dirty="0">
+            <a:r>
+              <a:rPr lang="en-US" sz="1350" b="1">
                 <a:solidFill>
                   <a:srgbClr val="1A1A1A"/>
                 </a:solidFill>
-                <a:latin typeface="Calibri" pitchFamily="34" charset="0"/>
-                <a:ea typeface="Calibri" pitchFamily="34" charset="-122"/>
-                <a:cs typeface="Calibri" pitchFamily="34" charset="-120"/>
-              </a:rPr>
-              <a:t>Data Augmentation</a:t>
-            </a:r>
-            <a:endParaRPr lang="en-US" sz="1350" dirty="0"/>
+                <a:latin typeface="Calibri"/>
+                <a:ea typeface="Calibri"/>
+                <a:cs typeface="Calibri"/>
+              </a:rPr>
+              <a:t>Quality of Life</a:t>
+            </a:r>
+            <a:endParaRPr lang="en-US"/>
           </a:p>
         </p:txBody>
       </p:sp>
       <p:sp>
         <p:nvSpPr>
-          <p:cNvPr id="27" name="Text 25"/>
-          <p:cNvSpPr/>
-          <p:nvPr/>
-        </p:nvSpPr>
-        <p:spPr>
-          <a:xfrm>
-            <a:off x="5166360" y="3429000"/>
+          <p:cNvPr id="33" name="Text 25">
+            <a:extLst>
+              <a:ext uri="{FF2B5EF4-FFF2-40B4-BE49-F238E27FC236}">
+                <a16:creationId xmlns:a16="http://schemas.microsoft.com/office/drawing/2014/main" id="{FA680C14-AD98-4630-C966-201639549823}"/>
+              </a:ext>
+            </a:extLst>
+          </p:cNvPr>
+          <p:cNvSpPr/>
+          <p:nvPr/>
+        </p:nvSpPr>
+        <p:spPr>
+          <a:xfrm>
+            <a:off x="5177211" y="3407297"/>
             <a:ext cx="3703320" cy="1417320"/>
           </a:xfrm>
           <a:prstGeom prst="rect">
@@ -9231,8 +9672,87 @@
           <a:ln/>
         </p:spPr>
         <p:txBody>
-          <a:bodyPr wrap="square" rtlCol="0" anchor="ctr"/>
+          <a:bodyPr wrap="square" lIns="91440" tIns="45720" rIns="91440" bIns="45720" rtlCol="0" anchor="ctr"/>
           <a:lstStyle/>
+          <a:p>
+            <a:pPr marL="342900" indent="-342900">
+              <a:spcAft>
+                <a:spcPts val="400"/>
+              </a:spcAft>
+              <a:buSzPct val="100000"/>
+              <a:buFont typeface="Arial"/>
+              <a:buChar char="•"/>
+            </a:pPr>
+            <a:r>
+              <a:rPr lang="en-US" sz="1200" dirty="0">
+                <a:solidFill>
+                  <a:srgbClr val="5A5A5A"/>
+                </a:solidFill>
+                <a:latin typeface="Calibri"/>
+                <a:ea typeface="Calibri"/>
+                <a:cs typeface="Calibri"/>
+              </a:rPr>
+              <a:t>Automation of Setup process for reproducibility and </a:t>
+            </a:r>
+            <a:r>
+              <a:rPr lang="en-US" sz="1200">
+                <a:solidFill>
+                  <a:srgbClr val="5A5A5A"/>
+                </a:solidFill>
+                <a:latin typeface="Calibri"/>
+                <a:ea typeface="Calibri"/>
+                <a:cs typeface="Calibri"/>
+              </a:rPr>
+              <a:t>parallelization</a:t>
+            </a:r>
+            <a:endParaRPr lang="en-US" sz="1200" dirty="0">
+              <a:ea typeface="Calibri"/>
+              <a:cs typeface="Calibri"/>
+            </a:endParaRPr>
+          </a:p>
+          <a:p>
+            <a:pPr marL="342900" indent="-342900">
+              <a:spcAft>
+                <a:spcPts val="400"/>
+              </a:spcAft>
+              <a:buSzPct val="100000"/>
+              <a:buFont typeface="Arial"/>
+              <a:buChar char="•"/>
+            </a:pPr>
+            <a:r>
+              <a:rPr lang="en-US" sz="1200" dirty="0">
+                <a:solidFill>
+                  <a:srgbClr val="5A5A5A"/>
+                </a:solidFill>
+                <a:latin typeface="Calibri"/>
+                <a:ea typeface="Calibri"/>
+                <a:cs typeface="Calibri"/>
+              </a:rPr>
+              <a:t>Set up </a:t>
+            </a:r>
+            <a:r>
+              <a:rPr lang="en-US" sz="1200" dirty="0" err="1">
+                <a:solidFill>
+                  <a:srgbClr val="5A5A5A"/>
+                </a:solidFill>
+                <a:latin typeface="Calibri"/>
+                <a:ea typeface="Calibri"/>
+                <a:cs typeface="Calibri"/>
+              </a:rPr>
+              <a:t>Tensorboard</a:t>
+            </a:r>
+            <a:r>
+              <a:rPr lang="en-US" sz="1200" dirty="0">
+                <a:solidFill>
+                  <a:srgbClr val="5A5A5A"/>
+                </a:solidFill>
+                <a:latin typeface="Calibri"/>
+                <a:ea typeface="Calibri"/>
+                <a:cs typeface="Calibri"/>
+              </a:rPr>
+              <a:t> for visualizations during and post training</a:t>
+            </a:r>
+          </a:p>
           <a:p>
             <a:pPr marL="342900" indent="-342900">
               <a:spcAft>
@@ -9246,34 +9766,83 @@
                 <a:solidFill>
                   <a:srgbClr val="5A5A5A"/>
                 </a:solidFill>
-                <a:latin typeface="Calibri" pitchFamily="34" charset="0"/>
-                <a:ea typeface="Calibri" pitchFamily="34" charset="-122"/>
-                <a:cs typeface="Calibri" pitchFamily="34" charset="-120"/>
-              </a:rPr>
-              <a:t>Elastic Transform + Grid Distortion to simulate organ deformation</a:t>
-            </a:r>
-            <a:endParaRPr lang="en-US" sz="1200" dirty="0"/>
-          </a:p>
-          <a:p>
-            <a:pPr marL="342900" indent="-342900">
-              <a:spcAft>
-                <a:spcPts val="400"/>
-              </a:spcAft>
-              <a:buSzPct val="100000"/>
-              <a:buChar char="•"/>
-            </a:pPr>
+                <a:latin typeface="Calibri"/>
+                <a:ea typeface="Calibri"/>
+                <a:cs typeface="Calibri"/>
+              </a:rPr>
+              <a:t>Checkpointing and </a:t>
+            </a:r>
+            <a:r>
+              <a:rPr lang="en-US" sz="1200" dirty="0" err="1">
+                <a:solidFill>
+                  <a:srgbClr val="5A5A5A"/>
+                </a:solidFill>
+                <a:latin typeface="Calibri"/>
+                <a:ea typeface="Calibri"/>
+                <a:cs typeface="Calibri"/>
+              </a:rPr>
+              <a:t>tmux</a:t>
+            </a:r>
             <a:r>
               <a:rPr lang="en-US" sz="1200" dirty="0">
                 <a:solidFill>
                   <a:srgbClr val="5A5A5A"/>
                 </a:solidFill>
-                <a:latin typeface="Calibri" pitchFamily="34" charset="0"/>
-                <a:ea typeface="Calibri" pitchFamily="34" charset="-122"/>
-                <a:cs typeface="Calibri" pitchFamily="34" charset="-120"/>
-              </a:rPr>
-              <a:t>Random ROI cropping focused on non-zero mask regions</a:t>
-            </a:r>
-            <a:endParaRPr lang="en-US" sz="1200" dirty="0"/>
+                <a:latin typeface="Calibri"/>
+                <a:ea typeface="Calibri"/>
+                <a:cs typeface="Calibri"/>
+              </a:rPr>
+              <a:t> for crashing &amp; internet connectivity measures</a:t>
+            </a:r>
+            <a:endParaRPr lang="en-US" sz="1200" dirty="0">
+              <a:solidFill>
+                <a:srgbClr val="5A5A5A"/>
+              </a:solidFill>
+              <a:ea typeface="Calibri"/>
+              <a:cs typeface="Calibri"/>
+            </a:endParaRPr>
+          </a:p>
+        </p:txBody>
+      </p:sp>
+      <p:sp>
+        <p:nvSpPr>
+          <p:cNvPr id="36" name="TextBox 35">
+            <a:extLst>
+              <a:ext uri="{FF2B5EF4-FFF2-40B4-BE49-F238E27FC236}">
+                <a16:creationId xmlns:a16="http://schemas.microsoft.com/office/drawing/2014/main" id="{A52B9ED6-7AB0-4865-222B-1458E0BD8D6B}"/>
+              </a:ext>
+            </a:extLst>
+          </p:cNvPr>
+          <p:cNvSpPr txBox="1"/>
+          <p:nvPr/>
+        </p:nvSpPr>
+        <p:spPr>
+          <a:xfrm>
+            <a:off x="8877586" y="4898571"/>
+            <a:ext cx="163285" cy="246221"/>
+          </a:xfrm>
+          <a:prstGeom prst="rect">
+            <a:avLst/>
+          </a:prstGeom>
+          <a:noFill/>
+        </p:spPr>
+        <p:txBody>
+          <a:bodyPr rot="0" spcFirstLastPara="0" vertOverflow="overflow" horzOverflow="overflow" vert="horz" wrap="square" lIns="91440" tIns="45720" rIns="91440" bIns="45720" numCol="1" spcCol="0" rtlCol="0" fromWordArt="0" anchor="t" anchorCtr="0" forceAA="0" compatLnSpc="1">
+            <a:prstTxWarp prst="textNoShape">
+              <a:avLst/>
+            </a:prstTxWarp>
+            <a:spAutoFit/>
+          </a:bodyPr>
+          <a:lstStyle/>
+          <a:p>
+            <a:pPr algn="l"/>
+            <a:r>
+              <a:rPr lang="en-US" sz="1000">
+                <a:ea typeface="Calibri"/>
+                <a:cs typeface="Calibri"/>
+              </a:rPr>
+              <a:t>8</a:t>
+            </a:r>
           </a:p>
         </p:txBody>
       </p:sp>
@@ -9285,19 +9854,26 @@
 </p:sld>
 </file>
 
-<file path=ppt/slides/slide8.xml><?xml version="1.0" encoding="utf-8"?>
+<file path=ppt/slides/slide9.xml><?xml version="1.0" encoding="utf-8"?>
 <p:sld xmlns:a="http://schemas.openxmlformats.org/drawingml/2006/main" xmlns:r="http://schemas.openxmlformats.org/officeDocument/2006/relationships" xmlns:p="http://schemas.openxmlformats.org/presentationml/2006/main">
-  <p:cSld name="Slide 8">
+  <p:cSld>
     <p:bg>
       <p:bgPr>
         <a:solidFill>
-          <a:srgbClr val="3D0C1F"/>
+          <a:srgbClr val="FAF7F5"/>
         </a:solidFill>
+        <a:effectLst/>
       </p:bgPr>
     </p:bg>
     <p:spTree>
       <p:nvGrpSpPr>
-        <p:cNvPr id="1" name=""/>
+        <p:cNvPr id="1" name="">
+          <a:extLst>
+            <a:ext uri="{FF2B5EF4-FFF2-40B4-BE49-F238E27FC236}">
+              <a16:creationId xmlns:a16="http://schemas.microsoft.com/office/drawing/2014/main" id="{0F977BED-A495-8E32-9EE8-3D1937971BD8}"/>
+            </a:ext>
+          </a:extLst>
+        </p:cNvPr>
         <p:cNvGrpSpPr/>
         <p:nvPr/>
       </p:nvGrpSpPr>
@@ -9311,151 +9887,20 @@
       </p:grpSpPr>
       <p:sp>
         <p:nvSpPr>
-          <p:cNvPr id="2" name="Shape 0"/>
+          <p:cNvPr id="2" name="Shape 0">
+            <a:extLst>
+              <a:ext uri="{FF2B5EF4-FFF2-40B4-BE49-F238E27FC236}">
+                <a16:creationId xmlns:a16="http://schemas.microsoft.com/office/drawing/2014/main" id="{1066AE0F-CF02-2BAD-F605-0A6011DDE54B}"/>
+              </a:ext>
+            </a:extLst>
+          </p:cNvPr>
           <p:cNvSpPr/>
           <p:nvPr/>
         </p:nvSpPr>
         <p:spPr>
           <a:xfrm>
             <a:off x="0" y="0"/>
-            <a:ext cx="9144000" cy="73152"/>
-          </a:xfrm>
-          <a:prstGeom prst="rect">
-            <a:avLst/>
-          </a:prstGeom>
-          <a:solidFill>
-            <a:srgbClr val="CEB888"/>
-          </a:solidFill>
-          <a:ln w="12700">
-            <a:solidFill>
-              <a:srgbClr val="CEB888"/>
-            </a:solidFill>
-            <a:prstDash val="solid"/>
-          </a:ln>
-        </p:spPr>
-      </p:sp>
-      <p:sp>
-        <p:nvSpPr>
-          <p:cNvPr id="3" name="Shape 1"/>
-          <p:cNvSpPr/>
-          <p:nvPr/>
-        </p:nvSpPr>
-        <p:spPr>
-          <a:xfrm>
-            <a:off x="0" y="5070348"/>
-            <a:ext cx="9144000" cy="73152"/>
-          </a:xfrm>
-          <a:prstGeom prst="rect">
-            <a:avLst/>
-          </a:prstGeom>
-          <a:solidFill>
-            <a:srgbClr val="CEB888"/>
-          </a:solidFill>
-          <a:ln w="12700">
-            <a:solidFill>
-              <a:srgbClr val="CEB888"/>
-            </a:solidFill>
-            <a:prstDash val="solid"/>
-          </a:ln>
-        </p:spPr>
-      </p:sp>
-      <p:sp>
-        <p:nvSpPr>
-          <p:cNvPr id="4" name="Text 2"/>
-          <p:cNvSpPr/>
-          <p:nvPr/>
-        </p:nvSpPr>
-        <p:spPr>
-          <a:xfrm>
-            <a:off x="457200" y="182880"/>
-            <a:ext cx="8229600" cy="502920"/>
-          </a:xfrm>
-          <a:prstGeom prst="rect">
-            <a:avLst/>
-          </a:prstGeom>
-          <a:noFill/>
-          <a:ln/>
-        </p:spPr>
-        <p:txBody>
-          <a:bodyPr wrap="square" rtlCol="0" anchor="ctr"/>
-          <a:lstStyle/>
-          <a:p>
-            <a:pPr indent="0" marL="0">
-              <a:buNone/>
-            </a:pPr>
-            <a:r>
-              <a:rPr lang="en-US" sz="2200" b="1" dirty="0">
-                <a:solidFill>
-                  <a:srgbClr val="CEB888"/>
-                </a:solidFill>
-                <a:latin typeface="Calibri" pitchFamily="34" charset="0"/>
-                <a:ea typeface="Calibri" pitchFamily="34" charset="-122"/>
-                <a:cs typeface="Calibri" pitchFamily="34" charset="-120"/>
-              </a:rPr>
-              <a:t>06  |  Final Remarks &amp; Next Steps</a:t>
-            </a:r>
-            <a:endParaRPr lang="en-US" sz="2200" dirty="0"/>
-          </a:p>
-        </p:txBody>
-      </p:sp>
-      <p:sp>
-        <p:nvSpPr>
-          <p:cNvPr id="5" name="Shape 3"/>
-          <p:cNvSpPr/>
-          <p:nvPr/>
-        </p:nvSpPr>
-        <p:spPr>
-          <a:xfrm>
-            <a:off x="274320" y="978408"/>
-            <a:ext cx="256032" cy="256032"/>
-          </a:xfrm>
-          <a:prstGeom prst="ellipse">
-            <a:avLst/>
-          </a:prstGeom>
-          <a:solidFill>
-            <a:srgbClr val="CEB888"/>
-          </a:solidFill>
-          <a:ln w="12700">
-            <a:solidFill>
-              <a:srgbClr val="CEB888"/>
-            </a:solidFill>
-            <a:prstDash val="solid"/>
-          </a:ln>
-        </p:spPr>
-      </p:sp>
-      <p:sp>
-        <p:nvSpPr>
-          <p:cNvPr id="6" name="Shape 4"/>
-          <p:cNvSpPr/>
-          <p:nvPr/>
-        </p:nvSpPr>
-        <p:spPr>
-          <a:xfrm>
-            <a:off x="402336" y="1234440"/>
-            <a:ext cx="0" cy="548640"/>
-          </a:xfrm>
-          <a:prstGeom prst="line">
-            <a:avLst/>
-          </a:prstGeom>
-          <a:noFill/>
-          <a:ln w="12700">
-            <a:solidFill>
-              <a:srgbClr val="CEB888"/>
-            </a:solidFill>
-            <a:prstDash val="sysDash"/>
-          </a:ln>
-        </p:spPr>
-      </p:sp>
-      <p:sp>
-        <p:nvSpPr>
-          <p:cNvPr id="7" name="Shape 5"/>
-          <p:cNvSpPr/>
-          <p:nvPr/>
-        </p:nvSpPr>
-        <p:spPr>
-          <a:xfrm>
-            <a:off x="685800" y="868680"/>
-            <a:ext cx="1325880" cy="475488"/>
+            <a:ext cx="9144000" cy="658368"/>
           </a:xfrm>
           <a:prstGeom prst="rect">
             <a:avLst/>
@@ -9473,14 +9918,20 @@
       </p:sp>
       <p:sp>
         <p:nvSpPr>
-          <p:cNvPr id="8" name="Text 6"/>
-          <p:cNvSpPr/>
-          <p:nvPr/>
-        </p:nvSpPr>
-        <p:spPr>
-          <a:xfrm>
-            <a:off x="685800" y="868680"/>
-            <a:ext cx="1325880" cy="475488"/>
+          <p:cNvPr id="3" name="Text 1">
+            <a:extLst>
+              <a:ext uri="{FF2B5EF4-FFF2-40B4-BE49-F238E27FC236}">
+                <a16:creationId xmlns:a16="http://schemas.microsoft.com/office/drawing/2014/main" id="{0914D0C3-4D82-565B-4E09-AD45D41383D3}"/>
+              </a:ext>
+            </a:extLst>
+          </p:cNvPr>
+          <p:cNvSpPr/>
+          <p:nvPr/>
+        </p:nvSpPr>
+        <p:spPr>
+          <a:xfrm>
+            <a:off x="365760" y="0"/>
+            <a:ext cx="8229600" cy="658368"/>
           </a:xfrm>
           <a:prstGeom prst="rect">
             <a:avLst/>
@@ -9489,661 +9940,79 @@
           <a:ln/>
         </p:spPr>
         <p:txBody>
-          <a:bodyPr wrap="square" rtlCol="0" anchor="ctr"/>
+          <a:bodyPr wrap="square" lIns="91440" tIns="45720" rIns="91440" bIns="45720" rtlCol="0" anchor="ctr"/>
           <a:lstStyle/>
           <a:p>
-            <a:pPr algn="ctr" indent="0" marL="0">
+            <a:pPr marL="0" indent="0">
               <a:buNone/>
             </a:pPr>
             <a:r>
-              <a:rPr lang="en-US" sz="1000" b="1" dirty="0">
-                <a:solidFill>
-                  <a:srgbClr val="CEB888"/>
-                </a:solidFill>
-                <a:latin typeface="Calibri" pitchFamily="34" charset="0"/>
-                <a:ea typeface="Calibri" pitchFamily="34" charset="-122"/>
-                <a:cs typeface="Calibri" pitchFamily="34" charset="-120"/>
-              </a:rPr>
-              <a:t>Weeks 1–2</a:t>
-            </a:r>
-            <a:endParaRPr lang="en-US" sz="1000" dirty="0"/>
+              <a:rPr lang="en-US" sz="2400" b="1">
+                <a:solidFill>
+                  <a:srgbClr val="FFFFFF"/>
+                </a:solidFill>
+                <a:latin typeface="Calibri"/>
+                <a:ea typeface="Calibri"/>
+                <a:cs typeface="Calibri"/>
+              </a:rPr>
+              <a:t>07 |Questions</a:t>
+            </a:r>
+            <a:endParaRPr lang="en-US" sz="2400"/>
           </a:p>
         </p:txBody>
       </p:sp>
       <p:sp>
         <p:nvSpPr>
-          <p:cNvPr id="9" name="Shape 7"/>
-          <p:cNvSpPr/>
-          <p:nvPr/>
-        </p:nvSpPr>
-        <p:spPr>
-          <a:xfrm>
-            <a:off x="2103120" y="868680"/>
-            <a:ext cx="6583680" cy="475488"/>
-          </a:xfrm>
-          <a:prstGeom prst="rect">
-            <a:avLst/>
-          </a:prstGeom>
-          <a:solidFill>
-            <a:srgbClr val="1A1A1A"/>
-          </a:solidFill>
-          <a:ln w="6350">
-            <a:solidFill>
-              <a:srgbClr val="333333"/>
-            </a:solidFill>
-            <a:prstDash val="solid"/>
-          </a:ln>
-        </p:spPr>
-      </p:sp>
-      <p:sp>
-        <p:nvSpPr>
-          <p:cNvPr id="10" name="Text 8"/>
-          <p:cNvSpPr/>
-          <p:nvPr/>
-        </p:nvSpPr>
-        <p:spPr>
-          <a:xfrm>
-            <a:off x="2240280" y="868680"/>
-            <a:ext cx="6400800" cy="475488"/>
+          <p:cNvPr id="10" name="TextBox 9">
+            <a:extLst>
+              <a:ext uri="{FF2B5EF4-FFF2-40B4-BE49-F238E27FC236}">
+                <a16:creationId xmlns:a16="http://schemas.microsoft.com/office/drawing/2014/main" id="{14C5C290-E2D5-0111-2905-DACED383D925}"/>
+              </a:ext>
+            </a:extLst>
+          </p:cNvPr>
+          <p:cNvSpPr txBox="1"/>
+          <p:nvPr/>
+        </p:nvSpPr>
+        <p:spPr>
+          <a:xfrm>
+            <a:off x="8877586" y="4898571"/>
+            <a:ext cx="163285" cy="246221"/>
           </a:xfrm>
           <a:prstGeom prst="rect">
             <a:avLst/>
           </a:prstGeom>
           <a:noFill/>
-          <a:ln/>
         </p:spPr>
         <p:txBody>
-          <a:bodyPr wrap="square" rtlCol="0" anchor="ctr"/>
+          <a:bodyPr rot="0" spcFirstLastPara="0" vertOverflow="overflow" horzOverflow="overflow" vert="horz" wrap="square" lIns="91440" tIns="45720" rIns="91440" bIns="45720" numCol="1" spcCol="0" rtlCol="0" fromWordArt="0" anchor="t" anchorCtr="0" forceAA="0" compatLnSpc="1">
+            <a:prstTxWarp prst="textNoShape">
+              <a:avLst/>
+            </a:prstTxWarp>
+            <a:spAutoFit/>
+          </a:bodyPr>
           <a:lstStyle/>
           <a:p>
-            <a:pPr indent="0" marL="0">
-              <a:buNone/>
-            </a:pPr>
-            <a:r>
-              <a:rPr lang="en-US" sz="1250" dirty="0">
-                <a:solidFill>
-                  <a:srgbClr val="F0E8DC"/>
-                </a:solidFill>
-                <a:latin typeface="Calibri" pitchFamily="34" charset="0"/>
-                <a:ea typeface="Calibri" pitchFamily="34" charset="-122"/>
-                <a:cs typeface="Calibri" pitchFamily="34" charset="-120"/>
-              </a:rPr>
-              <a:t>Implement Dice Loss + rebalance sampler for empty slices</a:t>
-            </a:r>
-            <a:endParaRPr lang="en-US" sz="1250" dirty="0"/>
+            <a:pPr algn="l"/>
+            <a:r>
+              <a:rPr lang="en-US" sz="1000">
+                <a:ea typeface="Calibri"/>
+                <a:cs typeface="Calibri"/>
+              </a:rPr>
+              <a:t>9</a:t>
+            </a:r>
+            <a:endParaRPr lang="en-US" sz="1000" dirty="0">
+              <a:ea typeface="Calibri"/>
+              <a:cs typeface="Calibri"/>
+            </a:endParaRPr>
           </a:p>
         </p:txBody>
       </p:sp>
-      <p:sp>
-        <p:nvSpPr>
-          <p:cNvPr id="11" name="Shape 9"/>
-          <p:cNvSpPr/>
-          <p:nvPr/>
-        </p:nvSpPr>
-        <p:spPr>
-          <a:xfrm>
-            <a:off x="274320" y="1783080"/>
-            <a:ext cx="256032" cy="256032"/>
-          </a:xfrm>
-          <a:prstGeom prst="ellipse">
-            <a:avLst/>
-          </a:prstGeom>
-          <a:solidFill>
-            <a:srgbClr val="CEB888"/>
-          </a:solidFill>
-          <a:ln w="12700">
-            <a:solidFill>
-              <a:srgbClr val="CEB888"/>
-            </a:solidFill>
-            <a:prstDash val="solid"/>
-          </a:ln>
-        </p:spPr>
-      </p:sp>
-      <p:sp>
-        <p:nvSpPr>
-          <p:cNvPr id="12" name="Shape 10"/>
-          <p:cNvSpPr/>
-          <p:nvPr/>
-        </p:nvSpPr>
-        <p:spPr>
-          <a:xfrm>
-            <a:off x="402336" y="2039112"/>
-            <a:ext cx="0" cy="548640"/>
-          </a:xfrm>
-          <a:prstGeom prst="line">
-            <a:avLst/>
-          </a:prstGeom>
-          <a:noFill/>
-          <a:ln w="12700">
-            <a:solidFill>
-              <a:srgbClr val="CEB888"/>
-            </a:solidFill>
-            <a:prstDash val="sysDash"/>
-          </a:ln>
-        </p:spPr>
-      </p:sp>
-      <p:sp>
-        <p:nvSpPr>
-          <p:cNvPr id="13" name="Shape 11"/>
-          <p:cNvSpPr/>
-          <p:nvPr/>
-        </p:nvSpPr>
-        <p:spPr>
-          <a:xfrm>
-            <a:off x="685800" y="1673352"/>
-            <a:ext cx="1325880" cy="475488"/>
-          </a:xfrm>
-          <a:prstGeom prst="rect">
-            <a:avLst/>
-          </a:prstGeom>
-          <a:solidFill>
-            <a:srgbClr val="6B1E3C"/>
-          </a:solidFill>
-          <a:ln w="12700">
-            <a:solidFill>
-              <a:srgbClr val="6B1E3C"/>
-            </a:solidFill>
-            <a:prstDash val="solid"/>
-          </a:ln>
-        </p:spPr>
-      </p:sp>
-      <p:sp>
-        <p:nvSpPr>
-          <p:cNvPr id="14" name="Text 12"/>
-          <p:cNvSpPr/>
-          <p:nvPr/>
-        </p:nvSpPr>
-        <p:spPr>
-          <a:xfrm>
-            <a:off x="685800" y="1673352"/>
-            <a:ext cx="1325880" cy="475488"/>
-          </a:xfrm>
-          <a:prstGeom prst="rect">
-            <a:avLst/>
-          </a:prstGeom>
-          <a:noFill/>
-          <a:ln/>
-        </p:spPr>
-        <p:txBody>
-          <a:bodyPr wrap="square" rtlCol="0" anchor="ctr"/>
-          <a:lstStyle/>
-          <a:p>
-            <a:pPr algn="ctr" indent="0" marL="0">
-              <a:buNone/>
-            </a:pPr>
-            <a:r>
-              <a:rPr lang="en-US" sz="1000" b="1" dirty="0">
-                <a:solidFill>
-                  <a:srgbClr val="CEB888"/>
-                </a:solidFill>
-                <a:latin typeface="Calibri" pitchFamily="34" charset="0"/>
-                <a:ea typeface="Calibri" pitchFamily="34" charset="-122"/>
-                <a:cs typeface="Calibri" pitchFamily="34" charset="-120"/>
-              </a:rPr>
-              <a:t>Weeks 3–4</a:t>
-            </a:r>
-            <a:endParaRPr lang="en-US" sz="1000" dirty="0"/>
-          </a:p>
-        </p:txBody>
-      </p:sp>
-      <p:sp>
-        <p:nvSpPr>
-          <p:cNvPr id="15" name="Shape 13"/>
-          <p:cNvSpPr/>
-          <p:nvPr/>
-        </p:nvSpPr>
-        <p:spPr>
-          <a:xfrm>
-            <a:off x="2103120" y="1673352"/>
-            <a:ext cx="6583680" cy="475488"/>
-          </a:xfrm>
-          <a:prstGeom prst="rect">
-            <a:avLst/>
-          </a:prstGeom>
-          <a:solidFill>
-            <a:srgbClr val="1A1A1A"/>
-          </a:solidFill>
-          <a:ln w="6350">
-            <a:solidFill>
-              <a:srgbClr val="333333"/>
-            </a:solidFill>
-            <a:prstDash val="solid"/>
-          </a:ln>
-        </p:spPr>
-      </p:sp>
-      <p:sp>
-        <p:nvSpPr>
-          <p:cNvPr id="16" name="Text 14"/>
-          <p:cNvSpPr/>
-          <p:nvPr/>
-        </p:nvSpPr>
-        <p:spPr>
-          <a:xfrm>
-            <a:off x="2240280" y="1673352"/>
-            <a:ext cx="6400800" cy="475488"/>
-          </a:xfrm>
-          <a:prstGeom prst="rect">
-            <a:avLst/>
-          </a:prstGeom>
-          <a:noFill/>
-          <a:ln/>
-        </p:spPr>
-        <p:txBody>
-          <a:bodyPr wrap="square" rtlCol="0" anchor="ctr"/>
-          <a:lstStyle/>
-          <a:p>
-            <a:pPr indent="0" marL="0">
-              <a:buNone/>
-            </a:pPr>
-            <a:r>
-              <a:rPr lang="en-US" sz="1250" dirty="0">
-                <a:solidFill>
-                  <a:srgbClr val="F0E8DC"/>
-                </a:solidFill>
-                <a:latin typeface="Calibri" pitchFamily="34" charset="0"/>
-                <a:ea typeface="Calibri" pitchFamily="34" charset="-122"/>
-                <a:cs typeface="Calibri" pitchFamily="34" charset="-120"/>
-              </a:rPr>
-              <a:t>Transition to 2.5D U-Net; re-run training with CLAHE + augmentations</a:t>
-            </a:r>
-            <a:endParaRPr lang="en-US" sz="1250" dirty="0"/>
-          </a:p>
-        </p:txBody>
-      </p:sp>
-      <p:sp>
-        <p:nvSpPr>
-          <p:cNvPr id="17" name="Shape 15"/>
-          <p:cNvSpPr/>
-          <p:nvPr/>
-        </p:nvSpPr>
-        <p:spPr>
-          <a:xfrm>
-            <a:off x="274320" y="2587752"/>
-            <a:ext cx="256032" cy="256032"/>
-          </a:xfrm>
-          <a:prstGeom prst="ellipse">
-            <a:avLst/>
-          </a:prstGeom>
-          <a:solidFill>
-            <a:srgbClr val="CEB888"/>
-          </a:solidFill>
-          <a:ln w="12700">
-            <a:solidFill>
-              <a:srgbClr val="CEB888"/>
-            </a:solidFill>
-            <a:prstDash val="solid"/>
-          </a:ln>
-        </p:spPr>
-      </p:sp>
-      <p:sp>
-        <p:nvSpPr>
-          <p:cNvPr id="18" name="Shape 16"/>
-          <p:cNvSpPr/>
-          <p:nvPr/>
-        </p:nvSpPr>
-        <p:spPr>
-          <a:xfrm>
-            <a:off x="402336" y="2843784"/>
-            <a:ext cx="0" cy="548640"/>
-          </a:xfrm>
-          <a:prstGeom prst="line">
-            <a:avLst/>
-          </a:prstGeom>
-          <a:noFill/>
-          <a:ln w="12700">
-            <a:solidFill>
-              <a:srgbClr val="CEB888"/>
-            </a:solidFill>
-            <a:prstDash val="sysDash"/>
-          </a:ln>
-        </p:spPr>
-      </p:sp>
-      <p:sp>
-        <p:nvSpPr>
-          <p:cNvPr id="19" name="Shape 17"/>
-          <p:cNvSpPr/>
-          <p:nvPr/>
-        </p:nvSpPr>
-        <p:spPr>
-          <a:xfrm>
-            <a:off x="685800" y="2478024"/>
-            <a:ext cx="1325880" cy="475488"/>
-          </a:xfrm>
-          <a:prstGeom prst="rect">
-            <a:avLst/>
-          </a:prstGeom>
-          <a:solidFill>
-            <a:srgbClr val="6B1E3C"/>
-          </a:solidFill>
-          <a:ln w="12700">
-            <a:solidFill>
-              <a:srgbClr val="6B1E3C"/>
-            </a:solidFill>
-            <a:prstDash val="solid"/>
-          </a:ln>
-        </p:spPr>
-      </p:sp>
-      <p:sp>
-        <p:nvSpPr>
-          <p:cNvPr id="20" name="Text 18"/>
-          <p:cNvSpPr/>
-          <p:nvPr/>
-        </p:nvSpPr>
-        <p:spPr>
-          <a:xfrm>
-            <a:off x="685800" y="2478024"/>
-            <a:ext cx="1325880" cy="475488"/>
-          </a:xfrm>
-          <a:prstGeom prst="rect">
-            <a:avLst/>
-          </a:prstGeom>
-          <a:noFill/>
-          <a:ln/>
-        </p:spPr>
-        <p:txBody>
-          <a:bodyPr wrap="square" rtlCol="0" anchor="ctr"/>
-          <a:lstStyle/>
-          <a:p>
-            <a:pPr algn="ctr" indent="0" marL="0">
-              <a:buNone/>
-            </a:pPr>
-            <a:r>
-              <a:rPr lang="en-US" sz="1000" b="1" dirty="0">
-                <a:solidFill>
-                  <a:srgbClr val="CEB888"/>
-                </a:solidFill>
-                <a:latin typeface="Calibri" pitchFamily="34" charset="0"/>
-                <a:ea typeface="Calibri" pitchFamily="34" charset="-122"/>
-                <a:cs typeface="Calibri" pitchFamily="34" charset="-120"/>
-              </a:rPr>
-              <a:t>Weeks 5–6</a:t>
-            </a:r>
-            <a:endParaRPr lang="en-US" sz="1000" dirty="0"/>
-          </a:p>
-        </p:txBody>
-      </p:sp>
-      <p:sp>
-        <p:nvSpPr>
-          <p:cNvPr id="21" name="Shape 19"/>
-          <p:cNvSpPr/>
-          <p:nvPr/>
-        </p:nvSpPr>
-        <p:spPr>
-          <a:xfrm>
-            <a:off x="2103120" y="2478024"/>
-            <a:ext cx="6583680" cy="475488"/>
-          </a:xfrm>
-          <a:prstGeom prst="rect">
-            <a:avLst/>
-          </a:prstGeom>
-          <a:solidFill>
-            <a:srgbClr val="1A1A1A"/>
-          </a:solidFill>
-          <a:ln w="6350">
-            <a:solidFill>
-              <a:srgbClr val="333333"/>
-            </a:solidFill>
-            <a:prstDash val="solid"/>
-          </a:ln>
-        </p:spPr>
-      </p:sp>
-      <p:sp>
-        <p:nvSpPr>
-          <p:cNvPr id="22" name="Text 20"/>
-          <p:cNvSpPr/>
-          <p:nvPr/>
-        </p:nvSpPr>
-        <p:spPr>
-          <a:xfrm>
-            <a:off x="2240280" y="2478024"/>
-            <a:ext cx="6400800" cy="475488"/>
-          </a:xfrm>
-          <a:prstGeom prst="rect">
-            <a:avLst/>
-          </a:prstGeom>
-          <a:noFill/>
-          <a:ln/>
-        </p:spPr>
-        <p:txBody>
-          <a:bodyPr wrap="square" rtlCol="0" anchor="ctr"/>
-          <a:lstStyle/>
-          <a:p>
-            <a:pPr indent="0" marL="0">
-              <a:buNone/>
-            </a:pPr>
-            <a:r>
-              <a:rPr lang="en-US" sz="1250" dirty="0">
-                <a:solidFill>
-                  <a:srgbClr val="F0E8DC"/>
-                </a:solidFill>
-                <a:latin typeface="Calibri" pitchFamily="34" charset="0"/>
-                <a:ea typeface="Calibri" pitchFamily="34" charset="-122"/>
-                <a:cs typeface="Calibri" pitchFamily="34" charset="-120"/>
-              </a:rPr>
-              <a:t>Evaluate on held-out set; compare Dice / Hausdorff across model versions</a:t>
-            </a:r>
-            <a:endParaRPr lang="en-US" sz="1250" dirty="0"/>
-          </a:p>
-        </p:txBody>
-      </p:sp>
-      <p:sp>
-        <p:nvSpPr>
-          <p:cNvPr id="23" name="Shape 21"/>
-          <p:cNvSpPr/>
-          <p:nvPr/>
-        </p:nvSpPr>
-        <p:spPr>
-          <a:xfrm>
-            <a:off x="274320" y="3392424"/>
-            <a:ext cx="256032" cy="256032"/>
-          </a:xfrm>
-          <a:prstGeom prst="ellipse">
-            <a:avLst/>
-          </a:prstGeom>
-          <a:solidFill>
-            <a:srgbClr val="CEB888"/>
-          </a:solidFill>
-          <a:ln w="12700">
-            <a:solidFill>
-              <a:srgbClr val="CEB888"/>
-            </a:solidFill>
-            <a:prstDash val="solid"/>
-          </a:ln>
-        </p:spPr>
-      </p:sp>
-      <p:sp>
-        <p:nvSpPr>
-          <p:cNvPr id="24" name="Shape 22"/>
-          <p:cNvSpPr/>
-          <p:nvPr/>
-        </p:nvSpPr>
-        <p:spPr>
-          <a:xfrm>
-            <a:off x="685800" y="3282696"/>
-            <a:ext cx="1325880" cy="475488"/>
-          </a:xfrm>
-          <a:prstGeom prst="rect">
-            <a:avLst/>
-          </a:prstGeom>
-          <a:solidFill>
-            <a:srgbClr val="6B1E3C"/>
-          </a:solidFill>
-          <a:ln w="12700">
-            <a:solidFill>
-              <a:srgbClr val="6B1E3C"/>
-            </a:solidFill>
-            <a:prstDash val="solid"/>
-          </a:ln>
-        </p:spPr>
-      </p:sp>
-      <p:sp>
-        <p:nvSpPr>
-          <p:cNvPr id="25" name="Text 23"/>
-          <p:cNvSpPr/>
-          <p:nvPr/>
-        </p:nvSpPr>
-        <p:spPr>
-          <a:xfrm>
-            <a:off x="685800" y="3282696"/>
-            <a:ext cx="1325880" cy="475488"/>
-          </a:xfrm>
-          <a:prstGeom prst="rect">
-            <a:avLst/>
-          </a:prstGeom>
-          <a:noFill/>
-          <a:ln/>
-        </p:spPr>
-        <p:txBody>
-          <a:bodyPr wrap="square" rtlCol="0" anchor="ctr"/>
-          <a:lstStyle/>
-          <a:p>
-            <a:pPr algn="ctr" indent="0" marL="0">
-              <a:buNone/>
-            </a:pPr>
-            <a:r>
-              <a:rPr lang="en-US" sz="1000" b="1" dirty="0">
-                <a:solidFill>
-                  <a:srgbClr val="CEB888"/>
-                </a:solidFill>
-                <a:latin typeface="Calibri" pitchFamily="34" charset="0"/>
-                <a:ea typeface="Calibri" pitchFamily="34" charset="-122"/>
-                <a:cs typeface="Calibri" pitchFamily="34" charset="-120"/>
-              </a:rPr>
-              <a:t>Final Week</a:t>
-            </a:r>
-            <a:endParaRPr lang="en-US" sz="1000" dirty="0"/>
-          </a:p>
-        </p:txBody>
-      </p:sp>
-      <p:sp>
-        <p:nvSpPr>
-          <p:cNvPr id="26" name="Shape 24"/>
-          <p:cNvSpPr/>
-          <p:nvPr/>
-        </p:nvSpPr>
-        <p:spPr>
-          <a:xfrm>
-            <a:off x="2103120" y="3282696"/>
-            <a:ext cx="6583680" cy="475488"/>
-          </a:xfrm>
-          <a:prstGeom prst="rect">
-            <a:avLst/>
-          </a:prstGeom>
-          <a:solidFill>
-            <a:srgbClr val="1A1A1A"/>
-          </a:solidFill>
-          <a:ln w="6350">
-            <a:solidFill>
-              <a:srgbClr val="333333"/>
-            </a:solidFill>
-            <a:prstDash val="solid"/>
-          </a:ln>
-        </p:spPr>
-      </p:sp>
-      <p:sp>
-        <p:nvSpPr>
-          <p:cNvPr id="27" name="Text 25"/>
-          <p:cNvSpPr/>
-          <p:nvPr/>
-        </p:nvSpPr>
-        <p:spPr>
-          <a:xfrm>
-            <a:off x="2240280" y="3282696"/>
-            <a:ext cx="6400800" cy="475488"/>
-          </a:xfrm>
-          <a:prstGeom prst="rect">
-            <a:avLst/>
-          </a:prstGeom>
-          <a:noFill/>
-          <a:ln/>
-        </p:spPr>
-        <p:txBody>
-          <a:bodyPr wrap="square" rtlCol="0" anchor="ctr"/>
-          <a:lstStyle/>
-          <a:p>
-            <a:pPr indent="0" marL="0">
-              <a:buNone/>
-            </a:pPr>
-            <a:r>
-              <a:rPr lang="en-US" sz="1250" dirty="0">
-                <a:solidFill>
-                  <a:srgbClr val="F0E8DC"/>
-                </a:solidFill>
-                <a:latin typeface="Calibri" pitchFamily="34" charset="0"/>
-                <a:ea typeface="Calibri" pitchFamily="34" charset="-122"/>
-                <a:cs typeface="Calibri" pitchFamily="34" charset="-120"/>
-              </a:rPr>
-              <a:t>Prepare submission; finalize interpretation and ablation study</a:t>
-            </a:r>
-            <a:endParaRPr lang="en-US" sz="1250" dirty="0"/>
-          </a:p>
-        </p:txBody>
-      </p:sp>
-      <p:sp>
-        <p:nvSpPr>
-          <p:cNvPr id="28" name="Shape 26"/>
-          <p:cNvSpPr/>
-          <p:nvPr/>
-        </p:nvSpPr>
-        <p:spPr>
-          <a:xfrm>
-            <a:off x="274320" y="4160520"/>
-            <a:ext cx="8595360" cy="685800"/>
-          </a:xfrm>
-          <a:prstGeom prst="rect">
-            <a:avLst/>
-          </a:prstGeom>
-          <a:solidFill>
-            <a:srgbClr val="1A1A1A"/>
-          </a:solidFill>
-          <a:ln w="9525">
-            <a:solidFill>
-              <a:srgbClr val="CEB888"/>
-            </a:solidFill>
-            <a:prstDash val="solid"/>
-          </a:ln>
-        </p:spPr>
-      </p:sp>
-      <p:sp>
-        <p:nvSpPr>
-          <p:cNvPr id="29" name="Text 27"/>
-          <p:cNvSpPr/>
-          <p:nvPr/>
-        </p:nvSpPr>
-        <p:spPr>
-          <a:xfrm>
-            <a:off x="457200" y="4160520"/>
-            <a:ext cx="8229600" cy="685800"/>
-          </a:xfrm>
-          <a:prstGeom prst="rect">
-            <a:avLst/>
-          </a:prstGeom>
-          <a:noFill/>
-          <a:ln/>
-        </p:spPr>
-        <p:txBody>
-          <a:bodyPr wrap="square" rtlCol="0" anchor="ctr"/>
-          <a:lstStyle/>
-          <a:p>
-            <a:pPr indent="0" marL="0">
-              <a:buNone/>
-            </a:pPr>
-            <a:r>
-              <a:rPr lang="en-US" sz="1250" i="1" dirty="0">
-                <a:solidFill>
-                  <a:srgbClr val="CEB888"/>
-                </a:solidFill>
-                <a:latin typeface="Calibri" pitchFamily="34" charset="0"/>
-                <a:ea typeface="Calibri" pitchFamily="34" charset="-122"/>
-                <a:cs typeface="Calibri" pitchFamily="34" charset="-120"/>
-              </a:rPr>
-              <a:t>Open Question for Instructors:  Is combined BCE + Dice loss preferable over Focal Loss for this class-imbalance setting?</a:t>
-            </a:r>
-            <a:endParaRPr lang="en-US" sz="1250" dirty="0"/>
-          </a:p>
-        </p:txBody>
-      </p:sp>
     </p:spTree>
+    <p:extLst>
+      <p:ext uri="{BB962C8B-B14F-4D97-AF65-F5344CB8AC3E}">
+        <p14:creationId xmlns:p14="http://schemas.microsoft.com/office/powerpoint/2010/main" val="3847555797"/>
+      </p:ext>
+    </p:extLst>
   </p:cSld>
   <p:clrMapOvr>
     <a:masterClrMapping/>
@@ -10444,4 +10313,299 @@
     </a:ext>
   </a:extLst>
 </a:theme>
+</file>
+
+<file path=ppt/theme/theme2.xml><?xml version="1.0" encoding="utf-8"?>
+<a:theme xmlns:a="http://schemas.openxmlformats.org/drawingml/2006/main" name="Office Theme">
+  <a:themeElements>
+    <a:clrScheme name="Office">
+      <a:dk1>
+        <a:sysClr val="windowText" lastClr="000000"/>
+      </a:dk1>
+      <a:lt1>
+        <a:sysClr val="window" lastClr="FFFFFF"/>
+      </a:lt1>
+      <a:dk2>
+        <a:srgbClr val="44546A"/>
+      </a:dk2>
+      <a:lt2>
+        <a:srgbClr val="E7E6E6"/>
+      </a:lt2>
+      <a:accent1>
+        <a:srgbClr val="4472C4"/>
+      </a:accent1>
+      <a:accent2>
+        <a:srgbClr val="ED7D31"/>
+      </a:accent2>
+      <a:accent3>
+        <a:srgbClr val="A5A5A5"/>
+      </a:accent3>
+      <a:accent4>
+        <a:srgbClr val="FFC000"/>
+      </a:accent4>
+      <a:accent5>
+        <a:srgbClr val="5B9BD5"/>
+      </a:accent5>
+      <a:accent6>
+        <a:srgbClr val="70AD47"/>
+      </a:accent6>
+      <a:hlink>
+        <a:srgbClr val="0563C1"/>
+      </a:hlink>
+      <a:folHlink>
+        <a:srgbClr val="954F72"/>
+      </a:folHlink>
+    </a:clrScheme>
+    <a:fontScheme name="Office">
+      <a:majorFont>
+        <a:latin typeface="Calibri Light" panose="020F0302020204030204"/>
+        <a:ea typeface=""/>
+        <a:cs typeface=""/>
+        <a:font script="Jpan" typeface="游ゴシック Light"/>
+        <a:font script="Hang" typeface="맑은 고딕"/>
+        <a:font script="Hans" typeface="等线 Light"/>
+        <a:font script="Hant" typeface="新細明體"/>
+        <a:font script="Arab" typeface="Times New Roman"/>
+        <a:font script="Hebr" typeface="Times New Roman"/>
+        <a:font script="Thai" typeface="Angsana New"/>
+        <a:font script="Ethi" typeface="Nyala"/>
+        <a:font script="Beng" typeface="Vrinda"/>
+        <a:font script="Gujr" typeface="Shruti"/>
+        <a:font script="Khmr" typeface="MoolBoran"/>
+        <a:font script="Knda" typeface="Tunga"/>
+        <a:font script="Guru" typeface="Raavi"/>
+        <a:font script="Cans" typeface="Euphemia"/>
+        <a:font script="Cher" typeface="Plantagenet Cherokee"/>
+        <a:font script="Yiii" typeface="Microsoft Yi Baiti"/>
+        <a:font script="Tibt" typeface="Microsoft Himalaya"/>
+        <a:font script="Thaa" typeface="MV Boli"/>
+        <a:font script="Deva" typeface="Mangal"/>
+        <a:font script="Telu" typeface="Gautami"/>
+        <a:font script="Taml" typeface="Latha"/>
+        <a:font script="Syrc" typeface="Estrangelo Edessa"/>
+        <a:font script="Orya" typeface="Kalinga"/>
+        <a:font script="Mlym" typeface="Kartika"/>
+        <a:font script="Laoo" typeface="DokChampa"/>
+        <a:font script="Sinh" typeface="Iskoola Pota"/>
+        <a:font script="Mong" typeface="Mongolian Baiti"/>
+        <a:font script="Viet" typeface="Times New Roman"/>
+        <a:font script="Uigh" typeface="Microsoft Uighur"/>
+        <a:font script="Geor" typeface="Sylfaen"/>
+        <a:font script="Armn" typeface="Arial"/>
+        <a:font script="Bugi" typeface="Leelawadee UI"/>
+        <a:font script="Bopo" typeface="Microsoft JhengHei"/>
+        <a:font script="Java" typeface="Javanese Text"/>
+        <a:font script="Lisu" typeface="Segoe UI"/>
+        <a:font script="Mymr" typeface="Myanmar Text"/>
+        <a:font script="Nkoo" typeface="Ebrima"/>
+        <a:font script="Olck" typeface="Nirmala UI"/>
+        <a:font script="Osma" typeface="Ebrima"/>
+        <a:font script="Phag" typeface="Phagspa"/>
+        <a:font script="Syrn" typeface="Estrangelo Edessa"/>
+        <a:font script="Syrj" typeface="Estrangelo Edessa"/>
+        <a:font script="Syre" typeface="Estrangelo Edessa"/>
+        <a:font script="Sora" typeface="Nirmala UI"/>
+        <a:font script="Tale" typeface="Microsoft Tai Le"/>
+        <a:font script="Talu" typeface="Microsoft New Tai Lue"/>
+        <a:font script="Tfng" typeface="Ebrima"/>
+      </a:majorFont>
+      <a:minorFont>
+        <a:latin typeface="Calibri" panose="020F0502020204030204"/>
+        <a:ea typeface=""/>
+        <a:cs typeface=""/>
+        <a:font script="Jpan" typeface="游ゴシック"/>
+        <a:font script="Hang" typeface="맑은 고딕"/>
+        <a:font script="Hans" typeface="等线"/>
+        <a:font script="Hant" typeface="新細明體"/>
+        <a:font script="Arab" typeface="Arial"/>
+        <a:font script="Hebr" typeface="Arial"/>
+        <a:font script="Thai" typeface="Cordia New"/>
+        <a:font script="Ethi" typeface="Nyala"/>
+        <a:font script="Beng" typeface="Vrinda"/>
+        <a:font script="Gujr" typeface="Shruti"/>
+        <a:font script="Khmr" typeface="DaunPenh"/>
+        <a:font script="Knda" typeface="Tunga"/>
+        <a:font script="Guru" typeface="Raavi"/>
+        <a:font script="Cans" typeface="Euphemia"/>
+        <a:font script="Cher" typeface="Plantagenet Cherokee"/>
+        <a:font script="Yiii" typeface="Microsoft Yi Baiti"/>
+        <a:font script="Tibt" typeface="Microsoft Himalaya"/>
+        <a:font script="Thaa" typeface="MV Boli"/>
+        <a:font script="Deva" typeface="Mangal"/>
+        <a:font script="Telu" typeface="Gautami"/>
+        <a:font script="Taml" typeface="Latha"/>
+        <a:font script="Syrc" typeface="Estrangelo Edessa"/>
+        <a:font script="Orya" typeface="Kalinga"/>
+        <a:font script="Mlym" typeface="Kartika"/>
+        <a:font script="Laoo" typeface="DokChampa"/>
+        <a:font script="Sinh" typeface="Iskoola Pota"/>
+        <a:font script="Mong" typeface="Mongolian Baiti"/>
+        <a:font script="Viet" typeface="Arial"/>
+        <a:font script="Uigh" typeface="Microsoft Uighur"/>
+        <a:font script="Geor" typeface="Sylfaen"/>
+        <a:font script="Armn" typeface="Arial"/>
+        <a:font script="Bugi" typeface="Leelawadee UI"/>
+        <a:font script="Bopo" typeface="Microsoft JhengHei"/>
+        <a:font script="Java" typeface="Javanese Text"/>
+        <a:font script="Lisu" typeface="Segoe UI"/>
+        <a:font script="Mymr" typeface="Myanmar Text"/>
+        <a:font script="Nkoo" typeface="Ebrima"/>
+        <a:font script="Olck" typeface="Nirmala UI"/>
+        <a:font script="Osma" typeface="Ebrima"/>
+        <a:font script="Phag" typeface="Phagspa"/>
+        <a:font script="Syrn" typeface="Estrangelo Edessa"/>
+        <a:font script="Syrj" typeface="Estrangelo Edessa"/>
+        <a:font script="Syre" typeface="Estrangelo Edessa"/>
+        <a:font script="Sora" typeface="Nirmala UI"/>
+        <a:font script="Tale" typeface="Microsoft Tai Le"/>
+        <a:font script="Talu" typeface="Microsoft New Tai Lue"/>
+        <a:font script="Tfng" typeface="Ebrima"/>
+      </a:minorFont>
+    </a:fontScheme>
+    <a:fmtScheme name="Office">
+      <a:fillStyleLst>
+        <a:solidFill>
+          <a:schemeClr val="phClr"/>
+        </a:solidFill>
+        <a:gradFill rotWithShape="1">
+          <a:gsLst>
+            <a:gs pos="0">
+              <a:schemeClr val="phClr">
+                <a:lumMod val="110000"/>
+                <a:satMod val="105000"/>
+                <a:tint val="67000"/>
+              </a:schemeClr>
+            </a:gs>
+            <a:gs pos="50000">
+              <a:schemeClr val="phClr">
+                <a:lumMod val="105000"/>
+                <a:satMod val="103000"/>
+                <a:tint val="73000"/>
+              </a:schemeClr>
+            </a:gs>
+            <a:gs pos="100000">
+              <a:schemeClr val="phClr">
+                <a:lumMod val="105000"/>
+                <a:satMod val="109000"/>
+                <a:tint val="81000"/>
+              </a:schemeClr>
+            </a:gs>
+          </a:gsLst>
+          <a:lin ang="5400000" scaled="0"/>
+        </a:gradFill>
+        <a:gradFill rotWithShape="1">
+          <a:gsLst>
+            <a:gs pos="0">
+              <a:schemeClr val="phClr">
+                <a:satMod val="103000"/>
+                <a:lumMod val="102000"/>
+                <a:tint val="94000"/>
+              </a:schemeClr>
+            </a:gs>
+            <a:gs pos="50000">
+              <a:schemeClr val="phClr">
+                <a:satMod val="110000"/>
+                <a:lumMod val="100000"/>
+                <a:shade val="100000"/>
+              </a:schemeClr>
+            </a:gs>
+            <a:gs pos="100000">
+              <a:schemeClr val="phClr">
+                <a:lumMod val="99000"/>
+                <a:satMod val="120000"/>
+                <a:shade val="78000"/>
+              </a:schemeClr>
+            </a:gs>
+          </a:gsLst>
+          <a:lin ang="5400000" scaled="0"/>
+        </a:gradFill>
+      </a:fillStyleLst>
+      <a:lnStyleLst>
+        <a:ln w="6350" cap="flat" cmpd="sng" algn="ctr">
+          <a:solidFill>
+            <a:schemeClr val="phClr"/>
+          </a:solidFill>
+          <a:prstDash val="solid"/>
+          <a:miter lim="800000"/>
+        </a:ln>
+        <a:ln w="12700" cap="flat" cmpd="sng" algn="ctr">
+          <a:solidFill>
+            <a:schemeClr val="phClr"/>
+          </a:solidFill>
+          <a:prstDash val="solid"/>
+          <a:miter lim="800000"/>
+        </a:ln>
+        <a:ln w="19050" cap="flat" cmpd="sng" algn="ctr">
+          <a:solidFill>
+            <a:schemeClr val="phClr"/>
+          </a:solidFill>
+          <a:prstDash val="solid"/>
+          <a:miter lim="800000"/>
+        </a:ln>
+      </a:lnStyleLst>
+      <a:effectStyleLst>
+        <a:effectStyle>
+          <a:effectLst/>
+        </a:effectStyle>
+        <a:effectStyle>
+          <a:effectLst/>
+        </a:effectStyle>
+        <a:effectStyle>
+          <a:effectLst>
+            <a:outerShdw blurRad="57150" dist="19050" dir="5400000" algn="ctr" rotWithShape="0">
+              <a:srgbClr val="000000">
+                <a:alpha val="63000"/>
+              </a:srgbClr>
+            </a:outerShdw>
+          </a:effectLst>
+        </a:effectStyle>
+      </a:effectStyleLst>
+      <a:bgFillStyleLst>
+        <a:solidFill>
+          <a:schemeClr val="phClr"/>
+        </a:solidFill>
+        <a:solidFill>
+          <a:schemeClr val="phClr">
+            <a:tint val="95000"/>
+            <a:satMod val="170000"/>
+          </a:schemeClr>
+        </a:solidFill>
+        <a:gradFill rotWithShape="1">
+          <a:gsLst>
+            <a:gs pos="0">
+              <a:schemeClr val="phClr">
+                <a:tint val="93000"/>
+                <a:satMod val="150000"/>
+                <a:shade val="98000"/>
+                <a:lumMod val="102000"/>
+              </a:schemeClr>
+            </a:gs>
+            <a:gs pos="50000">
+              <a:schemeClr val="phClr">
+                <a:tint val="98000"/>
+                <a:satMod val="130000"/>
+                <a:shade val="90000"/>
+                <a:lumMod val="103000"/>
+              </a:schemeClr>
+            </a:gs>
+            <a:gs pos="100000">
+              <a:schemeClr val="phClr">
+                <a:shade val="63000"/>
+                <a:satMod val="120000"/>
+              </a:schemeClr>
+            </a:gs>
+          </a:gsLst>
+          <a:lin ang="5400000" scaled="0"/>
+        </a:gradFill>
+      </a:bgFillStyleLst>
+    </a:fmtScheme>
+  </a:themeElements>
+  <a:objectDefaults/>
+  <a:extraClrSchemeLst/>
+  <a:extLst>
+    <a:ext uri="{05A4C25C-085E-4340-85A3-A5531E510DB2}">
+      <thm15:themeFamily xmlns:thm15="http://schemas.microsoft.com/office/thememl/2012/main" name="Office Theme" id="{62F939B6-93AF-4DB8-9C6B-D6C7DFDC589F}" vid="{4A3C46E8-61CC-4603-A589-7422A47A8E4A}"/>
+    </a:ext>
+  </a:extLst>
+</a:theme>
 </file>